--- a/outputs/C.P._transition_management.pptx
+++ b/outputs/C.P._transition_management.pptx
@@ -3209,8 +3209,8 @@
         </p:nvSpPr>
         <p:spPr>
           <a:xfrm>
-            <a:off x="228600" y="260000"/>
-            <a:ext cx="3842800" cy="800000"/>
+            <a:off x="228600" y="240000"/>
+            <a:ext cx="3842800" cy="1300000"/>
           </a:xfrm>
           <a:prstGeom prst="rect">
             <a:avLst/>
@@ -3225,13 +3225,29 @@
           <a:p>
             <a:pPr algn="l"/>
             <a:r>
-              <a:rPr sz="4800" b="1" i="0">
-                <a:solidFill>
-                  <a:srgbClr val="3AEDE5"/>
-                </a:solidFill>
-                <a:latin typeface="Alegreya Sans"/>
-              </a:rPr>
-              <a:t>C.P.</a:t>
+              <a:rPr sz="2800" b="0" i="0">
+                <a:solidFill>
+                  <a:srgbClr val="3AEDE5"/>
+                </a:solidFill>
+                <a:latin typeface="Alegreya Sans"/>
+              </a:rPr>
+              <a:t>Christophe</a:t>
+            </a:r>
+          </a:p>
+          <a:p>
+            <a:pPr>
+              <a:spcBef>
+                <a:spcPts val="0"/>
+              </a:spcBef>
+            </a:pPr>
+            <a:r>
+              <a:rPr sz="3200" b="1" i="0">
+                <a:solidFill>
+                  <a:srgbClr val="3AEDE5"/>
+                </a:solidFill>
+                <a:latin typeface="Alegreya Sans"/>
+              </a:rPr>
+              <a:t>POBEREJSKY</a:t>
             </a:r>
           </a:p>
         </p:txBody>
@@ -3445,7 +3461,7 @@
                 </a:solidFill>
                 <a:latin typeface="Alegreya Sans"/>
               </a:rPr>
-              <a:t>Trilingue FR / EN / ES</a:t>
+              <a:t>Data &amp; Compliance (BCBS 239, FINREP)</a:t>
             </a:r>
           </a:p>
           <a:p>
@@ -3599,7 +3615,7 @@
                 </a:solidFill>
                 <a:latin typeface="Alegreya Sans"/>
               </a:rPr>
-              <a:t>Master en Management (Grande École)</a:t>
+              <a:t>Master en Management + certifs (PRINCE2, ACAMS, RGPD)</a:t>
             </a:r>
           </a:p>
           <a:p>
@@ -3641,47 +3657,6 @@
                 <a:latin typeface="Alegreya Sans"/>
               </a:rPr>
               <a:t>AI Professional Certificate</a:t>
-            </a:r>
-          </a:p>
-          <a:p>
-            <a:pPr algn="l">
-              <a:spcAft>
-                <a:spcPts val="100"/>
-              </a:spcAft>
-            </a:pPr>
-            <a:r>
-              <a:rPr sz="1200" b="1" i="0">
-                <a:solidFill>
-                  <a:srgbClr val="3AEDE5"/>
-                </a:solidFill>
-                <a:latin typeface="Alegreya Sans"/>
-              </a:rPr>
-              <a:t>—  </a:t>
-            </a:r>
-            <a:r>
-              <a:rPr sz="1200" b="1" i="0">
-                <a:solidFill>
-                  <a:srgbClr val="FFFFFF"/>
-                </a:solidFill>
-                <a:latin typeface="Alegreya Sans"/>
-              </a:rPr>
-              <a:t>Certifs pro</a:t>
-            </a:r>
-          </a:p>
-          <a:p>
-            <a:pPr algn="l">
-              <a:spcAft>
-                <a:spcPts val="300"/>
-              </a:spcAft>
-            </a:pPr>
-            <a:r>
-              <a:rPr sz="1200" b="0" i="1">
-                <a:solidFill>
-                  <a:srgbClr val="CCD6E8"/>
-                </a:solidFill>
-                <a:latin typeface="Alegreya Sans"/>
-              </a:rPr>
-              <a:t>PRINCE2, KYC-ACAMS, RGPD (CNIL/IAPP)</a:t>
             </a:r>
           </a:p>
           <a:p>
@@ -3700,6 +3675,75 @@
                 </a:solidFill>
                 <a:latin typeface="Alegreya Sans"/>
               </a:rPr>
+              <a:t>CENTRES D'INTÉRÊT</a:t>
+            </a:r>
+          </a:p>
+          <a:p>
+            <a:pPr algn="l">
+              <a:spcAft>
+                <a:spcPts val="100"/>
+              </a:spcAft>
+            </a:pPr>
+            <a:r>
+              <a:rPr sz="1200" b="1" i="0">
+                <a:solidFill>
+                  <a:srgbClr val="3AEDE5"/>
+                </a:solidFill>
+                <a:latin typeface="Alegreya Sans"/>
+              </a:rPr>
+              <a:t>•  </a:t>
+            </a:r>
+            <a:r>
+              <a:rPr sz="1200" b="0" i="0">
+                <a:solidFill>
+                  <a:srgbClr val="FFFFFF"/>
+                </a:solidFill>
+                <a:latin typeface="Alegreya Sans"/>
+              </a:rPr>
+              <a:t>Guitare électrique &amp; chant</a:t>
+            </a:r>
+          </a:p>
+          <a:p>
+            <a:pPr algn="l">
+              <a:spcAft>
+                <a:spcPts val="100"/>
+              </a:spcAft>
+            </a:pPr>
+            <a:r>
+              <a:rPr sz="1200" b="1" i="0">
+                <a:solidFill>
+                  <a:srgbClr val="3AEDE5"/>
+                </a:solidFill>
+                <a:latin typeface="Alegreya Sans"/>
+              </a:rPr>
+              <a:t>•  </a:t>
+            </a:r>
+            <a:r>
+              <a:rPr sz="1200" b="0" i="0">
+                <a:solidFill>
+                  <a:srgbClr val="FFFFFF"/>
+                </a:solidFill>
+                <a:latin typeface="Alegreya Sans"/>
+              </a:rPr>
+              <a:t>Plongée sous-marine</a:t>
+            </a:r>
+          </a:p>
+          <a:p>
+            <a:pPr algn="l">
+              <a:spcBef>
+                <a:spcPts val="600"/>
+              </a:spcBef>
+              <a:spcAft>
+                <a:spcPts val="300"/>
+              </a:spcAft>
+            </a:pPr>
+            <a:r>
+              <a:rPr sz="1300" b="1" i="0">
+                <a:solidFill>
+                  <a:srgbClr val="3AEDE5"/>
+                </a:solidFill>
+                <a:latin typeface="Alegreya Sans"/>
+              </a:rPr>
               <a:t>ENGAGEMENTS &amp; RÉALISATIONS</a:t>
             </a:r>
           </a:p>
@@ -3725,7 +3769,7 @@
                 </a:solidFill>
                 <a:latin typeface="Alegreya Sans"/>
               </a:rPr>
-              <a:t>Cercles pros</a:t>
+              <a:t>Cercles pros &amp; expertise</a:t>
             </a:r>
             <a:r>
               <a:rPr sz="1200" b="0" i="1">
@@ -3734,41 +3778,7 @@
                 </a:solidFill>
                 <a:latin typeface="Alegreya Sans"/>
               </a:rPr>
-              <a:t> — Membre UMBREX / VERITUX</a:t>
-            </a:r>
-          </a:p>
-          <a:p>
-            <a:pPr algn="l">
-              <a:spcAft>
-                <a:spcPts val="200"/>
-              </a:spcAft>
-            </a:pPr>
-            <a:r>
-              <a:rPr sz="1200" b="1" i="0">
-                <a:solidFill>
-                  <a:srgbClr val="3AEDE5"/>
-                </a:solidFill>
-                <a:latin typeface="Alegreya Sans"/>
-              </a:rPr>
-              <a:t>• </a:t>
-            </a:r>
-            <a:r>
-              <a:rPr sz="1200" b="1" i="0">
-                <a:solidFill>
-                  <a:srgbClr val="FFFFFF"/>
-                </a:solidFill>
-                <a:latin typeface="Alegreya Sans"/>
-              </a:rPr>
-              <a:t>Intervenant</a:t>
-            </a:r>
-            <a:r>
-              <a:rPr sz="1200" b="0" i="1">
-                <a:solidFill>
-                  <a:srgbClr val="CCD6E8"/>
-                </a:solidFill>
-                <a:latin typeface="Alegreya Sans"/>
-              </a:rPr>
-              <a:t> — AlphaSights, XpertsCouncil, Les BigBoss</a:t>
+              <a:t> — UMBREX / VERITUX ; AlphaSights, GuidePoint, Les BigBoss</a:t>
             </a:r>
           </a:p>
         </p:txBody>
@@ -3823,7 +3833,7 @@
                 </a:solidFill>
                 <a:latin typeface="Alegreya Sans"/>
               </a:rPr>
-              <a:t>Ex-VP Société Générale (20 ans) | Expert Management de Transition &amp; Transformation Critique. Relais opérationnel en contexte de vide managérial, fusion ou post-cybercrise.</a:t>
+              <a:t>Ex-VP Société Générale (20 ans) | Expert Management de Transition &amp; Transformation Critique. Relais opérationnel en contexte de vide managérial, fusion ou post-cybercrise. Dimensions C-Level (budgets &gt; 10 M€, reporting COMEX).</a:t>
             </a:r>
           </a:p>
           <a:p>
@@ -3876,7 +3886,7 @@
                 </a:solidFill>
                 <a:latin typeface="Alegreya Sans"/>
               </a:rPr>
-              <a:t> — Manager de Transition — COO Middle-Office</a:t>
+              <a:t> — Manager de Transition — COO Middle-Office Corporate &amp; Privé</a:t>
             </a:r>
             <a:r>
               <a:rPr sz="1200" b="0" i="1">
@@ -3910,7 +3920,7 @@
                 </a:solidFill>
                 <a:latin typeface="Alegreya Sans"/>
               </a:rPr>
-              <a:t>Relais managérial d'urgence : prise en main du périmètre post-fusion des middle-offices, stabilisation des équipes aux côtés de la nouvelle Directrice.</a:t>
+              <a:t>Transition flash post-fusion des middle-offices : relais managérial d'urgence, stabilisation des équipes.</a:t>
             </a:r>
           </a:p>
           <a:p>
@@ -3935,7 +3945,7 @@
                 </a:solidFill>
                 <a:latin typeface="Alegreya Sans"/>
               </a:rPr>
-              <a:t>Sécurisation opérationnelle : audit des frictions ; feuille de route à 1,5 mois, dashboards KPI quotidiens.</a:t>
+              <a:t>Sécurisation opérationnelle et déploiement de la cible ; feuille de route à 1,5 mois, dashboards KPI quotidiens.</a:t>
             </a:r>
           </a:p>
           <a:p>
@@ -3960,7 +3970,7 @@
                 </a:solidFill>
                 <a:latin typeface="Alegreya Sans"/>
               </a:rPr>
-              <a:t>Groupe Indigo</a:t>
+              <a:t>Groupe Indigo &amp; Conseil Départemental 93</a:t>
             </a:r>
             <a:r>
               <a:rPr sz="1200" b="0" i="0">
@@ -3969,7 +3979,7 @@
                 </a:solidFill>
                 <a:latin typeface="Alegreya Sans"/>
               </a:rPr>
-              <a:t> — Pilotage stratégique COMEX — Refonte gouvernance IT</a:t>
+              <a:t> — Conseil &amp; pilotage stratégique</a:t>
             </a:r>
             <a:r>
               <a:rPr sz="1200" b="0" i="1">
@@ -3978,7 +3988,7 @@
                 </a:solidFill>
                 <a:latin typeface="Alegreya Sans"/>
               </a:rPr>
-              <a:t>  (2025 (S2))</a:t>
+              <a:t>  (2025)</a:t>
             </a:r>
           </a:p>
           <a:p>
@@ -4003,7 +4013,7 @@
                 </a:solidFill>
                 <a:latin typeface="Alegreya Sans"/>
               </a:rPr>
-              <a:t>Diagnostic global du SI (organisation, processus, infrastructures, data, compétences) dans un contexte de reconstruction post-cyber.</a:t>
+              <a:t>Indigo (post-cyber) : diagnostic global du SI, vision cible du numérique, plan d'investissement IT pluriannuel et cadre de gouvernance.</a:t>
             </a:r>
           </a:p>
           <a:p>
@@ -4028,7 +4038,7 @@
                 </a:solidFill>
                 <a:latin typeface="Alegreya Sans"/>
               </a:rPr>
-              <a:t>Plan d'investissement IT pluriannuel + cadre de gouvernance ; livrables exécutifs : roadmap, cartographies, organigrammes cibles.</a:t>
+              <a:t>CD 93 : cadrage du programme Relation Usager — convergence de 8 projets Microsoft Dynamics, gouvernance et feuille de route pluriannuelle.</a:t>
             </a:r>
           </a:p>
           <a:p>
@@ -4096,7 +4106,7 @@
                 </a:solidFill>
                 <a:latin typeface="Alegreya Sans"/>
               </a:rPr>
-              <a:t>BPCE (projet SIGMA) : gestion IAM, pilote pour la standardisation des habilitations sur le socle commun Groupe.</a:t>
+              <a:t>BPCE (projet SIGMA) : gestion IAM, pilote pour la standardisation des habilitations du socle commun Groupe ; formation et déploiement Groupe.</a:t>
             </a:r>
           </a:p>
           <a:p>
@@ -4121,7 +4131,7 @@
                 </a:solidFill>
                 <a:latin typeface="Alegreya Sans"/>
               </a:rPr>
-              <a:t>Crédit Agricole CIB : taskforce Cash Management / Correspondent Banking (20+ consultants) ; PNB &gt; 200 K€.</a:t>
+              <a:t>Crédit Agricole CIB : taskforce Cash Management / Correspondent Banking (20+ consultants) ; développement Banque-Assurance (PNB &gt; 200 K€).</a:t>
             </a:r>
           </a:p>
           <a:p>
@@ -4155,7 +4165,7 @@
                 </a:solidFill>
                 <a:latin typeface="Alegreya Sans"/>
               </a:rPr>
-              <a:t> — 20 ans — Rôles multiples (KYC, VP B2B, Cash Mgmt)</a:t>
+              <a:t> — 20 ans — Resp. KYC, VP Marketing B2B, Cash Management</a:t>
             </a:r>
             <a:r>
               <a:rPr sz="1200" b="0" i="1">
@@ -4189,7 +4199,7 @@
                 </a:solidFill>
                 <a:latin typeface="Alegreya Sans"/>
               </a:rPr>
-              <a:t>KYC (2019-22) : TOM digitalisation, Blockchain/IA — fiabilisation à +90 % sur 3 CSP ; réduction du risque opérationnel.</a:t>
+              <a:t>KYC (2019-22) : TOM digitalisation, Blockchain/IA — fiabilisation à +90 % sur 3 CSP.</a:t>
             </a:r>
           </a:p>
           <a:p>
@@ -4214,7 +4224,7 @@
                 </a:solidFill>
                 <a:latin typeface="Alegreya Sans"/>
               </a:rPr>
-              <a:t>VP B2B &amp; Digital (2007-19) : rollout CRM MS Dynamics international (1 000 users) ; +30 % PNB Cash Management.</a:t>
+              <a:t>VP B2B &amp; Digital (2007-19) : CRM MS Dynamics international (1 000 users) ; +30 % de PNB Cash Management.</a:t>
             </a:r>
           </a:p>
         </p:txBody>
@@ -4436,8 +4446,8 @@
         </p:nvSpPr>
         <p:spPr>
           <a:xfrm>
-            <a:off x="228600" y="260000"/>
-            <a:ext cx="3842800" cy="800000"/>
+            <a:off x="228600" y="240000"/>
+            <a:ext cx="3842800" cy="1300000"/>
           </a:xfrm>
           <a:prstGeom prst="rect">
             <a:avLst/>
@@ -4452,13 +4462,29 @@
           <a:p>
             <a:pPr algn="l"/>
             <a:r>
-              <a:rPr sz="4800" b="1" i="0">
-                <a:solidFill>
-                  <a:srgbClr val="3AEDE5"/>
-                </a:solidFill>
-                <a:latin typeface="Alegreya Sans"/>
-              </a:rPr>
-              <a:t>C.P.</a:t>
+              <a:rPr sz="2800" b="0" i="0">
+                <a:solidFill>
+                  <a:srgbClr val="3AEDE5"/>
+                </a:solidFill>
+                <a:latin typeface="Alegreya Sans"/>
+              </a:rPr>
+              <a:t>Christophe</a:t>
+            </a:r>
+          </a:p>
+          <a:p>
+            <a:pPr>
+              <a:spcBef>
+                <a:spcPts val="0"/>
+              </a:spcBef>
+            </a:pPr>
+            <a:r>
+              <a:rPr sz="3200" b="1" i="0">
+                <a:solidFill>
+                  <a:srgbClr val="3AEDE5"/>
+                </a:solidFill>
+                <a:latin typeface="Alegreya Sans"/>
+              </a:rPr>
+              <a:t>POBEREJSKY</a:t>
             </a:r>
           </a:p>
         </p:txBody>
@@ -4672,7 +4698,7 @@
                 </a:solidFill>
                 <a:latin typeface="Alegreya Sans"/>
               </a:rPr>
-              <a:t>Trilingual FR / EN / ES</a:t>
+              <a:t>Data &amp; Compliance (BCBS 239, FINREP)</a:t>
             </a:r>
           </a:p>
           <a:p>
@@ -4826,7 +4852,7 @@
                 </a:solidFill>
                 <a:latin typeface="Alegreya Sans"/>
               </a:rPr>
-              <a:t>Master in Management</a:t>
+              <a:t>Master in Management + certs (PRINCE2, ACAMS, GDPR)</a:t>
             </a:r>
           </a:p>
           <a:p>
@@ -4868,47 +4894,6 @@
                 <a:latin typeface="Alegreya Sans"/>
               </a:rPr>
               <a:t>AI Professional Certificate</a:t>
-            </a:r>
-          </a:p>
-          <a:p>
-            <a:pPr algn="l">
-              <a:spcAft>
-                <a:spcPts val="100"/>
-              </a:spcAft>
-            </a:pPr>
-            <a:r>
-              <a:rPr sz="1200" b="1" i="0">
-                <a:solidFill>
-                  <a:srgbClr val="3AEDE5"/>
-                </a:solidFill>
-                <a:latin typeface="Alegreya Sans"/>
-              </a:rPr>
-              <a:t>—  </a:t>
-            </a:r>
-            <a:r>
-              <a:rPr sz="1200" b="1" i="0">
-                <a:solidFill>
-                  <a:srgbClr val="FFFFFF"/>
-                </a:solidFill>
-                <a:latin typeface="Alegreya Sans"/>
-              </a:rPr>
-              <a:t>Certifications</a:t>
-            </a:r>
-          </a:p>
-          <a:p>
-            <a:pPr algn="l">
-              <a:spcAft>
-                <a:spcPts val="300"/>
-              </a:spcAft>
-            </a:pPr>
-            <a:r>
-              <a:rPr sz="1200" b="0" i="1">
-                <a:solidFill>
-                  <a:srgbClr val="CCD6E8"/>
-                </a:solidFill>
-                <a:latin typeface="Alegreya Sans"/>
-              </a:rPr>
-              <a:t>PRINCE2, KYC-ACAMS, GDPR (CNIL/IAPP)</a:t>
             </a:r>
           </a:p>
           <a:p>
@@ -4927,6 +4912,75 @@
                 </a:solidFill>
                 <a:latin typeface="Alegreya Sans"/>
               </a:rPr>
+              <a:t>INTERESTS</a:t>
+            </a:r>
+          </a:p>
+          <a:p>
+            <a:pPr algn="l">
+              <a:spcAft>
+                <a:spcPts val="100"/>
+              </a:spcAft>
+            </a:pPr>
+            <a:r>
+              <a:rPr sz="1200" b="1" i="0">
+                <a:solidFill>
+                  <a:srgbClr val="3AEDE5"/>
+                </a:solidFill>
+                <a:latin typeface="Alegreya Sans"/>
+              </a:rPr>
+              <a:t>•  </a:t>
+            </a:r>
+            <a:r>
+              <a:rPr sz="1200" b="0" i="0">
+                <a:solidFill>
+                  <a:srgbClr val="FFFFFF"/>
+                </a:solidFill>
+                <a:latin typeface="Alegreya Sans"/>
+              </a:rPr>
+              <a:t>Electric guitar &amp; singing</a:t>
+            </a:r>
+          </a:p>
+          <a:p>
+            <a:pPr algn="l">
+              <a:spcAft>
+                <a:spcPts val="100"/>
+              </a:spcAft>
+            </a:pPr>
+            <a:r>
+              <a:rPr sz="1200" b="1" i="0">
+                <a:solidFill>
+                  <a:srgbClr val="3AEDE5"/>
+                </a:solidFill>
+                <a:latin typeface="Alegreya Sans"/>
+              </a:rPr>
+              <a:t>•  </a:t>
+            </a:r>
+            <a:r>
+              <a:rPr sz="1200" b="0" i="0">
+                <a:solidFill>
+                  <a:srgbClr val="FFFFFF"/>
+                </a:solidFill>
+                <a:latin typeface="Alegreya Sans"/>
+              </a:rPr>
+              <a:t>Scuba diving</a:t>
+            </a:r>
+          </a:p>
+          <a:p>
+            <a:pPr algn="l">
+              <a:spcBef>
+                <a:spcPts val="600"/>
+              </a:spcBef>
+              <a:spcAft>
+                <a:spcPts val="300"/>
+              </a:spcAft>
+            </a:pPr>
+            <a:r>
+              <a:rPr sz="1300" b="1" i="0">
+                <a:solidFill>
+                  <a:srgbClr val="3AEDE5"/>
+                </a:solidFill>
+                <a:latin typeface="Alegreya Sans"/>
+              </a:rPr>
               <a:t>ENGAGEMENTS &amp; ACHIEVEMENTS</a:t>
             </a:r>
           </a:p>
@@ -4952,7 +5006,7 @@
                 </a:solidFill>
                 <a:latin typeface="Alegreya Sans"/>
               </a:rPr>
-              <a:t>Professional circles</a:t>
+              <a:t>Professional circles &amp; expert calls</a:t>
             </a:r>
             <a:r>
               <a:rPr sz="1200" b="0" i="1">
@@ -4961,41 +5015,7 @@
                 </a:solidFill>
                 <a:latin typeface="Alegreya Sans"/>
               </a:rPr>
-              <a:t> — Member UMBREX / VERITUX</a:t>
-            </a:r>
-          </a:p>
-          <a:p>
-            <a:pPr algn="l">
-              <a:spcAft>
-                <a:spcPts val="200"/>
-              </a:spcAft>
-            </a:pPr>
-            <a:r>
-              <a:rPr sz="1200" b="1" i="0">
-                <a:solidFill>
-                  <a:srgbClr val="3AEDE5"/>
-                </a:solidFill>
-                <a:latin typeface="Alegreya Sans"/>
-              </a:rPr>
-              <a:t>• </a:t>
-            </a:r>
-            <a:r>
-              <a:rPr sz="1200" b="1" i="0">
-                <a:solidFill>
-                  <a:srgbClr val="FFFFFF"/>
-                </a:solidFill>
-                <a:latin typeface="Alegreya Sans"/>
-              </a:rPr>
-              <a:t>Speaker</a:t>
-            </a:r>
-            <a:r>
-              <a:rPr sz="1200" b="0" i="1">
-                <a:solidFill>
-                  <a:srgbClr val="CCD6E8"/>
-                </a:solidFill>
-                <a:latin typeface="Alegreya Sans"/>
-              </a:rPr>
-              <a:t> — AlphaSights, XpertsCouncil, Les BigBoss</a:t>
+              <a:t> — UMBREX / VERITUX; AlphaSights, GuidePoint, Les BigBoss</a:t>
             </a:r>
           </a:p>
         </p:txBody>
@@ -5050,7 +5070,7 @@
                 </a:solidFill>
                 <a:latin typeface="Alegreya Sans"/>
               </a:rPr>
-              <a:t>Ex-VP Société Générale (20 years) | Expert Transition Management &amp; Critical Transformation. Operational relay in management vacuum, merger or post-cyberattack contexts.</a:t>
+              <a:t>Ex-VP Société Générale (20 years) | Expert Transition Management &amp; Critical Transformation. Operational relay in management vacuum, merger or post-cyberattack contexts. C-Level dimensions (budgets &gt; €10M, COMEX reporting).</a:t>
             </a:r>
           </a:p>
           <a:p>
@@ -5103,7 +5123,7 @@
                 </a:solidFill>
                 <a:latin typeface="Alegreya Sans"/>
               </a:rPr>
-              <a:t> — Transition Manager — COO Middle-Office</a:t>
+              <a:t> — Transition Manager — COO Middle-Office Corporate &amp; Private</a:t>
             </a:r>
             <a:r>
               <a:rPr sz="1200" b="0" i="1">
@@ -5137,7 +5157,7 @@
                 </a:solidFill>
                 <a:latin typeface="Alegreya Sans"/>
               </a:rPr>
-              <a:t>Emergency management relay: takeover of the post-merger middle-office perimeter, stabilisation of teams alongside the new Director.</a:t>
+              <a:t>Flash post-merger transition of middle-offices: emergency management relay, team stabilization.</a:t>
             </a:r>
           </a:p>
           <a:p>
@@ -5162,7 +5182,7 @@
                 </a:solidFill>
                 <a:latin typeface="Alegreya Sans"/>
               </a:rPr>
-              <a:t>Operational security: friction points audit; 1.5-month roadmap, daily KPI dashboards.</a:t>
+              <a:t>Operational security and target deployment; 1.5-month roadmap, daily KPI dashboards.</a:t>
             </a:r>
           </a:p>
           <a:p>
@@ -5187,7 +5207,7 @@
                 </a:solidFill>
                 <a:latin typeface="Alegreya Sans"/>
               </a:rPr>
-              <a:t>Groupe Indigo</a:t>
+              <a:t>Groupe Indigo &amp; Seine-Saint-Denis County</a:t>
             </a:r>
             <a:r>
               <a:rPr sz="1200" b="0" i="0">
@@ -5196,7 +5216,7 @@
                 </a:solidFill>
                 <a:latin typeface="Alegreya Sans"/>
               </a:rPr>
-              <a:t> — Strategic piloting COMEX — IT governance overhaul</a:t>
+              <a:t> — Strategic advisory &amp; scoping</a:t>
             </a:r>
             <a:r>
               <a:rPr sz="1200" b="0" i="1">
@@ -5205,7 +5225,7 @@
                 </a:solidFill>
                 <a:latin typeface="Alegreya Sans"/>
               </a:rPr>
-              <a:t>  (2025 (H2))</a:t>
+              <a:t>  (2025)</a:t>
             </a:r>
           </a:p>
           <a:p>
@@ -5230,7 +5250,7 @@
                 </a:solidFill>
                 <a:latin typeface="Alegreya Sans"/>
               </a:rPr>
-              <a:t>Global IT diagnosis (organisation, processes, infrastructure, data, competencies) in a post-cyber reconstruction context.</a:t>
+              <a:t>Indigo (post-cyber): global IT diagnosis, target digital vision, multi-year IT investment plan and governance framework.</a:t>
             </a:r>
           </a:p>
           <a:p>
@@ -5255,7 +5275,7 @@
                 </a:solidFill>
                 <a:latin typeface="Alegreya Sans"/>
               </a:rPr>
-              <a:t>Multi-year IT investment plan + governance framework; executive deliverables: roadmap, mappings, target org charts.</a:t>
+              <a:t>CD 93: scoping of the Citizen Relationship program — convergence of 8 Microsoft Dynamics projects, governance and multi-year roadmap.</a:t>
             </a:r>
           </a:p>
           <a:p>
@@ -5323,7 +5343,7 @@
                 </a:solidFill>
                 <a:latin typeface="Alegreya Sans"/>
               </a:rPr>
-              <a:t>BPCE (SIGMA project): IAM management, pilot for the standardisation of authorisations on the Group common foundation.</a:t>
+              <a:t>BPCE (SIGMA project): IAM management, pilot for standardizing authorizations on the Group common foundation; training and Group-level deployment.</a:t>
             </a:r>
           </a:p>
           <a:p>
@@ -5348,7 +5368,7 @@
                 </a:solidFill>
                 <a:latin typeface="Alegreya Sans"/>
               </a:rPr>
-              <a:t>Crédit Agricole CIB: taskforce Cash Management / Correspondent Banking (20+ consultants); PNB &gt; 200K€.</a:t>
+              <a:t>Crédit Agricole CIB: supervision of a Cash Management / Correspondent Banking taskforce (20+ consultants); Banking-Insurance development (PNB &gt; €200K).</a:t>
             </a:r>
           </a:p>
           <a:p>
@@ -5382,7 +5402,7 @@
                 </a:solidFill>
                 <a:latin typeface="Alegreya Sans"/>
               </a:rPr>
-              <a:t> — 20 years — Multiple roles (KYC, VP B2B, Cash Mgmt)</a:t>
+              <a:t> — 20 years — KYC Lead, VP B2B Marketing, Cash Management</a:t>
             </a:r>
             <a:r>
               <a:rPr sz="1200" b="0" i="1">
@@ -5416,7 +5436,7 @@
                 </a:solidFill>
                 <a:latin typeface="Alegreya Sans"/>
               </a:rPr>
-              <a:t>KYC (2019-22): TOM for KYC digitalisation, Blockchain/AI — reliability to 90%+ across 3 SSCs; drastic reduction of operational risk.</a:t>
+              <a:t>KYC (2019-22): TOM for KYC digitalization, Blockchain/AI — reliability to 90%+ across 3 SSCs.</a:t>
             </a:r>
           </a:p>
           <a:p>
@@ -5441,7 +5461,7 @@
                 </a:solidFill>
                 <a:latin typeface="Alegreya Sans"/>
               </a:rPr>
-              <a:t>VP B2B &amp; Digital (2007-19): international MS Dynamics CRM rollout (1,000 users); +30% PNB in Cash Management.</a:t>
+              <a:t>VP B2B &amp; Digital (2007-19): international MS Dynamics CRM (1,000 users); +30% PNB in Cash Management.</a:t>
             </a:r>
           </a:p>
         </p:txBody>

--- a/outputs/C.P._transition_management.pptx
+++ b/outputs/C.P._transition_management.pptx
@@ -3852,7 +3852,7 @@
                 </a:solidFill>
                 <a:latin typeface="Alegreya Sans"/>
               </a:rPr>
-              <a:t>EXPÉRIENCE PROFESSIONNELLE</a:t>
+              <a:t>PRINCIPALES EXPÉRIENCES PROFESSIONNELLES</a:t>
             </a:r>
           </a:p>
           <a:p>
@@ -5089,7 +5089,7 @@
                 </a:solidFill>
                 <a:latin typeface="Alegreya Sans"/>
               </a:rPr>
-              <a:t>PROFESSIONAL EXPERIENCE</a:t>
+              <a:t>MAIN PROFESSIONAL EXPERIENCE</a:t>
             </a:r>
           </a:p>
           <a:p>

--- a/outputs/C.P._transition_management.pptx
+++ b/outputs/C.P._transition_management.pptx
@@ -7,6 +7,9 @@
   <p:sldIdLst>
     <p:sldId id="256" r:id="rId7"/>
     <p:sldId id="257" r:id="rId8"/>
+    <p:sldId id="258" r:id="rId9"/>
+    <p:sldId id="259" r:id="rId10"/>
+    <p:sldId id="260" r:id="rId11"/>
   </p:sldIdLst>
   <p:sldSz cx="12192000" cy="6858000" type="screen4x3"/>
   <p:notesSz cx="6858000" cy="9144000"/>
@@ -3361,7 +3364,7 @@
                 </a:solidFill>
                 <a:latin typeface="Alegreya Sans"/>
               </a:rPr>
-              <a:t>Pilotage programmes IT (cadrage, PMO)</a:t>
+              <a:t>Pilotage de programmes et de projets IT : cadrage, gouvernance, feuille de route, PMO</a:t>
             </a:r>
           </a:p>
           <a:p>
@@ -3386,7 +3389,7 @@
                 </a:solidFill>
                 <a:latin typeface="Alegreya Sans"/>
               </a:rPr>
-              <a:t>Paiements, Cash Management, ERP, CRM, KYC</a:t>
+              <a:t>Secteurs : banque, secteur public, mobilités urbaines</a:t>
             </a:r>
           </a:p>
           <a:p>
@@ -3411,6 +3414,31 @@
                 </a:solidFill>
                 <a:latin typeface="Alegreya Sans"/>
               </a:rPr>
+              <a:t>Systèmes et solutions : paiements, cash management, ERP, CRM, Business Intelligence, KYC</a:t>
+            </a:r>
+          </a:p>
+          <a:p>
+            <a:pPr algn="l">
+              <a:spcAft>
+                <a:spcPts val="100"/>
+              </a:spcAft>
+            </a:pPr>
+            <a:r>
+              <a:rPr sz="1200" b="1" i="0">
+                <a:solidFill>
+                  <a:srgbClr val="3AEDE5"/>
+                </a:solidFill>
+                <a:latin typeface="Alegreya Sans"/>
+              </a:rPr>
+              <a:t>•  </a:t>
+            </a:r>
+            <a:r>
+              <a:rPr sz="1200" b="0" i="0">
+                <a:solidFill>
+                  <a:srgbClr val="FFFFFF"/>
+                </a:solidFill>
+                <a:latin typeface="Alegreya Sans"/>
+              </a:rPr>
               <a:t>Schéma directeur IT &amp; cybersécurité</a:t>
             </a:r>
           </a:p>
@@ -3436,7 +3464,7 @@
                 </a:solidFill>
                 <a:latin typeface="Alegreya Sans"/>
               </a:rPr>
-              <a:t>Management &amp; conduite du changement</a:t>
+              <a:t>Gouvernance, Data &amp; Compliance : KYC, BCBS 239, FINREP, Big Data (Hadoop)</a:t>
             </a:r>
           </a:p>
           <a:p>
@@ -3461,7 +3489,7 @@
                 </a:solidFill>
                 <a:latin typeface="Alegreya Sans"/>
               </a:rPr>
-              <a:t>Data &amp; Compliance (BCBS 239, FINREP)</a:t>
+              <a:t>Management &amp; accompagnement : formation d'équipes, conduite du changement</a:t>
             </a:r>
           </a:p>
           <a:p>
@@ -3615,7 +3643,7 @@
                 </a:solidFill>
                 <a:latin typeface="Alegreya Sans"/>
               </a:rPr>
-              <a:t>Master en Management + certifs (PRINCE2, ACAMS, RGPD)</a:t>
+              <a:t>Master en Management — cursus Grande École</a:t>
             </a:r>
           </a:p>
           <a:p>
@@ -3661,21 +3689,34 @@
           </a:p>
           <a:p>
             <a:pPr algn="l">
-              <a:spcBef>
-                <a:spcPts val="600"/>
-              </a:spcBef>
+              <a:spcAft>
+                <a:spcPts val="100"/>
+              </a:spcAft>
+            </a:pPr>
+            <a:r>
+              <a:rPr sz="1200" b="1" i="0">
+                <a:solidFill>
+                  <a:srgbClr val="FFFFFF"/>
+                </a:solidFill>
+                <a:latin typeface="Alegreya Sans"/>
+              </a:rPr>
+              <a:t>Certifications</a:t>
+            </a:r>
+          </a:p>
+          <a:p>
+            <a:pPr algn="l">
               <a:spcAft>
                 <a:spcPts val="300"/>
               </a:spcAft>
             </a:pPr>
             <a:r>
-              <a:rPr sz="1300" b="1" i="0">
-                <a:solidFill>
-                  <a:srgbClr val="3AEDE5"/>
-                </a:solidFill>
-                <a:latin typeface="Alegreya Sans"/>
-              </a:rPr>
-              <a:t>CENTRES D'INTÉRÊT</a:t>
+              <a:rPr sz="1200" b="0" i="1">
+                <a:solidFill>
+                  <a:srgbClr val="CCD6E8"/>
+                </a:solidFill>
+                <a:latin typeface="Alegreya Sans"/>
+              </a:rPr>
+              <a:t>PRINCE2 Practitioner · Microsoft PL-900</a:t>
             </a:r>
           </a:p>
           <a:p>
@@ -3687,98 +3728,27 @@
             <a:r>
               <a:rPr sz="1200" b="1" i="0">
                 <a:solidFill>
-                  <a:srgbClr val="3AEDE5"/>
-                </a:solidFill>
-                <a:latin typeface="Alegreya Sans"/>
-              </a:rPr>
-              <a:t>•  </a:t>
-            </a:r>
-            <a:r>
-              <a:rPr sz="1200" b="0" i="0">
-                <a:solidFill>
-                  <a:srgbClr val="FFFFFF"/>
-                </a:solidFill>
-                <a:latin typeface="Alegreya Sans"/>
-              </a:rPr>
-              <a:t>Guitare électrique &amp; chant</a:t>
+                  <a:srgbClr val="FFFFFF"/>
+                </a:solidFill>
+                <a:latin typeface="Alegreya Sans"/>
+              </a:rPr>
+              <a:t>Conformité</a:t>
             </a:r>
           </a:p>
           <a:p>
             <a:pPr algn="l">
               <a:spcAft>
-                <a:spcPts val="100"/>
-              </a:spcAft>
-            </a:pPr>
-            <a:r>
-              <a:rPr sz="1200" b="1" i="0">
-                <a:solidFill>
-                  <a:srgbClr val="3AEDE5"/>
-                </a:solidFill>
-                <a:latin typeface="Alegreya Sans"/>
-              </a:rPr>
-              <a:t>•  </a:t>
-            </a:r>
-            <a:r>
-              <a:rPr sz="1200" b="0" i="0">
-                <a:solidFill>
-                  <a:srgbClr val="FFFFFF"/>
-                </a:solidFill>
-                <a:latin typeface="Alegreya Sans"/>
-              </a:rPr>
-              <a:t>Plongée sous-marine</a:t>
-            </a:r>
-          </a:p>
-          <a:p>
-            <a:pPr algn="l">
-              <a:spcBef>
-                <a:spcPts val="600"/>
-              </a:spcBef>
-              <a:spcAft>
                 <a:spcPts val="300"/>
               </a:spcAft>
             </a:pPr>
             <a:r>
-              <a:rPr sz="1300" b="1" i="0">
-                <a:solidFill>
-                  <a:srgbClr val="3AEDE5"/>
-                </a:solidFill>
-                <a:latin typeface="Alegreya Sans"/>
-              </a:rPr>
-              <a:t>ENGAGEMENTS &amp; RÉALISATIONS</a:t>
-            </a:r>
-          </a:p>
-          <a:p>
-            <a:pPr algn="l">
-              <a:spcAft>
-                <a:spcPts val="200"/>
-              </a:spcAft>
-            </a:pPr>
-            <a:r>
-              <a:rPr sz="1200" b="1" i="0">
-                <a:solidFill>
-                  <a:srgbClr val="3AEDE5"/>
-                </a:solidFill>
-                <a:latin typeface="Alegreya Sans"/>
-              </a:rPr>
-              <a:t>• </a:t>
-            </a:r>
-            <a:r>
-              <a:rPr sz="1200" b="1" i="0">
-                <a:solidFill>
-                  <a:srgbClr val="FFFFFF"/>
-                </a:solidFill>
-                <a:latin typeface="Alegreya Sans"/>
-              </a:rPr>
-              <a:t>Cercles pros &amp; expertise</a:t>
-            </a:r>
-            <a:r>
               <a:rPr sz="1200" b="0" i="1">
                 <a:solidFill>
                   <a:srgbClr val="CCD6E8"/>
                 </a:solidFill>
                 <a:latin typeface="Alegreya Sans"/>
               </a:rPr>
-              <a:t> — UMBREX / VERITUX ; AlphaSights, GuidePoint, Les BigBoss</a:t>
+              <a:t>KYC &amp; Due Diligence (ACAMS) · RGPD (CNIL et IAPP)</a:t>
             </a:r>
           </a:p>
         </p:txBody>
@@ -3833,7 +3803,7 @@
                 </a:solidFill>
                 <a:latin typeface="Alegreya Sans"/>
               </a:rPr>
-              <a:t>Ex-VP Société Générale (20 ans) | Expert Management de Transition &amp; Transformation Critique. Relais opérationnel en contexte de vide managérial, fusion ou post-cybercrise. Dimensions C-Level (budgets &gt; 10 M€, reporting COMEX).</a:t>
+              <a:t>Ex-VP Société Générale (20 ans), expert du management de transition et des transformations critiques. Relais et gestion de crise : prise en main immédiate de directions opérationnelles (middle-office, IT) en contexte de vide managérial, de fusion ou de post-cybercrise — diagnostic 360, restructuration d'équipes et définition de Target Operating Models. Gouvernance, Data &amp; Compliance : sécurisation des risques opérationnels et mise en conformité réglementaire (KYC, BCBS 239, FINREP). Dimensions C-Level : budgets &gt; 10 M€, reporting Directoire / COMEX, direction de taskforces (+20 consultants) et de centres de services internationaux.</a:t>
             </a:r>
           </a:p>
           <a:p>
@@ -3886,7 +3856,7 @@
                 </a:solidFill>
                 <a:latin typeface="Alegreya Sans"/>
               </a:rPr>
-              <a:t> — Manager de Transition — COO Middle-Office Corporate &amp; Privé</a:t>
+              <a:t> — Manager de Transition — Directeur Opérationnel Middle-Office Corporate &amp; Privé</a:t>
             </a:r>
             <a:r>
               <a:rPr sz="1200" b="0" i="1">
@@ -3895,7 +3865,7 @@
                 </a:solidFill>
                 <a:latin typeface="Alegreya Sans"/>
               </a:rPr>
-              <a:t>  (Mai — Juin 2026)</a:t>
+              <a:t>  (Depuis mai 2026)</a:t>
             </a:r>
           </a:p>
           <a:p>
@@ -3920,7 +3890,7 @@
                 </a:solidFill>
                 <a:latin typeface="Alegreya Sans"/>
               </a:rPr>
-              <a:t>Transition flash post-fusion des middle-offices : relais managérial d'urgence, stabilisation des équipes.</a:t>
+              <a:t>Mission de transition flash visant à stabiliser l'organisation et piloter la convergence post-fusion des middle-offices de la Banque Judiciaire et de la Banque des Entreprises.</a:t>
             </a:r>
           </a:p>
           <a:p>
@@ -3945,50 +3915,7 @@
                 </a:solidFill>
                 <a:latin typeface="Alegreya Sans"/>
               </a:rPr>
-              <a:t>Sécurisation opérationnelle et déploiement de la cible ; feuille de route à 1,5 mois, dashboards KPI quotidiens.</a:t>
-            </a:r>
-          </a:p>
-          <a:p>
-            <a:pPr algn="l">
-              <a:spcAft>
-                <a:spcPts val="100"/>
-              </a:spcAft>
-            </a:pPr>
-            <a:r>
-              <a:rPr sz="1200" b="1" i="0">
-                <a:solidFill>
-                  <a:srgbClr val="3AEDE5"/>
-                </a:solidFill>
-                <a:latin typeface="Alegreya Sans"/>
-              </a:rPr>
-              <a:t>▸ </a:t>
-            </a:r>
-            <a:r>
-              <a:rPr sz="1200" b="1" i="0">
-                <a:solidFill>
-                  <a:srgbClr val="FFFFFF"/>
-                </a:solidFill>
-                <a:latin typeface="Alegreya Sans"/>
-              </a:rPr>
-              <a:t>Groupe Indigo &amp; Conseil Départemental 93</a:t>
-            </a:r>
-            <a:r>
-              <a:rPr sz="1200" b="0" i="0">
-                <a:solidFill>
-                  <a:srgbClr val="FFFFFF"/>
-                </a:solidFill>
-                <a:latin typeface="Alegreya Sans"/>
-              </a:rPr>
-              <a:t> — Conseil &amp; pilotage stratégique</a:t>
-            </a:r>
-            <a:r>
-              <a:rPr sz="1200" b="0" i="1">
-                <a:solidFill>
-                  <a:srgbClr val="3AEDE5"/>
-                </a:solidFill>
-                <a:latin typeface="Alegreya Sans"/>
-              </a:rPr>
-              <a:t>  (2025)</a:t>
+              <a:t>Relais managérial d'urgence : prise en main immédiate du périmètre pour pallier un vide managérial, stabilisation des équipes (risques de turnover et démobilisation) aux côtés de la nouvelle Directrice.</a:t>
             </a:r>
           </a:p>
           <a:p>
@@ -4013,7 +3940,7 @@
                 </a:solidFill>
                 <a:latin typeface="Alegreya Sans"/>
               </a:rPr>
-              <a:t>Indigo (post-cyber) : diagnostic global du SI, vision cible du numérique, plan d'investissement IT pluriannuel et cadre de gouvernance.</a:t>
+              <a:t>Sécurisation opérationnelle : audit et traitement des points de friction (inefficiences, doublons de processus, allongement des délais de traitement) afin de restaurer la qualité de service et maîtriser les risques réglementaires.</a:t>
             </a:r>
           </a:p>
           <a:p>
@@ -4038,50 +3965,7 @@
                 </a:solidFill>
                 <a:latin typeface="Alegreya Sans"/>
               </a:rPr>
-              <a:t>CD 93 : cadrage du programme Relation Usager — convergence de 8 projets Microsoft Dynamics, gouvernance et feuille de route pluriannuelle.</a:t>
-            </a:r>
-          </a:p>
-          <a:p>
-            <a:pPr algn="l">
-              <a:spcAft>
-                <a:spcPts val="100"/>
-              </a:spcAft>
-            </a:pPr>
-            <a:r>
-              <a:rPr sz="1200" b="1" i="0">
-                <a:solidFill>
-                  <a:srgbClr val="3AEDE5"/>
-                </a:solidFill>
-                <a:latin typeface="Alegreya Sans"/>
-              </a:rPr>
-              <a:t>▸ </a:t>
-            </a:r>
-            <a:r>
-              <a:rPr sz="1200" b="1" i="0">
-                <a:solidFill>
-                  <a:srgbClr val="FFFFFF"/>
-                </a:solidFill>
-                <a:latin typeface="Alegreya Sans"/>
-              </a:rPr>
-              <a:t>CGI Business Consulting</a:t>
-            </a:r>
-            <a:r>
-              <a:rPr sz="1200" b="0" i="0">
-                <a:solidFill>
-                  <a:srgbClr val="FFFFFF"/>
-                </a:solidFill>
-                <a:latin typeface="Alegreya Sans"/>
-              </a:rPr>
-              <a:t> — Senior Manager — Banque Assurance</a:t>
-            </a:r>
-            <a:r>
-              <a:rPr sz="1200" b="0" i="1">
-                <a:solidFill>
-                  <a:srgbClr val="3AEDE5"/>
-                </a:solidFill>
-                <a:latin typeface="Alegreya Sans"/>
-              </a:rPr>
-              <a:t>  (2022 — 2025)</a:t>
+              <a:t>Déploiement de la cible : alignement et déploiement opérationnel des nouveaux processus unifiés conçus par la direction de la Transformation.</a:t>
             </a:r>
           </a:p>
           <a:p>
@@ -4106,125 +3990,7 @@
                 </a:solidFill>
                 <a:latin typeface="Alegreya Sans"/>
               </a:rPr>
-              <a:t>BPCE (projet SIGMA) : gestion IAM, pilote pour la standardisation des habilitations du socle commun Groupe ; formation et déploiement Groupe.</a:t>
-            </a:r>
-          </a:p>
-          <a:p>
-            <a:pPr algn="l" lvl="1">
-              <a:spcAft>
-                <a:spcPts val="100"/>
-              </a:spcAft>
-            </a:pPr>
-            <a:r>
-              <a:rPr sz="1200" b="1" i="0">
-                <a:solidFill>
-                  <a:srgbClr val="3AEDE5"/>
-                </a:solidFill>
-                <a:latin typeface="Alegreya Sans"/>
-              </a:rPr>
-              <a:t>•  </a:t>
-            </a:r>
-            <a:r>
-              <a:rPr sz="1200" b="0" i="0">
-                <a:solidFill>
-                  <a:srgbClr val="FFFFFF"/>
-                </a:solidFill>
-                <a:latin typeface="Alegreya Sans"/>
-              </a:rPr>
-              <a:t>Crédit Agricole CIB : taskforce Cash Management / Correspondent Banking (20+ consultants) ; développement Banque-Assurance (PNB &gt; 200 K€).</a:t>
-            </a:r>
-          </a:p>
-          <a:p>
-            <a:pPr algn="l">
-              <a:spcAft>
-                <a:spcPts val="100"/>
-              </a:spcAft>
-            </a:pPr>
-            <a:r>
-              <a:rPr sz="1200" b="1" i="0">
-                <a:solidFill>
-                  <a:srgbClr val="3AEDE5"/>
-                </a:solidFill>
-                <a:latin typeface="Alegreya Sans"/>
-              </a:rPr>
-              <a:t>▸ </a:t>
-            </a:r>
-            <a:r>
-              <a:rPr sz="1200" b="1" i="0">
-                <a:solidFill>
-                  <a:srgbClr val="FFFFFF"/>
-                </a:solidFill>
-                <a:latin typeface="Alegreya Sans"/>
-              </a:rPr>
-              <a:t>Société Générale</a:t>
-            </a:r>
-            <a:r>
-              <a:rPr sz="1200" b="0" i="0">
-                <a:solidFill>
-                  <a:srgbClr val="FFFFFF"/>
-                </a:solidFill>
-                <a:latin typeface="Alegreya Sans"/>
-              </a:rPr>
-              <a:t> — 20 ans — Resp. KYC, VP Marketing B2B, Cash Management</a:t>
-            </a:r>
-            <a:r>
-              <a:rPr sz="1200" b="0" i="1">
-                <a:solidFill>
-                  <a:srgbClr val="3AEDE5"/>
-                </a:solidFill>
-                <a:latin typeface="Alegreya Sans"/>
-              </a:rPr>
-              <a:t>  (2002 — 2022)</a:t>
-            </a:r>
-          </a:p>
-          <a:p>
-            <a:pPr algn="l" lvl="1">
-              <a:spcAft>
-                <a:spcPts val="100"/>
-              </a:spcAft>
-            </a:pPr>
-            <a:r>
-              <a:rPr sz="1200" b="1" i="0">
-                <a:solidFill>
-                  <a:srgbClr val="3AEDE5"/>
-                </a:solidFill>
-                <a:latin typeface="Alegreya Sans"/>
-              </a:rPr>
-              <a:t>•  </a:t>
-            </a:r>
-            <a:r>
-              <a:rPr sz="1200" b="0" i="0">
-                <a:solidFill>
-                  <a:srgbClr val="FFFFFF"/>
-                </a:solidFill>
-                <a:latin typeface="Alegreya Sans"/>
-              </a:rPr>
-              <a:t>KYC (2019-22) : TOM digitalisation, Blockchain/IA — fiabilisation à +90 % sur 3 CSP.</a:t>
-            </a:r>
-          </a:p>
-          <a:p>
-            <a:pPr algn="l" lvl="1">
-              <a:spcAft>
-                <a:spcPts val="100"/>
-              </a:spcAft>
-            </a:pPr>
-            <a:r>
-              <a:rPr sz="1200" b="1" i="0">
-                <a:solidFill>
-                  <a:srgbClr val="3AEDE5"/>
-                </a:solidFill>
-                <a:latin typeface="Alegreya Sans"/>
-              </a:rPr>
-              <a:t>•  </a:t>
-            </a:r>
-            <a:r>
-              <a:rPr sz="1200" b="0" i="0">
-                <a:solidFill>
-                  <a:srgbClr val="FFFFFF"/>
-                </a:solidFill>
-                <a:latin typeface="Alegreya Sans"/>
-              </a:rPr>
-              <a:t>VP B2B &amp; Digital (2007-19) : CRM MS Dynamics international (1 000 users) ; +30 % de PNB Cash Management.</a:t>
+              <a:t>Livrables clés : plan d'accompagnement et feuille de route à 1,5 mois, tableaux de bord de pilotage quotidien (KPI), rapports de continuité de mission.</a:t>
             </a:r>
           </a:p>
         </p:txBody>
@@ -4518,7 +4284,7 @@
                 </a:solidFill>
                 <a:latin typeface="Alegreya Sans"/>
               </a:rPr>
-              <a:t>Transition Manager — IT &amp; Finance Program Management</a:t>
+              <a:t>Manager de Transition — Direction de Programme IT &amp; Finance (suite)</a:t>
             </a:r>
           </a:p>
           <a:p>
@@ -4534,7 +4300,7 @@
                 </a:solidFill>
                 <a:latin typeface="Alegreya Sans"/>
               </a:rPr>
-              <a:t>IT &amp; Finance Transformation — Banking, Public Sector, Mobility</a:t>
+              <a:t>Transformation IT &amp; Finance — Banque, Secteur Public, Mobilités</a:t>
             </a:r>
           </a:p>
         </p:txBody>
@@ -4573,7 +4339,7 @@
                 </a:solidFill>
                 <a:latin typeface="Alegreya Sans"/>
               </a:rPr>
-              <a:t>MAIN AREAS OF EXPERTISE</a:t>
+              <a:t>CENTRES D'INTÉRÊT</a:t>
             </a:r>
           </a:p>
           <a:p>
@@ -4598,7 +4364,7 @@
                 </a:solidFill>
                 <a:latin typeface="Alegreya Sans"/>
               </a:rPr>
-              <a:t>IT Program &amp; Project Governance (scoping, PMO)</a:t>
+              <a:t>Musique : guitare électrique, acoustique, chant</a:t>
             </a:r>
           </a:p>
           <a:p>
@@ -4623,7 +4389,7 @@
                 </a:solidFill>
                 <a:latin typeface="Alegreya Sans"/>
               </a:rPr>
-              <a:t>Payments, Cash Management, ERP, CRM, KYC</a:t>
+              <a:t>Collectionneur de vinyles</a:t>
             </a:r>
           </a:p>
           <a:p>
@@ -4648,7 +4414,7 @@
                 </a:solidFill>
                 <a:latin typeface="Alegreya Sans"/>
               </a:rPr>
-              <a:t>IT Master Plan &amp; Cybersecurity</a:t>
+              <a:t>Plongée sous-marine, fitness, ski</a:t>
             </a:r>
           </a:p>
           <a:p>
@@ -4673,7 +4439,7 @@
                 </a:solidFill>
                 <a:latin typeface="Alegreya Sans"/>
               </a:rPr>
-              <a:t>Management &amp; Change Leadership</a:t>
+              <a:t>Photographie, montage vidéo</a:t>
             </a:r>
           </a:p>
           <a:p>
@@ -4698,7 +4464,7 @@
                 </a:solidFill>
                 <a:latin typeface="Alegreya Sans"/>
               </a:rPr>
-              <a:t>Data &amp; Compliance (BCBS 239, FINREP)</a:t>
+              <a:t>Théâtre amateur</a:t>
             </a:r>
           </a:p>
           <a:p>
@@ -4717,134 +4483,67 @@
                 </a:solidFill>
                 <a:latin typeface="Alegreya Sans"/>
               </a:rPr>
-              <a:t>LANGUAGES</a:t>
+              <a:t>ENGAGEMENTS &amp; RÉALISATIONS</a:t>
             </a:r>
           </a:p>
           <a:p>
             <a:pPr algn="l">
               <a:spcAft>
-                <a:spcPts val="100"/>
-              </a:spcAft>
-            </a:pPr>
-            <a:r>
-              <a:rPr sz="1200" b="1" i="0">
-                <a:solidFill>
-                  <a:srgbClr val="3AEDE5"/>
-                </a:solidFill>
-                <a:latin typeface="Alegreya Sans"/>
-              </a:rPr>
-              <a:t>•  </a:t>
-            </a:r>
-            <a:r>
-              <a:rPr sz="1200" b="0" i="0">
-                <a:solidFill>
-                  <a:srgbClr val="FFFFFF"/>
-                </a:solidFill>
-                <a:latin typeface="Alegreya Sans"/>
-              </a:rPr>
-              <a:t>French — Native</a:t>
+                <a:spcPts val="200"/>
+              </a:spcAft>
+            </a:pPr>
+            <a:r>
+              <a:rPr sz="1200" b="1" i="0">
+                <a:solidFill>
+                  <a:srgbClr val="3AEDE5"/>
+                </a:solidFill>
+                <a:latin typeface="Alegreya Sans"/>
+              </a:rPr>
+              <a:t>• </a:t>
+            </a:r>
+            <a:r>
+              <a:rPr sz="1200" b="1" i="0">
+                <a:solidFill>
+                  <a:srgbClr val="FFFFFF"/>
+                </a:solidFill>
+                <a:latin typeface="Alegreya Sans"/>
+              </a:rPr>
+              <a:t>Cercles professionnels</a:t>
+            </a:r>
+            <a:r>
+              <a:rPr sz="1200" b="0" i="1">
+                <a:solidFill>
+                  <a:srgbClr val="CCD6E8"/>
+                </a:solidFill>
+                <a:latin typeface="Alegreya Sans"/>
+              </a:rPr>
+              <a:t> — Membre UMBREX / VERITUX</a:t>
             </a:r>
           </a:p>
           <a:p>
             <a:pPr algn="l">
               <a:spcAft>
-                <a:spcPts val="100"/>
-              </a:spcAft>
-            </a:pPr>
-            <a:r>
-              <a:rPr sz="1200" b="1" i="0">
-                <a:solidFill>
-                  <a:srgbClr val="3AEDE5"/>
-                </a:solidFill>
-                <a:latin typeface="Alegreya Sans"/>
-              </a:rPr>
-              <a:t>•  </a:t>
-            </a:r>
-            <a:r>
-              <a:rPr sz="1200" b="0" i="0">
-                <a:solidFill>
-                  <a:srgbClr val="FFFFFF"/>
-                </a:solidFill>
-                <a:latin typeface="Alegreya Sans"/>
-              </a:rPr>
-              <a:t>English — Fluent</a:t>
-            </a:r>
-          </a:p>
-          <a:p>
-            <a:pPr algn="l">
-              <a:spcAft>
-                <a:spcPts val="100"/>
-              </a:spcAft>
-            </a:pPr>
-            <a:r>
-              <a:rPr sz="1200" b="1" i="0">
-                <a:solidFill>
-                  <a:srgbClr val="3AEDE5"/>
-                </a:solidFill>
-                <a:latin typeface="Alegreya Sans"/>
-              </a:rPr>
-              <a:t>•  </a:t>
-            </a:r>
-            <a:r>
-              <a:rPr sz="1200" b="0" i="0">
-                <a:solidFill>
-                  <a:srgbClr val="FFFFFF"/>
-                </a:solidFill>
-                <a:latin typeface="Alegreya Sans"/>
-              </a:rPr>
-              <a:t>Spanish — Fluent</a:t>
-            </a:r>
-          </a:p>
-          <a:p>
-            <a:pPr algn="l">
-              <a:spcBef>
-                <a:spcPts val="600"/>
-              </a:spcBef>
-              <a:spcAft>
-                <a:spcPts val="300"/>
-              </a:spcAft>
-            </a:pPr>
-            <a:r>
-              <a:rPr sz="1300" b="1" i="0">
-                <a:solidFill>
-                  <a:srgbClr val="3AEDE5"/>
-                </a:solidFill>
-                <a:latin typeface="Alegreya Sans"/>
-              </a:rPr>
-              <a:t>EDUCATION &amp; CERTIFICATIONS</a:t>
-            </a:r>
-          </a:p>
-          <a:p>
-            <a:pPr algn="l">
-              <a:spcAft>
-                <a:spcPts val="100"/>
-              </a:spcAft>
-            </a:pPr>
-            <a:r>
-              <a:rPr sz="1200" b="1" i="0">
-                <a:solidFill>
-                  <a:srgbClr val="3AEDE5"/>
-                </a:solidFill>
-                <a:latin typeface="Alegreya Sans"/>
-              </a:rPr>
-              <a:t>1996  </a:t>
-            </a:r>
-            <a:r>
-              <a:rPr sz="1200" b="1" i="0">
-                <a:solidFill>
-                  <a:srgbClr val="FFFFFF"/>
-                </a:solidFill>
-                <a:latin typeface="Alegreya Sans"/>
-              </a:rPr>
-              <a:t>EDHEC</a:t>
-            </a:r>
-          </a:p>
-          <a:p>
-            <a:pPr algn="l">
-              <a:spcAft>
-                <a:spcPts val="300"/>
-              </a:spcAft>
-            </a:pPr>
+                <a:spcPts val="200"/>
+              </a:spcAft>
+            </a:pPr>
+            <a:r>
+              <a:rPr sz="1200" b="1" i="0">
+                <a:solidFill>
+                  <a:srgbClr val="3AEDE5"/>
+                </a:solidFill>
+                <a:latin typeface="Alegreya Sans"/>
+              </a:rPr>
+              <a:t>• </a:t>
+            </a:r>
+            <a:r>
+              <a:rPr sz="1200" b="1" i="0">
+                <a:solidFill>
+                  <a:srgbClr val="FFFFFF"/>
+                </a:solidFill>
+                <a:latin typeface="Alegreya Sans"/>
+              </a:rPr>
+              <a:t>Intervenant / modérateur</a:t>
+            </a:r>
             <a:r>
               <a:rPr sz="1200" b="0" i="1">
                 <a:solidFill>
@@ -4852,170 +4551,7 @@
                 </a:solidFill>
                 <a:latin typeface="Alegreya Sans"/>
               </a:rPr>
-              <a:t>Master in Management + certs (PRINCE2, ACAMS, GDPR)</a:t>
-            </a:r>
-          </a:p>
-          <a:p>
-            <a:pPr algn="l">
-              <a:spcAft>
-                <a:spcPts val="100"/>
-              </a:spcAft>
-            </a:pPr>
-            <a:r>
-              <a:rPr sz="1200" b="1" i="0">
-                <a:solidFill>
-                  <a:srgbClr val="3AEDE5"/>
-                </a:solidFill>
-                <a:latin typeface="Alegreya Sans"/>
-              </a:rPr>
-              <a:t>2024  </a:t>
-            </a:r>
-            <a:r>
-              <a:rPr sz="1200" b="1" i="0">
-                <a:solidFill>
-                  <a:srgbClr val="FFFFFF"/>
-                </a:solidFill>
-                <a:latin typeface="Alegreya Sans"/>
-              </a:rPr>
-              <a:t>Google</a:t>
-            </a:r>
-          </a:p>
-          <a:p>
-            <a:pPr algn="l">
-              <a:spcAft>
-                <a:spcPts val="300"/>
-              </a:spcAft>
-            </a:pPr>
-            <a:r>
-              <a:rPr sz="1200" b="0" i="1">
-                <a:solidFill>
-                  <a:srgbClr val="CCD6E8"/>
-                </a:solidFill>
-                <a:latin typeface="Alegreya Sans"/>
-              </a:rPr>
-              <a:t>AI Professional Certificate</a:t>
-            </a:r>
-          </a:p>
-          <a:p>
-            <a:pPr algn="l">
-              <a:spcBef>
-                <a:spcPts val="600"/>
-              </a:spcBef>
-              <a:spcAft>
-                <a:spcPts val="300"/>
-              </a:spcAft>
-            </a:pPr>
-            <a:r>
-              <a:rPr sz="1300" b="1" i="0">
-                <a:solidFill>
-                  <a:srgbClr val="3AEDE5"/>
-                </a:solidFill>
-                <a:latin typeface="Alegreya Sans"/>
-              </a:rPr>
-              <a:t>INTERESTS</a:t>
-            </a:r>
-          </a:p>
-          <a:p>
-            <a:pPr algn="l">
-              <a:spcAft>
-                <a:spcPts val="100"/>
-              </a:spcAft>
-            </a:pPr>
-            <a:r>
-              <a:rPr sz="1200" b="1" i="0">
-                <a:solidFill>
-                  <a:srgbClr val="3AEDE5"/>
-                </a:solidFill>
-                <a:latin typeface="Alegreya Sans"/>
-              </a:rPr>
-              <a:t>•  </a:t>
-            </a:r>
-            <a:r>
-              <a:rPr sz="1200" b="0" i="0">
-                <a:solidFill>
-                  <a:srgbClr val="FFFFFF"/>
-                </a:solidFill>
-                <a:latin typeface="Alegreya Sans"/>
-              </a:rPr>
-              <a:t>Electric guitar &amp; singing</a:t>
-            </a:r>
-          </a:p>
-          <a:p>
-            <a:pPr algn="l">
-              <a:spcAft>
-                <a:spcPts val="100"/>
-              </a:spcAft>
-            </a:pPr>
-            <a:r>
-              <a:rPr sz="1200" b="1" i="0">
-                <a:solidFill>
-                  <a:srgbClr val="3AEDE5"/>
-                </a:solidFill>
-                <a:latin typeface="Alegreya Sans"/>
-              </a:rPr>
-              <a:t>•  </a:t>
-            </a:r>
-            <a:r>
-              <a:rPr sz="1200" b="0" i="0">
-                <a:solidFill>
-                  <a:srgbClr val="FFFFFF"/>
-                </a:solidFill>
-                <a:latin typeface="Alegreya Sans"/>
-              </a:rPr>
-              <a:t>Scuba diving</a:t>
-            </a:r>
-          </a:p>
-          <a:p>
-            <a:pPr algn="l">
-              <a:spcBef>
-                <a:spcPts val="600"/>
-              </a:spcBef>
-              <a:spcAft>
-                <a:spcPts val="300"/>
-              </a:spcAft>
-            </a:pPr>
-            <a:r>
-              <a:rPr sz="1300" b="1" i="0">
-                <a:solidFill>
-                  <a:srgbClr val="3AEDE5"/>
-                </a:solidFill>
-                <a:latin typeface="Alegreya Sans"/>
-              </a:rPr>
-              <a:t>ENGAGEMENTS &amp; ACHIEVEMENTS</a:t>
-            </a:r>
-          </a:p>
-          <a:p>
-            <a:pPr algn="l">
-              <a:spcAft>
-                <a:spcPts val="200"/>
-              </a:spcAft>
-            </a:pPr>
-            <a:r>
-              <a:rPr sz="1200" b="1" i="0">
-                <a:solidFill>
-                  <a:srgbClr val="3AEDE5"/>
-                </a:solidFill>
-                <a:latin typeface="Alegreya Sans"/>
-              </a:rPr>
-              <a:t>• </a:t>
-            </a:r>
-            <a:r>
-              <a:rPr sz="1200" b="1" i="0">
-                <a:solidFill>
-                  <a:srgbClr val="FFFFFF"/>
-                </a:solidFill>
-                <a:latin typeface="Alegreya Sans"/>
-              </a:rPr>
-              <a:t>Professional circles &amp; expert calls</a:t>
-            </a:r>
-            <a:r>
-              <a:rPr sz="1200" b="0" i="1">
-                <a:solidFill>
-                  <a:srgbClr val="CCD6E8"/>
-                </a:solidFill>
-                <a:latin typeface="Alegreya Sans"/>
-              </a:rPr>
-              <a:t> — UMBREX / VERITUX; AlphaSights, GuidePoint, Les BigBoss</a:t>
+              <a:t> — AlphaSights, XpertsCouncil, Les BigBoss, GuidePoint</a:t>
             </a:r>
           </a:p>
         </p:txBody>
@@ -5054,46 +4590,179 @@
                 </a:solidFill>
                 <a:latin typeface="Alegreya Sans"/>
               </a:rPr>
-              <a:t>SUMMARY</a:t>
+              <a:t>PRINCIPALES EXPÉRIENCES PROFESSIONNELLES (suite)</a:t>
             </a:r>
           </a:p>
           <a:p>
             <a:pPr algn="l">
               <a:spcAft>
-                <a:spcPts val="300"/>
-              </a:spcAft>
-            </a:pPr>
-            <a:r>
-              <a:rPr sz="1200" b="0" i="0">
-                <a:solidFill>
-                  <a:srgbClr val="FFFFFF"/>
-                </a:solidFill>
-                <a:latin typeface="Alegreya Sans"/>
-              </a:rPr>
-              <a:t>Ex-VP Société Générale (20 years) | Expert Transition Management &amp; Critical Transformation. Operational relay in management vacuum, merger or post-cyberattack contexts. C-Level dimensions (budgets &gt; €10M, COMEX reporting).</a:t>
+                <a:spcPts val="100"/>
+              </a:spcAft>
+            </a:pPr>
+            <a:r>
+              <a:rPr sz="1200" b="1" i="0">
+                <a:solidFill>
+                  <a:srgbClr val="3AEDE5"/>
+                </a:solidFill>
+                <a:latin typeface="Alegreya Sans"/>
+              </a:rPr>
+              <a:t>▸ </a:t>
+            </a:r>
+            <a:r>
+              <a:rPr sz="1200" b="1" i="0">
+                <a:solidFill>
+                  <a:srgbClr val="FFFFFF"/>
+                </a:solidFill>
+                <a:latin typeface="Alegreya Sans"/>
+              </a:rPr>
+              <a:t>Groupe Indigo</a:t>
+            </a:r>
+            <a:r>
+              <a:rPr sz="1200" b="0" i="0">
+                <a:solidFill>
+                  <a:srgbClr val="FFFFFF"/>
+                </a:solidFill>
+                <a:latin typeface="Alegreya Sans"/>
+              </a:rPr>
+              <a:t> — Pilotage stratégique auprès du Comité Exécutif</a:t>
+            </a:r>
+            <a:r>
+              <a:rPr sz="1200" b="0" i="1">
+                <a:solidFill>
+                  <a:srgbClr val="3AEDE5"/>
+                </a:solidFill>
+                <a:latin typeface="Alegreya Sans"/>
+              </a:rPr>
+              <a:t>  (2025 · S2)</a:t>
+            </a:r>
+          </a:p>
+          <a:p>
+            <a:pPr algn="l" lvl="1">
+              <a:spcAft>
+                <a:spcPts val="100"/>
+              </a:spcAft>
+            </a:pPr>
+            <a:r>
+              <a:rPr sz="1200" b="1" i="0">
+                <a:solidFill>
+                  <a:srgbClr val="3AEDE5"/>
+                </a:solidFill>
+                <a:latin typeface="Alegreya Sans"/>
+              </a:rPr>
+              <a:t>•  </a:t>
+            </a:r>
+            <a:r>
+              <a:rPr sz="1200" b="0" i="0">
+                <a:solidFill>
+                  <a:srgbClr val="FFFFFF"/>
+                </a:solidFill>
+                <a:latin typeface="Alegreya Sans"/>
+              </a:rPr>
+              <a:t>Contexte de reconstruction post-cyber et de refonte de la gouvernance IT : structuration et sécurisation de la trajectoire de transformation numérique à horizon 3 ans.</a:t>
+            </a:r>
+          </a:p>
+          <a:p>
+            <a:pPr algn="l" lvl="1">
+              <a:spcAft>
+                <a:spcPts val="100"/>
+              </a:spcAft>
+            </a:pPr>
+            <a:r>
+              <a:rPr sz="1200" b="1" i="0">
+                <a:solidFill>
+                  <a:srgbClr val="3AEDE5"/>
+                </a:solidFill>
+                <a:latin typeface="Alegreya Sans"/>
+              </a:rPr>
+              <a:t>•  </a:t>
+            </a:r>
+            <a:r>
+              <a:rPr sz="1200" b="0" i="0">
+                <a:solidFill>
+                  <a:srgbClr val="FFFFFF"/>
+                </a:solidFill>
+                <a:latin typeface="Alegreya Sans"/>
+              </a:rPr>
+              <a:t>Diagnostic global du système d'information : organisation, processus, infrastructures, applications, data et compétences.</a:t>
+            </a:r>
+          </a:p>
+          <a:p>
+            <a:pPr algn="l" lvl="1">
+              <a:spcAft>
+                <a:spcPts val="100"/>
+              </a:spcAft>
+            </a:pPr>
+            <a:r>
+              <a:rPr sz="1200" b="1" i="0">
+                <a:solidFill>
+                  <a:srgbClr val="3AEDE5"/>
+                </a:solidFill>
+                <a:latin typeface="Alegreya Sans"/>
+              </a:rPr>
+              <a:t>•  </a:t>
+            </a:r>
+            <a:r>
+              <a:rPr sz="1200" b="0" i="0">
+                <a:solidFill>
+                  <a:srgbClr val="FFFFFF"/>
+                </a:solidFill>
+                <a:latin typeface="Alegreya Sans"/>
+              </a:rPr>
+              <a:t>Contribution à la conception de la vision cible du numérique et à la définition du futur rôle de la DSI Groupe.</a:t>
+            </a:r>
+          </a:p>
+          <a:p>
+            <a:pPr algn="l" lvl="1">
+              <a:spcAft>
+                <a:spcPts val="100"/>
+              </a:spcAft>
+            </a:pPr>
+            <a:r>
+              <a:rPr sz="1200" b="1" i="0">
+                <a:solidFill>
+                  <a:srgbClr val="3AEDE5"/>
+                </a:solidFill>
+                <a:latin typeface="Alegreya Sans"/>
+              </a:rPr>
+              <a:t>•  </a:t>
+            </a:r>
+            <a:r>
+              <a:rPr sz="1200" b="0" i="0">
+                <a:solidFill>
+                  <a:srgbClr val="FFFFFF"/>
+                </a:solidFill>
+                <a:latin typeface="Alegreya Sans"/>
+              </a:rPr>
+              <a:t>Élaboration du plan d'investissement IT pluriannuel et du cadre de gouvernance associé.</a:t>
+            </a:r>
+          </a:p>
+          <a:p>
+            <a:pPr algn="l" lvl="1">
+              <a:spcAft>
+                <a:spcPts val="100"/>
+              </a:spcAft>
+            </a:pPr>
+            <a:r>
+              <a:rPr sz="1200" b="1" i="0">
+                <a:solidFill>
+                  <a:srgbClr val="3AEDE5"/>
+                </a:solidFill>
+                <a:latin typeface="Alegreya Sans"/>
+              </a:rPr>
+              <a:t>•  </a:t>
+            </a:r>
+            <a:r>
+              <a:rPr sz="1200" b="0" i="0">
+                <a:solidFill>
+                  <a:srgbClr val="FFFFFF"/>
+                </a:solidFill>
+                <a:latin typeface="Alegreya Sans"/>
+              </a:rPr>
+              <a:t>Livrables exécutifs : feuille de route, cartographies, matrices de compétences, organigrammes cibles, chantiers prioritaires.</a:t>
             </a:r>
           </a:p>
           <a:p>
             <a:pPr algn="l">
-              <a:spcBef>
-                <a:spcPts val="600"/>
-              </a:spcBef>
-              <a:spcAft>
-                <a:spcPts val="300"/>
-              </a:spcAft>
-            </a:pPr>
-            <a:r>
-              <a:rPr sz="1300" b="1" i="0">
-                <a:solidFill>
-                  <a:srgbClr val="3AEDE5"/>
-                </a:solidFill>
-                <a:latin typeface="Alegreya Sans"/>
-              </a:rPr>
-              <a:t>MAIN PROFESSIONAL EXPERIENCE</a:t>
-            </a:r>
-          </a:p>
-          <a:p>
-            <a:pPr algn="l">
               <a:spcAft>
                 <a:spcPts val="100"/>
               </a:spcAft>
@@ -5114,16 +4783,16 @@
                 </a:solidFill>
                 <a:latin typeface="Alegreya Sans"/>
               </a:rPr>
-              <a:t>Delubac &amp; Cie (via Ailancy)</a:t>
-            </a:r>
-            <a:r>
-              <a:rPr sz="1200" b="0" i="0">
-                <a:solidFill>
-                  <a:srgbClr val="FFFFFF"/>
-                </a:solidFill>
-                <a:latin typeface="Alegreya Sans"/>
-              </a:rPr>
-              <a:t> — Transition Manager — COO Middle-Office Corporate &amp; Private</a:t>
+              <a:t>Conseil Départemental de la Seine-Saint-Denis</a:t>
+            </a:r>
+            <a:r>
+              <a:rPr sz="1200" b="0" i="0">
+                <a:solidFill>
+                  <a:srgbClr val="FFFFFF"/>
+                </a:solidFill>
+                <a:latin typeface="Alegreya Sans"/>
+              </a:rPr>
+              <a:t> — Cadrage stratégique — Gestion de la Relation Usager</a:t>
             </a:r>
             <a:r>
               <a:rPr sz="1200" b="0" i="1">
@@ -5132,7 +4801,7 @@
                 </a:solidFill>
                 <a:latin typeface="Alegreya Sans"/>
               </a:rPr>
-              <a:t>  (May — June 2026)</a:t>
+              <a:t>  (2025 · S1)</a:t>
             </a:r>
           </a:p>
           <a:p>
@@ -5157,7 +4826,7 @@
                 </a:solidFill>
                 <a:latin typeface="Alegreya Sans"/>
               </a:rPr>
-              <a:t>Flash post-merger transition of middle-offices: emergency management relay, team stabilization.</a:t>
+              <a:t>Cadrage stratégique du programme de Gestion de la Relation Usager pour améliorer la coordination des services internes.</a:t>
             </a:r>
           </a:p>
           <a:p>
@@ -5182,50 +4851,7 @@
                 </a:solidFill>
                 <a:latin typeface="Alegreya Sans"/>
               </a:rPr>
-              <a:t>Operational security and target deployment; 1.5-month roadmap, daily KPI dashboards.</a:t>
-            </a:r>
-          </a:p>
-          <a:p>
-            <a:pPr algn="l">
-              <a:spcAft>
-                <a:spcPts val="100"/>
-              </a:spcAft>
-            </a:pPr>
-            <a:r>
-              <a:rPr sz="1200" b="1" i="0">
-                <a:solidFill>
-                  <a:srgbClr val="3AEDE5"/>
-                </a:solidFill>
-                <a:latin typeface="Alegreya Sans"/>
-              </a:rPr>
-              <a:t>▸ </a:t>
-            </a:r>
-            <a:r>
-              <a:rPr sz="1200" b="1" i="0">
-                <a:solidFill>
-                  <a:srgbClr val="FFFFFF"/>
-                </a:solidFill>
-                <a:latin typeface="Alegreya Sans"/>
-              </a:rPr>
-              <a:t>Groupe Indigo &amp; Seine-Saint-Denis County</a:t>
-            </a:r>
-            <a:r>
-              <a:rPr sz="1200" b="0" i="0">
-                <a:solidFill>
-                  <a:srgbClr val="FFFFFF"/>
-                </a:solidFill>
-                <a:latin typeface="Alegreya Sans"/>
-              </a:rPr>
-              <a:t> — Strategic advisory &amp; scoping</a:t>
-            </a:r>
-            <a:r>
-              <a:rPr sz="1200" b="0" i="1">
-                <a:solidFill>
-                  <a:srgbClr val="3AEDE5"/>
-                </a:solidFill>
-                <a:latin typeface="Alegreya Sans"/>
-              </a:rPr>
-              <a:t>  (2025)</a:t>
+              <a:t>Convergence et pilotage de 8 projets autour de la solution Microsoft Dynamics.</a:t>
             </a:r>
           </a:p>
           <a:p>
@@ -5250,7 +4876,7 @@
                 </a:solidFill>
                 <a:latin typeface="Alegreya Sans"/>
               </a:rPr>
-              <a:t>Indigo (post-cyber): global IT diagnosis, target digital vision, multi-year IT investment plan and governance framework.</a:t>
+              <a:t>Animation d'ateliers de co-construction avec les directions opérationnelles pour identifier et prioriser les besoins métiers.</a:t>
             </a:r>
           </a:p>
           <a:p>
@@ -5275,193 +4901,7 @@
                 </a:solidFill>
                 <a:latin typeface="Alegreya Sans"/>
               </a:rPr>
-              <a:t>CD 93: scoping of the Citizen Relationship program — convergence of 8 Microsoft Dynamics projects, governance and multi-year roadmap.</a:t>
-            </a:r>
-          </a:p>
-          <a:p>
-            <a:pPr algn="l">
-              <a:spcAft>
-                <a:spcPts val="100"/>
-              </a:spcAft>
-            </a:pPr>
-            <a:r>
-              <a:rPr sz="1200" b="1" i="0">
-                <a:solidFill>
-                  <a:srgbClr val="3AEDE5"/>
-                </a:solidFill>
-                <a:latin typeface="Alegreya Sans"/>
-              </a:rPr>
-              <a:t>▸ </a:t>
-            </a:r>
-            <a:r>
-              <a:rPr sz="1200" b="1" i="0">
-                <a:solidFill>
-                  <a:srgbClr val="FFFFFF"/>
-                </a:solidFill>
-                <a:latin typeface="Alegreya Sans"/>
-              </a:rPr>
-              <a:t>CGI Business Consulting</a:t>
-            </a:r>
-            <a:r>
-              <a:rPr sz="1200" b="0" i="0">
-                <a:solidFill>
-                  <a:srgbClr val="FFFFFF"/>
-                </a:solidFill>
-                <a:latin typeface="Alegreya Sans"/>
-              </a:rPr>
-              <a:t> — Senior Manager — Banking &amp; Insurance</a:t>
-            </a:r>
-            <a:r>
-              <a:rPr sz="1200" b="0" i="1">
-                <a:solidFill>
-                  <a:srgbClr val="3AEDE5"/>
-                </a:solidFill>
-                <a:latin typeface="Alegreya Sans"/>
-              </a:rPr>
-              <a:t>  (2022 — 2025)</a:t>
-            </a:r>
-          </a:p>
-          <a:p>
-            <a:pPr algn="l" lvl="1">
-              <a:spcAft>
-                <a:spcPts val="100"/>
-              </a:spcAft>
-            </a:pPr>
-            <a:r>
-              <a:rPr sz="1200" b="1" i="0">
-                <a:solidFill>
-                  <a:srgbClr val="3AEDE5"/>
-                </a:solidFill>
-                <a:latin typeface="Alegreya Sans"/>
-              </a:rPr>
-              <a:t>•  </a:t>
-            </a:r>
-            <a:r>
-              <a:rPr sz="1200" b="0" i="0">
-                <a:solidFill>
-                  <a:srgbClr val="FFFFFF"/>
-                </a:solidFill>
-                <a:latin typeface="Alegreya Sans"/>
-              </a:rPr>
-              <a:t>BPCE (SIGMA project): IAM management, pilot for standardizing authorizations on the Group common foundation; training and Group-level deployment.</a:t>
-            </a:r>
-          </a:p>
-          <a:p>
-            <a:pPr algn="l" lvl="1">
-              <a:spcAft>
-                <a:spcPts val="100"/>
-              </a:spcAft>
-            </a:pPr>
-            <a:r>
-              <a:rPr sz="1200" b="1" i="0">
-                <a:solidFill>
-                  <a:srgbClr val="3AEDE5"/>
-                </a:solidFill>
-                <a:latin typeface="Alegreya Sans"/>
-              </a:rPr>
-              <a:t>•  </a:t>
-            </a:r>
-            <a:r>
-              <a:rPr sz="1200" b="0" i="0">
-                <a:solidFill>
-                  <a:srgbClr val="FFFFFF"/>
-                </a:solidFill>
-                <a:latin typeface="Alegreya Sans"/>
-              </a:rPr>
-              <a:t>Crédit Agricole CIB: supervision of a Cash Management / Correspondent Banking taskforce (20+ consultants); Banking-Insurance development (PNB &gt; €200K).</a:t>
-            </a:r>
-          </a:p>
-          <a:p>
-            <a:pPr algn="l">
-              <a:spcAft>
-                <a:spcPts val="100"/>
-              </a:spcAft>
-            </a:pPr>
-            <a:r>
-              <a:rPr sz="1200" b="1" i="0">
-                <a:solidFill>
-                  <a:srgbClr val="3AEDE5"/>
-                </a:solidFill>
-                <a:latin typeface="Alegreya Sans"/>
-              </a:rPr>
-              <a:t>▸ </a:t>
-            </a:r>
-            <a:r>
-              <a:rPr sz="1200" b="1" i="0">
-                <a:solidFill>
-                  <a:srgbClr val="FFFFFF"/>
-                </a:solidFill>
-                <a:latin typeface="Alegreya Sans"/>
-              </a:rPr>
-              <a:t>Société Générale</a:t>
-            </a:r>
-            <a:r>
-              <a:rPr sz="1200" b="0" i="0">
-                <a:solidFill>
-                  <a:srgbClr val="FFFFFF"/>
-                </a:solidFill>
-                <a:latin typeface="Alegreya Sans"/>
-              </a:rPr>
-              <a:t> — 20 years — KYC Lead, VP B2B Marketing, Cash Management</a:t>
-            </a:r>
-            <a:r>
-              <a:rPr sz="1200" b="0" i="1">
-                <a:solidFill>
-                  <a:srgbClr val="3AEDE5"/>
-                </a:solidFill>
-                <a:latin typeface="Alegreya Sans"/>
-              </a:rPr>
-              <a:t>  (2002 — 2022)</a:t>
-            </a:r>
-          </a:p>
-          <a:p>
-            <a:pPr algn="l" lvl="1">
-              <a:spcAft>
-                <a:spcPts val="100"/>
-              </a:spcAft>
-            </a:pPr>
-            <a:r>
-              <a:rPr sz="1200" b="1" i="0">
-                <a:solidFill>
-                  <a:srgbClr val="3AEDE5"/>
-                </a:solidFill>
-                <a:latin typeface="Alegreya Sans"/>
-              </a:rPr>
-              <a:t>•  </a:t>
-            </a:r>
-            <a:r>
-              <a:rPr sz="1200" b="0" i="0">
-                <a:solidFill>
-                  <a:srgbClr val="FFFFFF"/>
-                </a:solidFill>
-                <a:latin typeface="Alegreya Sans"/>
-              </a:rPr>
-              <a:t>KYC (2019-22): TOM for KYC digitalization, Blockchain/AI — reliability to 90%+ across 3 SSCs.</a:t>
-            </a:r>
-          </a:p>
-          <a:p>
-            <a:pPr algn="l" lvl="1">
-              <a:spcAft>
-                <a:spcPts val="100"/>
-              </a:spcAft>
-            </a:pPr>
-            <a:r>
-              <a:rPr sz="1200" b="1" i="0">
-                <a:solidFill>
-                  <a:srgbClr val="3AEDE5"/>
-                </a:solidFill>
-                <a:latin typeface="Alegreya Sans"/>
-              </a:rPr>
-              <a:t>•  </a:t>
-            </a:r>
-            <a:r>
-              <a:rPr sz="1200" b="0" i="0">
-                <a:solidFill>
-                  <a:srgbClr val="FFFFFF"/>
-                </a:solidFill>
-                <a:latin typeface="Alegreya Sans"/>
-              </a:rPr>
-              <a:t>VP B2B &amp; Digital (2007-19): international MS Dynamics CRM (1,000 users); +30% PNB in Cash Management.</a:t>
+              <a:t>Définition de la gouvernance (comités, rôles) et conception d'une feuille de route pluriannuelle intégrant le front office et la gestion des réclamations.</a:t>
             </a:r>
           </a:p>
         </p:txBody>
@@ -5540,7 +4980,2604 @@
                 </a:solidFill>
                 <a:latin typeface="Alegreya Sans"/>
               </a:rPr>
-              <a:t>The information in this document is strictly confidential — This document may only be shared with the owner's consent</a:t>
+              <a:t>Les informations de ce document sont strictement confidentielles — Ce document ne peut être partagé qu'avec l'accord de son propriétaire</a:t>
+            </a:r>
+          </a:p>
+        </p:txBody>
+      </p:sp>
+    </p:spTree>
+  </p:cSld>
+  <p:clrMapOvr>
+    <a:masterClrMapping/>
+  </p:clrMapOvr>
+</p:sld>
+</file>
+
+<file path=ppt/slides/slide3.xml><?xml version="1.0" encoding="utf-8"?>
+<p:sld xmlns:a="http://schemas.openxmlformats.org/drawingml/2006/main" xmlns:p="http://schemas.openxmlformats.org/presentationml/2006/main" xmlns:r="http://schemas.openxmlformats.org/officeDocument/2006/relationships">
+  <p:cSld>
+    <p:spTree>
+      <p:nvGrpSpPr>
+        <p:cNvPr id="1" name=""/>
+        <p:cNvGrpSpPr/>
+        <p:nvPr/>
+      </p:nvGrpSpPr>
+      <p:grpSpPr/>
+      <p:sp>
+        <p:nvSpPr>
+          <p:cNvPr id="2" name="Rectangle 1"/>
+          <p:cNvSpPr/>
+          <p:nvPr/>
+        </p:nvSpPr>
+        <p:spPr>
+          <a:xfrm>
+            <a:off x="0" y="0"/>
+            <a:ext cx="12192000" cy="6858000"/>
+          </a:xfrm>
+          <a:prstGeom prst="rect">
+            <a:avLst/>
+          </a:prstGeom>
+          <a:solidFill>
+            <a:srgbClr val="061A5E"/>
+          </a:solidFill>
+          <a:ln>
+            <a:noFill/>
+          </a:ln>
+          <a:effectLst/>
+        </p:spPr>
+        <p:style>
+          <a:lnRef idx="1">
+            <a:schemeClr val="accent1"/>
+          </a:lnRef>
+          <a:fillRef idx="3">
+            <a:schemeClr val="accent1"/>
+          </a:fillRef>
+          <a:effectRef idx="2">
+            <a:schemeClr val="accent1"/>
+          </a:effectRef>
+          <a:fontRef idx="minor">
+            <a:schemeClr val="lt1"/>
+          </a:fontRef>
+        </p:style>
+        <p:txBody>
+          <a:bodyPr rtlCol="0" anchor="ctr"/>
+          <a:lstStyle/>
+          <a:p>
+            <a:pPr algn="ctr"/>
+          </a:p>
+        </p:txBody>
+      </p:sp>
+      <p:sp>
+        <p:nvSpPr>
+          <p:cNvPr id="3" name="Rectangle 2"/>
+          <p:cNvSpPr/>
+          <p:nvPr/>
+        </p:nvSpPr>
+        <p:spPr>
+          <a:xfrm>
+            <a:off x="4300000" y="0"/>
+            <a:ext cx="15000" cy="6858000"/>
+          </a:xfrm>
+          <a:prstGeom prst="rect">
+            <a:avLst/>
+          </a:prstGeom>
+          <a:solidFill>
+            <a:srgbClr val="3AEDE5"/>
+          </a:solidFill>
+          <a:ln>
+            <a:noFill/>
+          </a:ln>
+          <a:effectLst/>
+        </p:spPr>
+        <p:style>
+          <a:lnRef idx="1">
+            <a:schemeClr val="accent1"/>
+          </a:lnRef>
+          <a:fillRef idx="3">
+            <a:schemeClr val="accent1"/>
+          </a:fillRef>
+          <a:effectRef idx="2">
+            <a:schemeClr val="accent1"/>
+          </a:effectRef>
+          <a:fontRef idx="minor">
+            <a:schemeClr val="lt1"/>
+          </a:fontRef>
+        </p:style>
+        <p:txBody>
+          <a:bodyPr rtlCol="0" anchor="ctr"/>
+          <a:lstStyle/>
+          <a:p>
+            <a:pPr algn="ctr"/>
+          </a:p>
+        </p:txBody>
+      </p:sp>
+      <p:pic>
+        <p:nvPicPr>
+          <p:cNvPr id="4" name="Picture 3" descr="inside_circle_logo.png"/>
+          <p:cNvPicPr>
+            <a:picLocks noChangeAspect="1"/>
+          </p:cNvPicPr>
+          <p:nvPr/>
+        </p:nvPicPr>
+        <p:blipFill>
+          <a:blip r:embed="rId2"/>
+          <a:stretch>
+            <a:fillRect/>
+          </a:stretch>
+        </p:blipFill>
+        <p:spPr>
+          <a:xfrm>
+            <a:off x="10660000" y="130000"/>
+            <a:ext cx="1302000" cy="420000"/>
+          </a:xfrm>
+          <a:prstGeom prst="rect">
+            <a:avLst/>
+          </a:prstGeom>
+        </p:spPr>
+      </p:pic>
+      <p:sp>
+        <p:nvSpPr>
+          <p:cNvPr id="5" name="TextBox 4"/>
+          <p:cNvSpPr txBox="1"/>
+          <p:nvPr/>
+        </p:nvSpPr>
+        <p:spPr>
+          <a:xfrm>
+            <a:off x="228600" y="240000"/>
+            <a:ext cx="3842800" cy="1300000"/>
+          </a:xfrm>
+          <a:prstGeom prst="rect">
+            <a:avLst/>
+          </a:prstGeom>
+          <a:noFill/>
+        </p:spPr>
+        <p:txBody>
+          <a:bodyPr wrap="square" lIns="0" rIns="0" tIns="0" bIns="0">
+            <a:spAutoFit/>
+          </a:bodyPr>
+          <a:lstStyle/>
+          <a:p>
+            <a:pPr algn="l"/>
+            <a:r>
+              <a:rPr sz="2800" b="0" i="0">
+                <a:solidFill>
+                  <a:srgbClr val="3AEDE5"/>
+                </a:solidFill>
+                <a:latin typeface="Alegreya Sans"/>
+              </a:rPr>
+              <a:t>Christophe</a:t>
+            </a:r>
+          </a:p>
+          <a:p>
+            <a:pPr>
+              <a:spcBef>
+                <a:spcPts val="0"/>
+              </a:spcBef>
+            </a:pPr>
+            <a:r>
+              <a:rPr sz="3200" b="1" i="0">
+                <a:solidFill>
+                  <a:srgbClr val="3AEDE5"/>
+                </a:solidFill>
+                <a:latin typeface="Alegreya Sans"/>
+              </a:rPr>
+              <a:t>POBEREJSKY</a:t>
+            </a:r>
+          </a:p>
+        </p:txBody>
+      </p:sp>
+      <p:sp>
+        <p:nvSpPr>
+          <p:cNvPr id="6" name="TextBox 5"/>
+          <p:cNvSpPr txBox="1"/>
+          <p:nvPr/>
+        </p:nvSpPr>
+        <p:spPr>
+          <a:xfrm>
+            <a:off x="4528600" y="300000"/>
+            <a:ext cx="5963400" cy="800000"/>
+          </a:xfrm>
+          <a:prstGeom prst="rect">
+            <a:avLst/>
+          </a:prstGeom>
+          <a:noFill/>
+        </p:spPr>
+        <p:txBody>
+          <a:bodyPr wrap="square" lIns="0" rIns="0" tIns="0" bIns="0">
+            <a:spAutoFit/>
+          </a:bodyPr>
+          <a:lstStyle/>
+          <a:p>
+            <a:r>
+              <a:rPr sz="2400" b="1" i="0">
+                <a:solidFill>
+                  <a:srgbClr val="FFFFFF"/>
+                </a:solidFill>
+                <a:latin typeface="Alegreya Sans"/>
+              </a:rPr>
+              <a:t>Manager de Transition — Direction de Programme IT &amp; Finance (suite)</a:t>
+            </a:r>
+          </a:p>
+          <a:p>
+            <a:pPr>
+              <a:spcBef>
+                <a:spcPts val="200"/>
+              </a:spcBef>
+            </a:pPr>
+            <a:r>
+              <a:rPr sz="1500" b="0" i="1">
+                <a:solidFill>
+                  <a:srgbClr val="3AEDE5"/>
+                </a:solidFill>
+                <a:latin typeface="Alegreya Sans"/>
+              </a:rPr>
+              <a:t>Transformation IT &amp; Finance — Banque, Secteur Public, Mobilités</a:t>
+            </a:r>
+          </a:p>
+        </p:txBody>
+      </p:sp>
+      <p:sp>
+        <p:nvSpPr>
+          <p:cNvPr id="7" name="TextBox 6"/>
+          <p:cNvSpPr txBox="1"/>
+          <p:nvPr/>
+        </p:nvSpPr>
+        <p:spPr>
+          <a:xfrm>
+            <a:off x="228600" y="1180000"/>
+            <a:ext cx="3842800" cy="5318000"/>
+          </a:xfrm>
+          <a:prstGeom prst="rect">
+            <a:avLst/>
+          </a:prstGeom>
+          <a:noFill/>
+        </p:spPr>
+        <p:txBody>
+          <a:bodyPr wrap="square" lIns="0" rIns="0" tIns="0" bIns="0">
+            <a:spAutoFit/>
+          </a:bodyPr>
+          <a:lstStyle/>
+          <a:p>
+            <a:pPr algn="l">
+              <a:spcAft>
+                <a:spcPts val="300"/>
+              </a:spcAft>
+            </a:pPr>
+            <a:r>
+              <a:rPr sz="1300" b="1" i="0">
+                <a:solidFill>
+                  <a:srgbClr val="3AEDE5"/>
+                </a:solidFill>
+                <a:latin typeface="Alegreya Sans"/>
+              </a:rPr>
+              <a:t>DOMAINES D'EXPERTISE</a:t>
+            </a:r>
+          </a:p>
+          <a:p>
+            <a:pPr algn="l">
+              <a:spcAft>
+                <a:spcPts val="100"/>
+              </a:spcAft>
+            </a:pPr>
+            <a:r>
+              <a:rPr sz="1200" b="1" i="0">
+                <a:solidFill>
+                  <a:srgbClr val="3AEDE5"/>
+                </a:solidFill>
+                <a:latin typeface="Alegreya Sans"/>
+              </a:rPr>
+              <a:t>•  </a:t>
+            </a:r>
+            <a:r>
+              <a:rPr sz="1200" b="0" i="0">
+                <a:solidFill>
+                  <a:srgbClr val="FFFFFF"/>
+                </a:solidFill>
+                <a:latin typeface="Alegreya Sans"/>
+              </a:rPr>
+              <a:t>Pilotage de programmes et de projets IT : cadrage, gouvernance, feuille de route, PMO</a:t>
+            </a:r>
+          </a:p>
+          <a:p>
+            <a:pPr algn="l">
+              <a:spcAft>
+                <a:spcPts val="100"/>
+              </a:spcAft>
+            </a:pPr>
+            <a:r>
+              <a:rPr sz="1200" b="1" i="0">
+                <a:solidFill>
+                  <a:srgbClr val="3AEDE5"/>
+                </a:solidFill>
+                <a:latin typeface="Alegreya Sans"/>
+              </a:rPr>
+              <a:t>•  </a:t>
+            </a:r>
+            <a:r>
+              <a:rPr sz="1200" b="0" i="0">
+                <a:solidFill>
+                  <a:srgbClr val="FFFFFF"/>
+                </a:solidFill>
+                <a:latin typeface="Alegreya Sans"/>
+              </a:rPr>
+              <a:t>Secteurs : banque, secteur public, mobilités urbaines</a:t>
+            </a:r>
+          </a:p>
+          <a:p>
+            <a:pPr algn="l">
+              <a:spcAft>
+                <a:spcPts val="100"/>
+              </a:spcAft>
+            </a:pPr>
+            <a:r>
+              <a:rPr sz="1200" b="1" i="0">
+                <a:solidFill>
+                  <a:srgbClr val="3AEDE5"/>
+                </a:solidFill>
+                <a:latin typeface="Alegreya Sans"/>
+              </a:rPr>
+              <a:t>•  </a:t>
+            </a:r>
+            <a:r>
+              <a:rPr sz="1200" b="0" i="0">
+                <a:solidFill>
+                  <a:srgbClr val="FFFFFF"/>
+                </a:solidFill>
+                <a:latin typeface="Alegreya Sans"/>
+              </a:rPr>
+              <a:t>Systèmes et solutions : paiements, cash management, ERP, CRM, Business Intelligence, KYC</a:t>
+            </a:r>
+          </a:p>
+          <a:p>
+            <a:pPr algn="l">
+              <a:spcAft>
+                <a:spcPts val="100"/>
+              </a:spcAft>
+            </a:pPr>
+            <a:r>
+              <a:rPr sz="1200" b="1" i="0">
+                <a:solidFill>
+                  <a:srgbClr val="3AEDE5"/>
+                </a:solidFill>
+                <a:latin typeface="Alegreya Sans"/>
+              </a:rPr>
+              <a:t>•  </a:t>
+            </a:r>
+            <a:r>
+              <a:rPr sz="1200" b="0" i="0">
+                <a:solidFill>
+                  <a:srgbClr val="FFFFFF"/>
+                </a:solidFill>
+                <a:latin typeface="Alegreya Sans"/>
+              </a:rPr>
+              <a:t>Schéma directeur IT &amp; cybersécurité</a:t>
+            </a:r>
+          </a:p>
+          <a:p>
+            <a:pPr algn="l">
+              <a:spcAft>
+                <a:spcPts val="100"/>
+              </a:spcAft>
+            </a:pPr>
+            <a:r>
+              <a:rPr sz="1200" b="1" i="0">
+                <a:solidFill>
+                  <a:srgbClr val="3AEDE5"/>
+                </a:solidFill>
+                <a:latin typeface="Alegreya Sans"/>
+              </a:rPr>
+              <a:t>•  </a:t>
+            </a:r>
+            <a:r>
+              <a:rPr sz="1200" b="0" i="0">
+                <a:solidFill>
+                  <a:srgbClr val="FFFFFF"/>
+                </a:solidFill>
+                <a:latin typeface="Alegreya Sans"/>
+              </a:rPr>
+              <a:t>Gouvernance, Data &amp; Compliance : KYC, BCBS 239, FINREP, Big Data (Hadoop)</a:t>
+            </a:r>
+          </a:p>
+          <a:p>
+            <a:pPr algn="l">
+              <a:spcAft>
+                <a:spcPts val="100"/>
+              </a:spcAft>
+            </a:pPr>
+            <a:r>
+              <a:rPr sz="1200" b="1" i="0">
+                <a:solidFill>
+                  <a:srgbClr val="3AEDE5"/>
+                </a:solidFill>
+                <a:latin typeface="Alegreya Sans"/>
+              </a:rPr>
+              <a:t>•  </a:t>
+            </a:r>
+            <a:r>
+              <a:rPr sz="1200" b="0" i="0">
+                <a:solidFill>
+                  <a:srgbClr val="FFFFFF"/>
+                </a:solidFill>
+                <a:latin typeface="Alegreya Sans"/>
+              </a:rPr>
+              <a:t>Management &amp; accompagnement : formation d'équipes, conduite du changement</a:t>
+            </a:r>
+          </a:p>
+          <a:p>
+            <a:pPr algn="l">
+              <a:spcBef>
+                <a:spcPts val="600"/>
+              </a:spcBef>
+              <a:spcAft>
+                <a:spcPts val="300"/>
+              </a:spcAft>
+            </a:pPr>
+            <a:r>
+              <a:rPr sz="1300" b="1" i="0">
+                <a:solidFill>
+                  <a:srgbClr val="3AEDE5"/>
+                </a:solidFill>
+                <a:latin typeface="Alegreya Sans"/>
+              </a:rPr>
+              <a:t>LANGUES</a:t>
+            </a:r>
+          </a:p>
+          <a:p>
+            <a:pPr algn="l">
+              <a:spcAft>
+                <a:spcPts val="100"/>
+              </a:spcAft>
+            </a:pPr>
+            <a:r>
+              <a:rPr sz="1200" b="1" i="0">
+                <a:solidFill>
+                  <a:srgbClr val="3AEDE5"/>
+                </a:solidFill>
+                <a:latin typeface="Alegreya Sans"/>
+              </a:rPr>
+              <a:t>•  </a:t>
+            </a:r>
+            <a:r>
+              <a:rPr sz="1200" b="0" i="0">
+                <a:solidFill>
+                  <a:srgbClr val="FFFFFF"/>
+                </a:solidFill>
+                <a:latin typeface="Alegreya Sans"/>
+              </a:rPr>
+              <a:t>Français — Langue maternelle</a:t>
+            </a:r>
+          </a:p>
+          <a:p>
+            <a:pPr algn="l">
+              <a:spcAft>
+                <a:spcPts val="100"/>
+              </a:spcAft>
+            </a:pPr>
+            <a:r>
+              <a:rPr sz="1200" b="1" i="0">
+                <a:solidFill>
+                  <a:srgbClr val="3AEDE5"/>
+                </a:solidFill>
+                <a:latin typeface="Alegreya Sans"/>
+              </a:rPr>
+              <a:t>•  </a:t>
+            </a:r>
+            <a:r>
+              <a:rPr sz="1200" b="0" i="0">
+                <a:solidFill>
+                  <a:srgbClr val="FFFFFF"/>
+                </a:solidFill>
+                <a:latin typeface="Alegreya Sans"/>
+              </a:rPr>
+              <a:t>Anglais — Courant</a:t>
+            </a:r>
+          </a:p>
+          <a:p>
+            <a:pPr algn="l">
+              <a:spcAft>
+                <a:spcPts val="100"/>
+              </a:spcAft>
+            </a:pPr>
+            <a:r>
+              <a:rPr sz="1200" b="1" i="0">
+                <a:solidFill>
+                  <a:srgbClr val="3AEDE5"/>
+                </a:solidFill>
+                <a:latin typeface="Alegreya Sans"/>
+              </a:rPr>
+              <a:t>•  </a:t>
+            </a:r>
+            <a:r>
+              <a:rPr sz="1200" b="0" i="0">
+                <a:solidFill>
+                  <a:srgbClr val="FFFFFF"/>
+                </a:solidFill>
+                <a:latin typeface="Alegreya Sans"/>
+              </a:rPr>
+              <a:t>Espagnol — Courant</a:t>
+            </a:r>
+          </a:p>
+        </p:txBody>
+      </p:sp>
+      <p:sp>
+        <p:nvSpPr>
+          <p:cNvPr id="8" name="TextBox 7"/>
+          <p:cNvSpPr txBox="1"/>
+          <p:nvPr/>
+        </p:nvSpPr>
+        <p:spPr>
+          <a:xfrm>
+            <a:off x="4528600" y="1180000"/>
+            <a:ext cx="7434800" cy="5318000"/>
+          </a:xfrm>
+          <a:prstGeom prst="rect">
+            <a:avLst/>
+          </a:prstGeom>
+          <a:noFill/>
+        </p:spPr>
+        <p:txBody>
+          <a:bodyPr wrap="square" lIns="0" rIns="0" tIns="0" bIns="0">
+            <a:spAutoFit/>
+          </a:bodyPr>
+          <a:lstStyle/>
+          <a:p>
+            <a:pPr algn="l">
+              <a:spcAft>
+                <a:spcPts val="300"/>
+              </a:spcAft>
+            </a:pPr>
+            <a:r>
+              <a:rPr sz="1300" b="1" i="0">
+                <a:solidFill>
+                  <a:srgbClr val="3AEDE5"/>
+                </a:solidFill>
+                <a:latin typeface="Alegreya Sans"/>
+              </a:rPr>
+              <a:t>PRINCIPALES EXPÉRIENCES PROFESSIONNELLES (suite)</a:t>
+            </a:r>
+          </a:p>
+          <a:p>
+            <a:pPr algn="l">
+              <a:spcAft>
+                <a:spcPts val="100"/>
+              </a:spcAft>
+            </a:pPr>
+            <a:r>
+              <a:rPr sz="1200" b="1" i="0">
+                <a:solidFill>
+                  <a:srgbClr val="3AEDE5"/>
+                </a:solidFill>
+                <a:latin typeface="Alegreya Sans"/>
+              </a:rPr>
+              <a:t>▸ </a:t>
+            </a:r>
+            <a:r>
+              <a:rPr sz="1200" b="1" i="0">
+                <a:solidFill>
+                  <a:srgbClr val="FFFFFF"/>
+                </a:solidFill>
+                <a:latin typeface="Alegreya Sans"/>
+              </a:rPr>
+              <a:t>CGI Business Consulting</a:t>
+            </a:r>
+            <a:r>
+              <a:rPr sz="1200" b="0" i="0">
+                <a:solidFill>
+                  <a:srgbClr val="FFFFFF"/>
+                </a:solidFill>
+                <a:latin typeface="Alegreya Sans"/>
+              </a:rPr>
+              <a:t> — Senior Manager — Banque Assurance</a:t>
+            </a:r>
+            <a:r>
+              <a:rPr sz="1200" b="0" i="1">
+                <a:solidFill>
+                  <a:srgbClr val="3AEDE5"/>
+                </a:solidFill>
+                <a:latin typeface="Alegreya Sans"/>
+              </a:rPr>
+              <a:t>  (2022 — 2025)</a:t>
+            </a:r>
+          </a:p>
+          <a:p>
+            <a:pPr algn="l" lvl="1">
+              <a:spcAft>
+                <a:spcPts val="100"/>
+              </a:spcAft>
+            </a:pPr>
+            <a:r>
+              <a:rPr sz="1200" b="1" i="0">
+                <a:solidFill>
+                  <a:srgbClr val="3AEDE5"/>
+                </a:solidFill>
+                <a:latin typeface="Alegreya Sans"/>
+              </a:rPr>
+              <a:t>•  </a:t>
+            </a:r>
+            <a:r>
+              <a:rPr sz="1200" b="0" i="0">
+                <a:solidFill>
+                  <a:srgbClr val="FFFFFF"/>
+                </a:solidFill>
+                <a:latin typeface="Alegreya Sans"/>
+              </a:rPr>
+              <a:t>BPCE, projet SIGMA (S2 2023) : gestion de projet IAM, conduite d'un pilote pour la standardisation des habilitations garantissant la sécurité réglementaire du socle commun Groupe.</a:t>
+            </a:r>
+          </a:p>
+          <a:p>
+            <a:pPr algn="l" lvl="1">
+              <a:spcAft>
+                <a:spcPts val="100"/>
+              </a:spcAft>
+            </a:pPr>
+            <a:r>
+              <a:rPr sz="1200" b="1" i="0">
+                <a:solidFill>
+                  <a:srgbClr val="3AEDE5"/>
+                </a:solidFill>
+                <a:latin typeface="Alegreya Sans"/>
+              </a:rPr>
+              <a:t>•  </a:t>
+            </a:r>
+            <a:r>
+              <a:rPr sz="1200" b="0" i="0">
+                <a:solidFill>
+                  <a:srgbClr val="FFFFFF"/>
+                </a:solidFill>
+                <a:latin typeface="Alegreya Sans"/>
+              </a:rPr>
+              <a:t>Transfert de connaissances, manuels utilisateurs, formation et déploiement au niveau Groupe.</a:t>
+            </a:r>
+          </a:p>
+          <a:p>
+            <a:pPr algn="l" lvl="1">
+              <a:spcAft>
+                <a:spcPts val="100"/>
+              </a:spcAft>
+            </a:pPr>
+            <a:r>
+              <a:rPr sz="1200" b="1" i="0">
+                <a:solidFill>
+                  <a:srgbClr val="3AEDE5"/>
+                </a:solidFill>
+                <a:latin typeface="Alegreya Sans"/>
+              </a:rPr>
+              <a:t>•  </a:t>
+            </a:r>
+            <a:r>
+              <a:rPr sz="1200" b="0" i="0">
+                <a:solidFill>
+                  <a:srgbClr val="FFFFFF"/>
+                </a:solidFill>
+                <a:latin typeface="Alegreya Sans"/>
+              </a:rPr>
+              <a:t>Crédit Agricole CIB (S1 2023) : supervision d'une taskforce Cash Management / Correspondent Banking, management de 20+ consultants juniors et confirmés, définition des KPI et animation des comités hebdomadaires auprès de la Direction des Paiements.</a:t>
+            </a:r>
+          </a:p>
+          <a:p>
+            <a:pPr algn="l" lvl="1">
+              <a:spcAft>
+                <a:spcPts val="100"/>
+              </a:spcAft>
+            </a:pPr>
+            <a:r>
+              <a:rPr sz="1200" b="1" i="0">
+                <a:solidFill>
+                  <a:srgbClr val="3AEDE5"/>
+                </a:solidFill>
+                <a:latin typeface="Alegreya Sans"/>
+              </a:rPr>
+              <a:t>•  </a:t>
+            </a:r>
+            <a:r>
+              <a:rPr sz="1200" b="0" i="0">
+                <a:solidFill>
+                  <a:srgbClr val="FFFFFF"/>
+                </a:solidFill>
+                <a:latin typeface="Alegreya Sans"/>
+              </a:rPr>
+              <a:t>Développement commercial du portefeuille Banque-Assurance (PNB &gt; 200 K€) ; membre de la Communauté Data &amp; IA.</a:t>
+            </a:r>
+          </a:p>
+          <a:p>
+            <a:pPr algn="l">
+              <a:spcAft>
+                <a:spcPts val="100"/>
+              </a:spcAft>
+            </a:pPr>
+            <a:r>
+              <a:rPr sz="1200" b="1" i="0">
+                <a:solidFill>
+                  <a:srgbClr val="3AEDE5"/>
+                </a:solidFill>
+                <a:latin typeface="Alegreya Sans"/>
+              </a:rPr>
+              <a:t>▸ </a:t>
+            </a:r>
+            <a:r>
+              <a:rPr sz="1200" b="1" i="0">
+                <a:solidFill>
+                  <a:srgbClr val="FFFFFF"/>
+                </a:solidFill>
+                <a:latin typeface="Alegreya Sans"/>
+              </a:rPr>
+              <a:t>Société Générale — Direction de la Conformité</a:t>
+            </a:r>
+            <a:r>
+              <a:rPr sz="1200" b="0" i="0">
+                <a:solidFill>
+                  <a:srgbClr val="FFFFFF"/>
+                </a:solidFill>
+                <a:latin typeface="Alegreya Sans"/>
+              </a:rPr>
+              <a:t> — Responsable de projet KYC</a:t>
+            </a:r>
+            <a:r>
+              <a:rPr sz="1200" b="0" i="1">
+                <a:solidFill>
+                  <a:srgbClr val="3AEDE5"/>
+                </a:solidFill>
+                <a:latin typeface="Alegreya Sans"/>
+              </a:rPr>
+              <a:t>  (2019 — 2022)</a:t>
+            </a:r>
+          </a:p>
+          <a:p>
+            <a:pPr algn="l" lvl="1">
+              <a:spcAft>
+                <a:spcPts val="100"/>
+              </a:spcAft>
+            </a:pPr>
+            <a:r>
+              <a:rPr sz="1200" b="1" i="0">
+                <a:solidFill>
+                  <a:srgbClr val="3AEDE5"/>
+                </a:solidFill>
+                <a:latin typeface="Alegreya Sans"/>
+              </a:rPr>
+              <a:t>•  </a:t>
+            </a:r>
+            <a:r>
+              <a:rPr sz="1200" b="0" i="0">
+                <a:solidFill>
+                  <a:srgbClr val="FFFFFF"/>
+                </a:solidFill>
+                <a:latin typeface="Alegreya Sans"/>
+              </a:rPr>
+              <a:t>Définition du Target Operating Model pour la digitalisation KYC et déploiement auprès des filiales et business units ; pilotage des POC internationaux et validation du modèle cible.</a:t>
+            </a:r>
+          </a:p>
+          <a:p>
+            <a:pPr algn="l" lvl="1">
+              <a:spcAft>
+                <a:spcPts val="100"/>
+              </a:spcAft>
+            </a:pPr>
+            <a:r>
+              <a:rPr sz="1200" b="1" i="0">
+                <a:solidFill>
+                  <a:srgbClr val="3AEDE5"/>
+                </a:solidFill>
+                <a:latin typeface="Alegreya Sans"/>
+              </a:rPr>
+              <a:t>•  </a:t>
+            </a:r>
+            <a:r>
+              <a:rPr sz="1200" b="0" i="0">
+                <a:solidFill>
+                  <a:srgbClr val="FFFFFF"/>
+                </a:solidFill>
+                <a:latin typeface="Alegreya Sans"/>
+              </a:rPr>
+              <a:t>Intégration de solutions Blockchain et IA pour fiabiliser les dossiers KYC à plus de 90 % ; nouvelles solutions technologiques (SWIFT, CLIPEUM, reconnaissance faciale) déployées sur 3 Centres de Services Partagés.</a:t>
+            </a:r>
+          </a:p>
+          <a:p>
+            <a:pPr algn="l" lvl="1">
+              <a:spcAft>
+                <a:spcPts val="100"/>
+              </a:spcAft>
+            </a:pPr>
+            <a:r>
+              <a:rPr sz="1200" b="1" i="0">
+                <a:solidFill>
+                  <a:srgbClr val="3AEDE5"/>
+                </a:solidFill>
+                <a:latin typeface="Alegreya Sans"/>
+              </a:rPr>
+              <a:t>•  </a:t>
+            </a:r>
+            <a:r>
+              <a:rPr sz="1200" b="0" i="0">
+                <a:solidFill>
+                  <a:srgbClr val="FFFFFF"/>
+                </a:solidFill>
+                <a:latin typeface="Alegreya Sans"/>
+              </a:rPr>
+              <a:t>Tableaux de bord de monitoring en temps réel de la conformité des flux ; résultat : réduction du risque opérationnel et harmonisation des processus KYC au niveau Groupe.</a:t>
+            </a:r>
+          </a:p>
+        </p:txBody>
+      </p:sp>
+      <p:sp>
+        <p:nvSpPr>
+          <p:cNvPr id="9" name="Rectangle 8"/>
+          <p:cNvSpPr/>
+          <p:nvPr/>
+        </p:nvSpPr>
+        <p:spPr>
+          <a:xfrm>
+            <a:off x="0" y="6578000"/>
+            <a:ext cx="12192000" cy="280000"/>
+          </a:xfrm>
+          <a:prstGeom prst="rect">
+            <a:avLst/>
+          </a:prstGeom>
+          <a:solidFill>
+            <a:srgbClr val="061A5E"/>
+          </a:solidFill>
+          <a:ln>
+            <a:noFill/>
+          </a:ln>
+          <a:effectLst/>
+        </p:spPr>
+        <p:style>
+          <a:lnRef idx="1">
+            <a:schemeClr val="accent1"/>
+          </a:lnRef>
+          <a:fillRef idx="3">
+            <a:schemeClr val="accent1"/>
+          </a:fillRef>
+          <a:effectRef idx="2">
+            <a:schemeClr val="accent1"/>
+          </a:effectRef>
+          <a:fontRef idx="minor">
+            <a:schemeClr val="lt1"/>
+          </a:fontRef>
+        </p:style>
+        <p:txBody>
+          <a:bodyPr rtlCol="0" anchor="ctr"/>
+          <a:lstStyle/>
+          <a:p>
+            <a:pPr algn="ctr"/>
+          </a:p>
+        </p:txBody>
+      </p:sp>
+      <p:sp>
+        <p:nvSpPr>
+          <p:cNvPr id="10" name="TextBox 9"/>
+          <p:cNvSpPr txBox="1"/>
+          <p:nvPr/>
+        </p:nvSpPr>
+        <p:spPr>
+          <a:xfrm>
+            <a:off x="228600" y="6578000"/>
+            <a:ext cx="11734800" cy="280000"/>
+          </a:xfrm>
+          <a:prstGeom prst="rect">
+            <a:avLst/>
+          </a:prstGeom>
+          <a:noFill/>
+        </p:spPr>
+        <p:txBody>
+          <a:bodyPr wrap="square" lIns="0" rIns="0" tIns="0" bIns="0">
+            <a:spAutoFit/>
+          </a:bodyPr>
+          <a:lstStyle/>
+          <a:p>
+            <a:pPr algn="ctr"/>
+            <a:r>
+              <a:rPr sz="1000" b="0" i="1">
+                <a:solidFill>
+                  <a:srgbClr val="CCD6E8"/>
+                </a:solidFill>
+                <a:latin typeface="Alegreya Sans"/>
+              </a:rPr>
+              <a:t>Les informations de ce document sont strictement confidentielles — Ce document ne peut être partagé qu'avec l'accord de son propriétaire</a:t>
+            </a:r>
+          </a:p>
+        </p:txBody>
+      </p:sp>
+    </p:spTree>
+  </p:cSld>
+  <p:clrMapOvr>
+    <a:masterClrMapping/>
+  </p:clrMapOvr>
+</p:sld>
+</file>
+
+<file path=ppt/slides/slide4.xml><?xml version="1.0" encoding="utf-8"?>
+<p:sld xmlns:a="http://schemas.openxmlformats.org/drawingml/2006/main" xmlns:p="http://schemas.openxmlformats.org/presentationml/2006/main" xmlns:r="http://schemas.openxmlformats.org/officeDocument/2006/relationships">
+  <p:cSld>
+    <p:spTree>
+      <p:nvGrpSpPr>
+        <p:cNvPr id="1" name=""/>
+        <p:cNvGrpSpPr/>
+        <p:nvPr/>
+      </p:nvGrpSpPr>
+      <p:grpSpPr/>
+      <p:sp>
+        <p:nvSpPr>
+          <p:cNvPr id="2" name="Rectangle 1"/>
+          <p:cNvSpPr/>
+          <p:nvPr/>
+        </p:nvSpPr>
+        <p:spPr>
+          <a:xfrm>
+            <a:off x="0" y="0"/>
+            <a:ext cx="12192000" cy="6858000"/>
+          </a:xfrm>
+          <a:prstGeom prst="rect">
+            <a:avLst/>
+          </a:prstGeom>
+          <a:solidFill>
+            <a:srgbClr val="061A5E"/>
+          </a:solidFill>
+          <a:ln>
+            <a:noFill/>
+          </a:ln>
+          <a:effectLst/>
+        </p:spPr>
+        <p:style>
+          <a:lnRef idx="1">
+            <a:schemeClr val="accent1"/>
+          </a:lnRef>
+          <a:fillRef idx="3">
+            <a:schemeClr val="accent1"/>
+          </a:fillRef>
+          <a:effectRef idx="2">
+            <a:schemeClr val="accent1"/>
+          </a:effectRef>
+          <a:fontRef idx="minor">
+            <a:schemeClr val="lt1"/>
+          </a:fontRef>
+        </p:style>
+        <p:txBody>
+          <a:bodyPr rtlCol="0" anchor="ctr"/>
+          <a:lstStyle/>
+          <a:p>
+            <a:pPr algn="ctr"/>
+          </a:p>
+        </p:txBody>
+      </p:sp>
+      <p:sp>
+        <p:nvSpPr>
+          <p:cNvPr id="3" name="Rectangle 2"/>
+          <p:cNvSpPr/>
+          <p:nvPr/>
+        </p:nvSpPr>
+        <p:spPr>
+          <a:xfrm>
+            <a:off x="4300000" y="0"/>
+            <a:ext cx="15000" cy="6858000"/>
+          </a:xfrm>
+          <a:prstGeom prst="rect">
+            <a:avLst/>
+          </a:prstGeom>
+          <a:solidFill>
+            <a:srgbClr val="3AEDE5"/>
+          </a:solidFill>
+          <a:ln>
+            <a:noFill/>
+          </a:ln>
+          <a:effectLst/>
+        </p:spPr>
+        <p:style>
+          <a:lnRef idx="1">
+            <a:schemeClr val="accent1"/>
+          </a:lnRef>
+          <a:fillRef idx="3">
+            <a:schemeClr val="accent1"/>
+          </a:fillRef>
+          <a:effectRef idx="2">
+            <a:schemeClr val="accent1"/>
+          </a:effectRef>
+          <a:fontRef idx="minor">
+            <a:schemeClr val="lt1"/>
+          </a:fontRef>
+        </p:style>
+        <p:txBody>
+          <a:bodyPr rtlCol="0" anchor="ctr"/>
+          <a:lstStyle/>
+          <a:p>
+            <a:pPr algn="ctr"/>
+          </a:p>
+        </p:txBody>
+      </p:sp>
+      <p:pic>
+        <p:nvPicPr>
+          <p:cNvPr id="4" name="Picture 3" descr="inside_circle_logo.png"/>
+          <p:cNvPicPr>
+            <a:picLocks noChangeAspect="1"/>
+          </p:cNvPicPr>
+          <p:nvPr/>
+        </p:nvPicPr>
+        <p:blipFill>
+          <a:blip r:embed="rId2"/>
+          <a:stretch>
+            <a:fillRect/>
+          </a:stretch>
+        </p:blipFill>
+        <p:spPr>
+          <a:xfrm>
+            <a:off x="10660000" y="130000"/>
+            <a:ext cx="1302000" cy="420000"/>
+          </a:xfrm>
+          <a:prstGeom prst="rect">
+            <a:avLst/>
+          </a:prstGeom>
+        </p:spPr>
+      </p:pic>
+      <p:sp>
+        <p:nvSpPr>
+          <p:cNvPr id="5" name="TextBox 4"/>
+          <p:cNvSpPr txBox="1"/>
+          <p:nvPr/>
+        </p:nvSpPr>
+        <p:spPr>
+          <a:xfrm>
+            <a:off x="228600" y="240000"/>
+            <a:ext cx="3842800" cy="1300000"/>
+          </a:xfrm>
+          <a:prstGeom prst="rect">
+            <a:avLst/>
+          </a:prstGeom>
+          <a:noFill/>
+        </p:spPr>
+        <p:txBody>
+          <a:bodyPr wrap="square" lIns="0" rIns="0" tIns="0" bIns="0">
+            <a:spAutoFit/>
+          </a:bodyPr>
+          <a:lstStyle/>
+          <a:p>
+            <a:pPr algn="l"/>
+            <a:r>
+              <a:rPr sz="2800" b="0" i="0">
+                <a:solidFill>
+                  <a:srgbClr val="3AEDE5"/>
+                </a:solidFill>
+                <a:latin typeface="Alegreya Sans"/>
+              </a:rPr>
+              <a:t>Christophe</a:t>
+            </a:r>
+          </a:p>
+          <a:p>
+            <a:pPr>
+              <a:spcBef>
+                <a:spcPts val="0"/>
+              </a:spcBef>
+            </a:pPr>
+            <a:r>
+              <a:rPr sz="3200" b="1" i="0">
+                <a:solidFill>
+                  <a:srgbClr val="3AEDE5"/>
+                </a:solidFill>
+                <a:latin typeface="Alegreya Sans"/>
+              </a:rPr>
+              <a:t>POBEREJSKY</a:t>
+            </a:r>
+          </a:p>
+        </p:txBody>
+      </p:sp>
+      <p:sp>
+        <p:nvSpPr>
+          <p:cNvPr id="6" name="TextBox 5"/>
+          <p:cNvSpPr txBox="1"/>
+          <p:nvPr/>
+        </p:nvSpPr>
+        <p:spPr>
+          <a:xfrm>
+            <a:off x="4528600" y="300000"/>
+            <a:ext cx="5963400" cy="800000"/>
+          </a:xfrm>
+          <a:prstGeom prst="rect">
+            <a:avLst/>
+          </a:prstGeom>
+          <a:noFill/>
+        </p:spPr>
+        <p:txBody>
+          <a:bodyPr wrap="square" lIns="0" rIns="0" tIns="0" bIns="0">
+            <a:spAutoFit/>
+          </a:bodyPr>
+          <a:lstStyle/>
+          <a:p>
+            <a:r>
+              <a:rPr sz="2400" b="1" i="0">
+                <a:solidFill>
+                  <a:srgbClr val="FFFFFF"/>
+                </a:solidFill>
+                <a:latin typeface="Alegreya Sans"/>
+              </a:rPr>
+              <a:t>Manager de Transition — Direction de Programme IT &amp; Finance (suite)</a:t>
+            </a:r>
+          </a:p>
+          <a:p>
+            <a:pPr>
+              <a:spcBef>
+                <a:spcPts val="200"/>
+              </a:spcBef>
+            </a:pPr>
+            <a:r>
+              <a:rPr sz="1500" b="0" i="1">
+                <a:solidFill>
+                  <a:srgbClr val="3AEDE5"/>
+                </a:solidFill>
+                <a:latin typeface="Alegreya Sans"/>
+              </a:rPr>
+              <a:t>Transformation IT &amp; Finance — Banque, Secteur Public, Mobilités</a:t>
+            </a:r>
+          </a:p>
+        </p:txBody>
+      </p:sp>
+      <p:sp>
+        <p:nvSpPr>
+          <p:cNvPr id="7" name="TextBox 6"/>
+          <p:cNvSpPr txBox="1"/>
+          <p:nvPr/>
+        </p:nvSpPr>
+        <p:spPr>
+          <a:xfrm>
+            <a:off x="228600" y="1180000"/>
+            <a:ext cx="3842800" cy="5318000"/>
+          </a:xfrm>
+          <a:prstGeom prst="rect">
+            <a:avLst/>
+          </a:prstGeom>
+          <a:noFill/>
+        </p:spPr>
+        <p:txBody>
+          <a:bodyPr wrap="square" lIns="0" rIns="0" tIns="0" bIns="0">
+            <a:spAutoFit/>
+          </a:bodyPr>
+          <a:lstStyle/>
+          <a:p>
+            <a:pPr algn="l">
+              <a:spcAft>
+                <a:spcPts val="300"/>
+              </a:spcAft>
+            </a:pPr>
+            <a:r>
+              <a:rPr sz="1300" b="1" i="0">
+                <a:solidFill>
+                  <a:srgbClr val="3AEDE5"/>
+                </a:solidFill>
+                <a:latin typeface="Alegreya Sans"/>
+              </a:rPr>
+              <a:t>DOMAINES D'EXPERTISE</a:t>
+            </a:r>
+          </a:p>
+          <a:p>
+            <a:pPr algn="l">
+              <a:spcAft>
+                <a:spcPts val="100"/>
+              </a:spcAft>
+            </a:pPr>
+            <a:r>
+              <a:rPr sz="1200" b="1" i="0">
+                <a:solidFill>
+                  <a:srgbClr val="3AEDE5"/>
+                </a:solidFill>
+                <a:latin typeface="Alegreya Sans"/>
+              </a:rPr>
+              <a:t>•  </a:t>
+            </a:r>
+            <a:r>
+              <a:rPr sz="1200" b="0" i="0">
+                <a:solidFill>
+                  <a:srgbClr val="FFFFFF"/>
+                </a:solidFill>
+                <a:latin typeface="Alegreya Sans"/>
+              </a:rPr>
+              <a:t>Pilotage de programmes et de projets IT : cadrage, gouvernance, feuille de route, PMO</a:t>
+            </a:r>
+          </a:p>
+          <a:p>
+            <a:pPr algn="l">
+              <a:spcAft>
+                <a:spcPts val="100"/>
+              </a:spcAft>
+            </a:pPr>
+            <a:r>
+              <a:rPr sz="1200" b="1" i="0">
+                <a:solidFill>
+                  <a:srgbClr val="3AEDE5"/>
+                </a:solidFill>
+                <a:latin typeface="Alegreya Sans"/>
+              </a:rPr>
+              <a:t>•  </a:t>
+            </a:r>
+            <a:r>
+              <a:rPr sz="1200" b="0" i="0">
+                <a:solidFill>
+                  <a:srgbClr val="FFFFFF"/>
+                </a:solidFill>
+                <a:latin typeface="Alegreya Sans"/>
+              </a:rPr>
+              <a:t>Secteurs : banque, secteur public, mobilités urbaines</a:t>
+            </a:r>
+          </a:p>
+          <a:p>
+            <a:pPr algn="l">
+              <a:spcAft>
+                <a:spcPts val="100"/>
+              </a:spcAft>
+            </a:pPr>
+            <a:r>
+              <a:rPr sz="1200" b="1" i="0">
+                <a:solidFill>
+                  <a:srgbClr val="3AEDE5"/>
+                </a:solidFill>
+                <a:latin typeface="Alegreya Sans"/>
+              </a:rPr>
+              <a:t>•  </a:t>
+            </a:r>
+            <a:r>
+              <a:rPr sz="1200" b="0" i="0">
+                <a:solidFill>
+                  <a:srgbClr val="FFFFFF"/>
+                </a:solidFill>
+                <a:latin typeface="Alegreya Sans"/>
+              </a:rPr>
+              <a:t>Systèmes et solutions : paiements, cash management, ERP, CRM, Business Intelligence, KYC</a:t>
+            </a:r>
+          </a:p>
+          <a:p>
+            <a:pPr algn="l">
+              <a:spcAft>
+                <a:spcPts val="100"/>
+              </a:spcAft>
+            </a:pPr>
+            <a:r>
+              <a:rPr sz="1200" b="1" i="0">
+                <a:solidFill>
+                  <a:srgbClr val="3AEDE5"/>
+                </a:solidFill>
+                <a:latin typeface="Alegreya Sans"/>
+              </a:rPr>
+              <a:t>•  </a:t>
+            </a:r>
+            <a:r>
+              <a:rPr sz="1200" b="0" i="0">
+                <a:solidFill>
+                  <a:srgbClr val="FFFFFF"/>
+                </a:solidFill>
+                <a:latin typeface="Alegreya Sans"/>
+              </a:rPr>
+              <a:t>Schéma directeur IT &amp; cybersécurité</a:t>
+            </a:r>
+          </a:p>
+          <a:p>
+            <a:pPr algn="l">
+              <a:spcAft>
+                <a:spcPts val="100"/>
+              </a:spcAft>
+            </a:pPr>
+            <a:r>
+              <a:rPr sz="1200" b="1" i="0">
+                <a:solidFill>
+                  <a:srgbClr val="3AEDE5"/>
+                </a:solidFill>
+                <a:latin typeface="Alegreya Sans"/>
+              </a:rPr>
+              <a:t>•  </a:t>
+            </a:r>
+            <a:r>
+              <a:rPr sz="1200" b="0" i="0">
+                <a:solidFill>
+                  <a:srgbClr val="FFFFFF"/>
+                </a:solidFill>
+                <a:latin typeface="Alegreya Sans"/>
+              </a:rPr>
+              <a:t>Gouvernance, Data &amp; Compliance : KYC, BCBS 239, FINREP, Big Data (Hadoop)</a:t>
+            </a:r>
+          </a:p>
+          <a:p>
+            <a:pPr algn="l">
+              <a:spcAft>
+                <a:spcPts val="100"/>
+              </a:spcAft>
+            </a:pPr>
+            <a:r>
+              <a:rPr sz="1200" b="1" i="0">
+                <a:solidFill>
+                  <a:srgbClr val="3AEDE5"/>
+                </a:solidFill>
+                <a:latin typeface="Alegreya Sans"/>
+              </a:rPr>
+              <a:t>•  </a:t>
+            </a:r>
+            <a:r>
+              <a:rPr sz="1200" b="0" i="0">
+                <a:solidFill>
+                  <a:srgbClr val="FFFFFF"/>
+                </a:solidFill>
+                <a:latin typeface="Alegreya Sans"/>
+              </a:rPr>
+              <a:t>Management &amp; accompagnement : formation d'équipes, conduite du changement</a:t>
+            </a:r>
+          </a:p>
+          <a:p>
+            <a:pPr algn="l">
+              <a:spcBef>
+                <a:spcPts val="600"/>
+              </a:spcBef>
+              <a:spcAft>
+                <a:spcPts val="300"/>
+              </a:spcAft>
+            </a:pPr>
+            <a:r>
+              <a:rPr sz="1300" b="1" i="0">
+                <a:solidFill>
+                  <a:srgbClr val="3AEDE5"/>
+                </a:solidFill>
+                <a:latin typeface="Alegreya Sans"/>
+              </a:rPr>
+              <a:t>LANGUES</a:t>
+            </a:r>
+          </a:p>
+          <a:p>
+            <a:pPr algn="l">
+              <a:spcAft>
+                <a:spcPts val="100"/>
+              </a:spcAft>
+            </a:pPr>
+            <a:r>
+              <a:rPr sz="1200" b="1" i="0">
+                <a:solidFill>
+                  <a:srgbClr val="3AEDE5"/>
+                </a:solidFill>
+                <a:latin typeface="Alegreya Sans"/>
+              </a:rPr>
+              <a:t>•  </a:t>
+            </a:r>
+            <a:r>
+              <a:rPr sz="1200" b="0" i="0">
+                <a:solidFill>
+                  <a:srgbClr val="FFFFFF"/>
+                </a:solidFill>
+                <a:latin typeface="Alegreya Sans"/>
+              </a:rPr>
+              <a:t>Français — Langue maternelle</a:t>
+            </a:r>
+          </a:p>
+          <a:p>
+            <a:pPr algn="l">
+              <a:spcAft>
+                <a:spcPts val="100"/>
+              </a:spcAft>
+            </a:pPr>
+            <a:r>
+              <a:rPr sz="1200" b="1" i="0">
+                <a:solidFill>
+                  <a:srgbClr val="3AEDE5"/>
+                </a:solidFill>
+                <a:latin typeface="Alegreya Sans"/>
+              </a:rPr>
+              <a:t>•  </a:t>
+            </a:r>
+            <a:r>
+              <a:rPr sz="1200" b="0" i="0">
+                <a:solidFill>
+                  <a:srgbClr val="FFFFFF"/>
+                </a:solidFill>
+                <a:latin typeface="Alegreya Sans"/>
+              </a:rPr>
+              <a:t>Anglais — Courant</a:t>
+            </a:r>
+          </a:p>
+          <a:p>
+            <a:pPr algn="l">
+              <a:spcAft>
+                <a:spcPts val="100"/>
+              </a:spcAft>
+            </a:pPr>
+            <a:r>
+              <a:rPr sz="1200" b="1" i="0">
+                <a:solidFill>
+                  <a:srgbClr val="3AEDE5"/>
+                </a:solidFill>
+                <a:latin typeface="Alegreya Sans"/>
+              </a:rPr>
+              <a:t>•  </a:t>
+            </a:r>
+            <a:r>
+              <a:rPr sz="1200" b="0" i="0">
+                <a:solidFill>
+                  <a:srgbClr val="FFFFFF"/>
+                </a:solidFill>
+                <a:latin typeface="Alegreya Sans"/>
+              </a:rPr>
+              <a:t>Espagnol — Courant</a:t>
+            </a:r>
+          </a:p>
+        </p:txBody>
+      </p:sp>
+      <p:sp>
+        <p:nvSpPr>
+          <p:cNvPr id="8" name="TextBox 7"/>
+          <p:cNvSpPr txBox="1"/>
+          <p:nvPr/>
+        </p:nvSpPr>
+        <p:spPr>
+          <a:xfrm>
+            <a:off x="4528600" y="1180000"/>
+            <a:ext cx="7434800" cy="5318000"/>
+          </a:xfrm>
+          <a:prstGeom prst="rect">
+            <a:avLst/>
+          </a:prstGeom>
+          <a:noFill/>
+        </p:spPr>
+        <p:txBody>
+          <a:bodyPr wrap="square" lIns="0" rIns="0" tIns="0" bIns="0">
+            <a:spAutoFit/>
+          </a:bodyPr>
+          <a:lstStyle/>
+          <a:p>
+            <a:pPr algn="l">
+              <a:spcAft>
+                <a:spcPts val="300"/>
+              </a:spcAft>
+            </a:pPr>
+            <a:r>
+              <a:rPr sz="1300" b="1" i="0">
+                <a:solidFill>
+                  <a:srgbClr val="3AEDE5"/>
+                </a:solidFill>
+                <a:latin typeface="Alegreya Sans"/>
+              </a:rPr>
+              <a:t>PRINCIPALES EXPÉRIENCES PROFESSIONNELLES (suite)</a:t>
+            </a:r>
+          </a:p>
+          <a:p>
+            <a:pPr algn="l">
+              <a:spcAft>
+                <a:spcPts val="100"/>
+              </a:spcAft>
+            </a:pPr>
+            <a:r>
+              <a:rPr sz="1200" b="1" i="0">
+                <a:solidFill>
+                  <a:srgbClr val="3AEDE5"/>
+                </a:solidFill>
+                <a:latin typeface="Alegreya Sans"/>
+              </a:rPr>
+              <a:t>▸ </a:t>
+            </a:r>
+            <a:r>
+              <a:rPr sz="1200" b="1" i="0">
+                <a:solidFill>
+                  <a:srgbClr val="FFFFFF"/>
+                </a:solidFill>
+                <a:latin typeface="Alegreya Sans"/>
+              </a:rPr>
+              <a:t>Société Générale</a:t>
+            </a:r>
+            <a:r>
+              <a:rPr sz="1200" b="0" i="0">
+                <a:solidFill>
+                  <a:srgbClr val="FFFFFF"/>
+                </a:solidFill>
+                <a:latin typeface="Alegreya Sans"/>
+              </a:rPr>
+              <a:t> — Responsable Digital &amp; Pilotage de la Filière Risque / Finance</a:t>
+            </a:r>
+            <a:r>
+              <a:rPr sz="1200" b="0" i="1">
+                <a:solidFill>
+                  <a:srgbClr val="3AEDE5"/>
+                </a:solidFill>
+                <a:latin typeface="Alegreya Sans"/>
+              </a:rPr>
+              <a:t>  (2014 — 2019)</a:t>
+            </a:r>
+          </a:p>
+          <a:p>
+            <a:pPr algn="l" lvl="1">
+              <a:spcAft>
+                <a:spcPts val="100"/>
+              </a:spcAft>
+            </a:pPr>
+            <a:r>
+              <a:rPr sz="1200" b="1" i="0">
+                <a:solidFill>
+                  <a:srgbClr val="3AEDE5"/>
+                </a:solidFill>
+                <a:latin typeface="Alegreya Sans"/>
+              </a:rPr>
+              <a:t>•  </a:t>
+            </a:r>
+            <a:r>
+              <a:rPr sz="1200" b="0" i="0">
+                <a:solidFill>
+                  <a:srgbClr val="FFFFFF"/>
+                </a:solidFill>
+                <a:latin typeface="Alegreya Sans"/>
+              </a:rPr>
+              <a:t>Harmonisation des outils de pilotage commercial et financier des filiales bancaires (Afrique, Europe centrale, Russie) et mutualisation des KPI entre les directions Risque et Finance.</a:t>
+            </a:r>
+          </a:p>
+          <a:p>
+            <a:pPr algn="l" lvl="1">
+              <a:spcAft>
+                <a:spcPts val="100"/>
+              </a:spcAft>
+            </a:pPr>
+            <a:r>
+              <a:rPr sz="1200" b="1" i="0">
+                <a:solidFill>
+                  <a:srgbClr val="3AEDE5"/>
+                </a:solidFill>
+                <a:latin typeface="Alegreya Sans"/>
+              </a:rPr>
+              <a:t>•  </a:t>
+            </a:r>
+            <a:r>
+              <a:rPr sz="1200" b="0" i="0">
+                <a:solidFill>
+                  <a:srgbClr val="FFFFFF"/>
+                </a:solidFill>
+                <a:latin typeface="Alegreya Sans"/>
+              </a:rPr>
+              <a:t>Projet « Client 360 » : pilotage du POC d'un outil d'agrégation de données client connecté au Data Lake (Hadoop / Cloudera), permettant une analyse prédictive des risques de contrepartie.</a:t>
+            </a:r>
+          </a:p>
+          <a:p>
+            <a:pPr algn="l" lvl="1">
+              <a:spcAft>
+                <a:spcPts val="100"/>
+              </a:spcAft>
+            </a:pPr>
+            <a:r>
+              <a:rPr sz="1200" b="1" i="0">
+                <a:solidFill>
+                  <a:srgbClr val="3AEDE5"/>
+                </a:solidFill>
+                <a:latin typeface="Alegreya Sans"/>
+              </a:rPr>
+              <a:t>•  </a:t>
+            </a:r>
+            <a:r>
+              <a:rPr sz="1200" b="0" i="0">
+                <a:solidFill>
+                  <a:srgbClr val="FFFFFF"/>
+                </a:solidFill>
+                <a:latin typeface="Alegreya Sans"/>
+              </a:rPr>
+              <a:t>Transformation Data &amp; BI : déploiement de COGNOS BI et du CRM Microsoft Dynamics à l'international (1 000 utilisateurs) ; animation de filière (séminaires, intranet).</a:t>
+            </a:r>
+          </a:p>
+          <a:p>
+            <a:pPr algn="l">
+              <a:spcAft>
+                <a:spcPts val="100"/>
+              </a:spcAft>
+            </a:pPr>
+            <a:r>
+              <a:rPr sz="1200" b="1" i="0">
+                <a:solidFill>
+                  <a:srgbClr val="3AEDE5"/>
+                </a:solidFill>
+                <a:latin typeface="Alegreya Sans"/>
+              </a:rPr>
+              <a:t>▸ </a:t>
+            </a:r>
+            <a:r>
+              <a:rPr sz="1200" b="1" i="0">
+                <a:solidFill>
+                  <a:srgbClr val="FFFFFF"/>
+                </a:solidFill>
+                <a:latin typeface="Alegreya Sans"/>
+              </a:rPr>
+              <a:t>Société Générale</a:t>
+            </a:r>
+            <a:r>
+              <a:rPr sz="1200" b="0" i="0">
+                <a:solidFill>
+                  <a:srgbClr val="FFFFFF"/>
+                </a:solidFill>
+                <a:latin typeface="Alegreya Sans"/>
+              </a:rPr>
+              <a:t> — Vice-Président Marketing B2B — France et Europe de l'Ouest</a:t>
+            </a:r>
+            <a:r>
+              <a:rPr sz="1200" b="0" i="1">
+                <a:solidFill>
+                  <a:srgbClr val="3AEDE5"/>
+                </a:solidFill>
+                <a:latin typeface="Alegreya Sans"/>
+              </a:rPr>
+              <a:t>  (2007 — 2014)</a:t>
+            </a:r>
+          </a:p>
+          <a:p>
+            <a:pPr algn="l" lvl="1">
+              <a:spcAft>
+                <a:spcPts val="100"/>
+              </a:spcAft>
+            </a:pPr>
+            <a:r>
+              <a:rPr sz="1200" b="1" i="0">
+                <a:solidFill>
+                  <a:srgbClr val="3AEDE5"/>
+                </a:solidFill>
+                <a:latin typeface="Alegreya Sans"/>
+              </a:rPr>
+              <a:t>•  </a:t>
+            </a:r>
+            <a:r>
+              <a:rPr sz="1200" b="0" i="0">
+                <a:solidFill>
+                  <a:srgbClr val="FFFFFF"/>
+                </a:solidFill>
+                <a:latin typeface="Alegreya Sans"/>
+              </a:rPr>
+              <a:t>Accompagnement des Senior Bankers dans les plans d'action commerciale et la revue de portefeuilles stratégiques ; déploiement du CRM Microsoft Dynamics sur l'Europe de l'Ouest.</a:t>
+            </a:r>
+          </a:p>
+          <a:p>
+            <a:pPr algn="l" lvl="1">
+              <a:spcAft>
+                <a:spcPts val="100"/>
+              </a:spcAft>
+            </a:pPr>
+            <a:r>
+              <a:rPr sz="1200" b="1" i="0">
+                <a:solidFill>
+                  <a:srgbClr val="3AEDE5"/>
+                </a:solidFill>
+                <a:latin typeface="Alegreya Sans"/>
+              </a:rPr>
+              <a:t>•  </a:t>
+            </a:r>
+            <a:r>
+              <a:rPr sz="1200" b="0" i="0">
+                <a:solidFill>
+                  <a:srgbClr val="FFFFFF"/>
+                </a:solidFill>
+                <a:latin typeface="Alegreya Sans"/>
+              </a:rPr>
+              <a:t>Tableaux de bord de suivi des KPI ayant contribué à une croissance de 30 % du PNB sur le cash management et les services financiers spécialisés.</a:t>
+            </a:r>
+          </a:p>
+        </p:txBody>
+      </p:sp>
+      <p:sp>
+        <p:nvSpPr>
+          <p:cNvPr id="9" name="Rectangle 8"/>
+          <p:cNvSpPr/>
+          <p:nvPr/>
+        </p:nvSpPr>
+        <p:spPr>
+          <a:xfrm>
+            <a:off x="0" y="6578000"/>
+            <a:ext cx="12192000" cy="280000"/>
+          </a:xfrm>
+          <a:prstGeom prst="rect">
+            <a:avLst/>
+          </a:prstGeom>
+          <a:solidFill>
+            <a:srgbClr val="061A5E"/>
+          </a:solidFill>
+          <a:ln>
+            <a:noFill/>
+          </a:ln>
+          <a:effectLst/>
+        </p:spPr>
+        <p:style>
+          <a:lnRef idx="1">
+            <a:schemeClr val="accent1"/>
+          </a:lnRef>
+          <a:fillRef idx="3">
+            <a:schemeClr val="accent1"/>
+          </a:fillRef>
+          <a:effectRef idx="2">
+            <a:schemeClr val="accent1"/>
+          </a:effectRef>
+          <a:fontRef idx="minor">
+            <a:schemeClr val="lt1"/>
+          </a:fontRef>
+        </p:style>
+        <p:txBody>
+          <a:bodyPr rtlCol="0" anchor="ctr"/>
+          <a:lstStyle/>
+          <a:p>
+            <a:pPr algn="ctr"/>
+          </a:p>
+        </p:txBody>
+      </p:sp>
+      <p:sp>
+        <p:nvSpPr>
+          <p:cNvPr id="10" name="TextBox 9"/>
+          <p:cNvSpPr txBox="1"/>
+          <p:nvPr/>
+        </p:nvSpPr>
+        <p:spPr>
+          <a:xfrm>
+            <a:off x="228600" y="6578000"/>
+            <a:ext cx="11734800" cy="280000"/>
+          </a:xfrm>
+          <a:prstGeom prst="rect">
+            <a:avLst/>
+          </a:prstGeom>
+          <a:noFill/>
+        </p:spPr>
+        <p:txBody>
+          <a:bodyPr wrap="square" lIns="0" rIns="0" tIns="0" bIns="0">
+            <a:spAutoFit/>
+          </a:bodyPr>
+          <a:lstStyle/>
+          <a:p>
+            <a:pPr algn="ctr"/>
+            <a:r>
+              <a:rPr sz="1000" b="0" i="1">
+                <a:solidFill>
+                  <a:srgbClr val="CCD6E8"/>
+                </a:solidFill>
+                <a:latin typeface="Alegreya Sans"/>
+              </a:rPr>
+              <a:t>Les informations de ce document sont strictement confidentielles — Ce document ne peut être partagé qu'avec l'accord de son propriétaire</a:t>
+            </a:r>
+          </a:p>
+        </p:txBody>
+      </p:sp>
+    </p:spTree>
+  </p:cSld>
+  <p:clrMapOvr>
+    <a:masterClrMapping/>
+  </p:clrMapOvr>
+</p:sld>
+</file>
+
+<file path=ppt/slides/slide5.xml><?xml version="1.0" encoding="utf-8"?>
+<p:sld xmlns:a="http://schemas.openxmlformats.org/drawingml/2006/main" xmlns:p="http://schemas.openxmlformats.org/presentationml/2006/main" xmlns:r="http://schemas.openxmlformats.org/officeDocument/2006/relationships">
+  <p:cSld>
+    <p:spTree>
+      <p:nvGrpSpPr>
+        <p:cNvPr id="1" name=""/>
+        <p:cNvGrpSpPr/>
+        <p:nvPr/>
+      </p:nvGrpSpPr>
+      <p:grpSpPr/>
+      <p:sp>
+        <p:nvSpPr>
+          <p:cNvPr id="2" name="Rectangle 1"/>
+          <p:cNvSpPr/>
+          <p:nvPr/>
+        </p:nvSpPr>
+        <p:spPr>
+          <a:xfrm>
+            <a:off x="0" y="0"/>
+            <a:ext cx="12192000" cy="6858000"/>
+          </a:xfrm>
+          <a:prstGeom prst="rect">
+            <a:avLst/>
+          </a:prstGeom>
+          <a:solidFill>
+            <a:srgbClr val="061A5E"/>
+          </a:solidFill>
+          <a:ln>
+            <a:noFill/>
+          </a:ln>
+          <a:effectLst/>
+        </p:spPr>
+        <p:style>
+          <a:lnRef idx="1">
+            <a:schemeClr val="accent1"/>
+          </a:lnRef>
+          <a:fillRef idx="3">
+            <a:schemeClr val="accent1"/>
+          </a:fillRef>
+          <a:effectRef idx="2">
+            <a:schemeClr val="accent1"/>
+          </a:effectRef>
+          <a:fontRef idx="minor">
+            <a:schemeClr val="lt1"/>
+          </a:fontRef>
+        </p:style>
+        <p:txBody>
+          <a:bodyPr rtlCol="0" anchor="ctr"/>
+          <a:lstStyle/>
+          <a:p>
+            <a:pPr algn="ctr"/>
+          </a:p>
+        </p:txBody>
+      </p:sp>
+      <p:sp>
+        <p:nvSpPr>
+          <p:cNvPr id="3" name="Rectangle 2"/>
+          <p:cNvSpPr/>
+          <p:nvPr/>
+        </p:nvSpPr>
+        <p:spPr>
+          <a:xfrm>
+            <a:off x="4300000" y="0"/>
+            <a:ext cx="15000" cy="6858000"/>
+          </a:xfrm>
+          <a:prstGeom prst="rect">
+            <a:avLst/>
+          </a:prstGeom>
+          <a:solidFill>
+            <a:srgbClr val="3AEDE5"/>
+          </a:solidFill>
+          <a:ln>
+            <a:noFill/>
+          </a:ln>
+          <a:effectLst/>
+        </p:spPr>
+        <p:style>
+          <a:lnRef idx="1">
+            <a:schemeClr val="accent1"/>
+          </a:lnRef>
+          <a:fillRef idx="3">
+            <a:schemeClr val="accent1"/>
+          </a:fillRef>
+          <a:effectRef idx="2">
+            <a:schemeClr val="accent1"/>
+          </a:effectRef>
+          <a:fontRef idx="minor">
+            <a:schemeClr val="lt1"/>
+          </a:fontRef>
+        </p:style>
+        <p:txBody>
+          <a:bodyPr rtlCol="0" anchor="ctr"/>
+          <a:lstStyle/>
+          <a:p>
+            <a:pPr algn="ctr"/>
+          </a:p>
+        </p:txBody>
+      </p:sp>
+      <p:pic>
+        <p:nvPicPr>
+          <p:cNvPr id="4" name="Picture 3" descr="inside_circle_logo.png"/>
+          <p:cNvPicPr>
+            <a:picLocks noChangeAspect="1"/>
+          </p:cNvPicPr>
+          <p:nvPr/>
+        </p:nvPicPr>
+        <p:blipFill>
+          <a:blip r:embed="rId2"/>
+          <a:stretch>
+            <a:fillRect/>
+          </a:stretch>
+        </p:blipFill>
+        <p:spPr>
+          <a:xfrm>
+            <a:off x="10660000" y="130000"/>
+            <a:ext cx="1302000" cy="420000"/>
+          </a:xfrm>
+          <a:prstGeom prst="rect">
+            <a:avLst/>
+          </a:prstGeom>
+        </p:spPr>
+      </p:pic>
+      <p:sp>
+        <p:nvSpPr>
+          <p:cNvPr id="5" name="TextBox 4"/>
+          <p:cNvSpPr txBox="1"/>
+          <p:nvPr/>
+        </p:nvSpPr>
+        <p:spPr>
+          <a:xfrm>
+            <a:off x="228600" y="240000"/>
+            <a:ext cx="3842800" cy="1300000"/>
+          </a:xfrm>
+          <a:prstGeom prst="rect">
+            <a:avLst/>
+          </a:prstGeom>
+          <a:noFill/>
+        </p:spPr>
+        <p:txBody>
+          <a:bodyPr wrap="square" lIns="0" rIns="0" tIns="0" bIns="0">
+            <a:spAutoFit/>
+          </a:bodyPr>
+          <a:lstStyle/>
+          <a:p>
+            <a:pPr algn="l"/>
+            <a:r>
+              <a:rPr sz="2800" b="0" i="0">
+                <a:solidFill>
+                  <a:srgbClr val="3AEDE5"/>
+                </a:solidFill>
+                <a:latin typeface="Alegreya Sans"/>
+              </a:rPr>
+              <a:t>Christophe</a:t>
+            </a:r>
+          </a:p>
+          <a:p>
+            <a:pPr>
+              <a:spcBef>
+                <a:spcPts val="0"/>
+              </a:spcBef>
+            </a:pPr>
+            <a:r>
+              <a:rPr sz="3200" b="1" i="0">
+                <a:solidFill>
+                  <a:srgbClr val="3AEDE5"/>
+                </a:solidFill>
+                <a:latin typeface="Alegreya Sans"/>
+              </a:rPr>
+              <a:t>POBEREJSKY</a:t>
+            </a:r>
+          </a:p>
+        </p:txBody>
+      </p:sp>
+      <p:sp>
+        <p:nvSpPr>
+          <p:cNvPr id="6" name="TextBox 5"/>
+          <p:cNvSpPr txBox="1"/>
+          <p:nvPr/>
+        </p:nvSpPr>
+        <p:spPr>
+          <a:xfrm>
+            <a:off x="4528600" y="300000"/>
+            <a:ext cx="5963400" cy="800000"/>
+          </a:xfrm>
+          <a:prstGeom prst="rect">
+            <a:avLst/>
+          </a:prstGeom>
+          <a:noFill/>
+        </p:spPr>
+        <p:txBody>
+          <a:bodyPr wrap="square" lIns="0" rIns="0" tIns="0" bIns="0">
+            <a:spAutoFit/>
+          </a:bodyPr>
+          <a:lstStyle/>
+          <a:p>
+            <a:r>
+              <a:rPr sz="2400" b="1" i="0">
+                <a:solidFill>
+                  <a:srgbClr val="FFFFFF"/>
+                </a:solidFill>
+                <a:latin typeface="Alegreya Sans"/>
+              </a:rPr>
+              <a:t>Manager de Transition — Direction de Programme IT &amp; Finance (suite)</a:t>
+            </a:r>
+          </a:p>
+          <a:p>
+            <a:pPr>
+              <a:spcBef>
+                <a:spcPts val="200"/>
+              </a:spcBef>
+            </a:pPr>
+            <a:r>
+              <a:rPr sz="1500" b="0" i="1">
+                <a:solidFill>
+                  <a:srgbClr val="3AEDE5"/>
+                </a:solidFill>
+                <a:latin typeface="Alegreya Sans"/>
+              </a:rPr>
+              <a:t>Transformation IT &amp; Finance — Banque, Secteur Public, Mobilités</a:t>
+            </a:r>
+          </a:p>
+        </p:txBody>
+      </p:sp>
+      <p:sp>
+        <p:nvSpPr>
+          <p:cNvPr id="7" name="TextBox 6"/>
+          <p:cNvSpPr txBox="1"/>
+          <p:nvPr/>
+        </p:nvSpPr>
+        <p:spPr>
+          <a:xfrm>
+            <a:off x="228600" y="1180000"/>
+            <a:ext cx="3842800" cy="5318000"/>
+          </a:xfrm>
+          <a:prstGeom prst="rect">
+            <a:avLst/>
+          </a:prstGeom>
+          <a:noFill/>
+        </p:spPr>
+        <p:txBody>
+          <a:bodyPr wrap="square" lIns="0" rIns="0" tIns="0" bIns="0">
+            <a:spAutoFit/>
+          </a:bodyPr>
+          <a:lstStyle/>
+          <a:p>
+            <a:pPr algn="l">
+              <a:spcAft>
+                <a:spcPts val="300"/>
+              </a:spcAft>
+            </a:pPr>
+            <a:r>
+              <a:rPr sz="1300" b="1" i="0">
+                <a:solidFill>
+                  <a:srgbClr val="3AEDE5"/>
+                </a:solidFill>
+                <a:latin typeface="Alegreya Sans"/>
+              </a:rPr>
+              <a:t>DOMAINES D'EXPERTISE</a:t>
+            </a:r>
+          </a:p>
+          <a:p>
+            <a:pPr algn="l">
+              <a:spcAft>
+                <a:spcPts val="100"/>
+              </a:spcAft>
+            </a:pPr>
+            <a:r>
+              <a:rPr sz="1200" b="1" i="0">
+                <a:solidFill>
+                  <a:srgbClr val="3AEDE5"/>
+                </a:solidFill>
+                <a:latin typeface="Alegreya Sans"/>
+              </a:rPr>
+              <a:t>•  </a:t>
+            </a:r>
+            <a:r>
+              <a:rPr sz="1200" b="0" i="0">
+                <a:solidFill>
+                  <a:srgbClr val="FFFFFF"/>
+                </a:solidFill>
+                <a:latin typeface="Alegreya Sans"/>
+              </a:rPr>
+              <a:t>Pilotage de programmes et de projets IT : cadrage, gouvernance, feuille de route, PMO</a:t>
+            </a:r>
+          </a:p>
+          <a:p>
+            <a:pPr algn="l">
+              <a:spcAft>
+                <a:spcPts val="100"/>
+              </a:spcAft>
+            </a:pPr>
+            <a:r>
+              <a:rPr sz="1200" b="1" i="0">
+                <a:solidFill>
+                  <a:srgbClr val="3AEDE5"/>
+                </a:solidFill>
+                <a:latin typeface="Alegreya Sans"/>
+              </a:rPr>
+              <a:t>•  </a:t>
+            </a:r>
+            <a:r>
+              <a:rPr sz="1200" b="0" i="0">
+                <a:solidFill>
+                  <a:srgbClr val="FFFFFF"/>
+                </a:solidFill>
+                <a:latin typeface="Alegreya Sans"/>
+              </a:rPr>
+              <a:t>Secteurs : banque, secteur public, mobilités urbaines</a:t>
+            </a:r>
+          </a:p>
+          <a:p>
+            <a:pPr algn="l">
+              <a:spcAft>
+                <a:spcPts val="100"/>
+              </a:spcAft>
+            </a:pPr>
+            <a:r>
+              <a:rPr sz="1200" b="1" i="0">
+                <a:solidFill>
+                  <a:srgbClr val="3AEDE5"/>
+                </a:solidFill>
+                <a:latin typeface="Alegreya Sans"/>
+              </a:rPr>
+              <a:t>•  </a:t>
+            </a:r>
+            <a:r>
+              <a:rPr sz="1200" b="0" i="0">
+                <a:solidFill>
+                  <a:srgbClr val="FFFFFF"/>
+                </a:solidFill>
+                <a:latin typeface="Alegreya Sans"/>
+              </a:rPr>
+              <a:t>Systèmes et solutions : paiements, cash management, ERP, CRM, Business Intelligence, KYC</a:t>
+            </a:r>
+          </a:p>
+          <a:p>
+            <a:pPr algn="l">
+              <a:spcAft>
+                <a:spcPts val="100"/>
+              </a:spcAft>
+            </a:pPr>
+            <a:r>
+              <a:rPr sz="1200" b="1" i="0">
+                <a:solidFill>
+                  <a:srgbClr val="3AEDE5"/>
+                </a:solidFill>
+                <a:latin typeface="Alegreya Sans"/>
+              </a:rPr>
+              <a:t>•  </a:t>
+            </a:r>
+            <a:r>
+              <a:rPr sz="1200" b="0" i="0">
+                <a:solidFill>
+                  <a:srgbClr val="FFFFFF"/>
+                </a:solidFill>
+                <a:latin typeface="Alegreya Sans"/>
+              </a:rPr>
+              <a:t>Schéma directeur IT &amp; cybersécurité</a:t>
+            </a:r>
+          </a:p>
+          <a:p>
+            <a:pPr algn="l">
+              <a:spcAft>
+                <a:spcPts val="100"/>
+              </a:spcAft>
+            </a:pPr>
+            <a:r>
+              <a:rPr sz="1200" b="1" i="0">
+                <a:solidFill>
+                  <a:srgbClr val="3AEDE5"/>
+                </a:solidFill>
+                <a:latin typeface="Alegreya Sans"/>
+              </a:rPr>
+              <a:t>•  </a:t>
+            </a:r>
+            <a:r>
+              <a:rPr sz="1200" b="0" i="0">
+                <a:solidFill>
+                  <a:srgbClr val="FFFFFF"/>
+                </a:solidFill>
+                <a:latin typeface="Alegreya Sans"/>
+              </a:rPr>
+              <a:t>Gouvernance, Data &amp; Compliance : KYC, BCBS 239, FINREP, Big Data (Hadoop)</a:t>
+            </a:r>
+          </a:p>
+          <a:p>
+            <a:pPr algn="l">
+              <a:spcAft>
+                <a:spcPts val="100"/>
+              </a:spcAft>
+            </a:pPr>
+            <a:r>
+              <a:rPr sz="1200" b="1" i="0">
+                <a:solidFill>
+                  <a:srgbClr val="3AEDE5"/>
+                </a:solidFill>
+                <a:latin typeface="Alegreya Sans"/>
+              </a:rPr>
+              <a:t>•  </a:t>
+            </a:r>
+            <a:r>
+              <a:rPr sz="1200" b="0" i="0">
+                <a:solidFill>
+                  <a:srgbClr val="FFFFFF"/>
+                </a:solidFill>
+                <a:latin typeface="Alegreya Sans"/>
+              </a:rPr>
+              <a:t>Management &amp; accompagnement : formation d'équipes, conduite du changement</a:t>
+            </a:r>
+          </a:p>
+          <a:p>
+            <a:pPr algn="l">
+              <a:spcBef>
+                <a:spcPts val="600"/>
+              </a:spcBef>
+              <a:spcAft>
+                <a:spcPts val="300"/>
+              </a:spcAft>
+            </a:pPr>
+            <a:r>
+              <a:rPr sz="1300" b="1" i="0">
+                <a:solidFill>
+                  <a:srgbClr val="3AEDE5"/>
+                </a:solidFill>
+                <a:latin typeface="Alegreya Sans"/>
+              </a:rPr>
+              <a:t>LANGUES</a:t>
+            </a:r>
+          </a:p>
+          <a:p>
+            <a:pPr algn="l">
+              <a:spcAft>
+                <a:spcPts val="100"/>
+              </a:spcAft>
+            </a:pPr>
+            <a:r>
+              <a:rPr sz="1200" b="1" i="0">
+                <a:solidFill>
+                  <a:srgbClr val="3AEDE5"/>
+                </a:solidFill>
+                <a:latin typeface="Alegreya Sans"/>
+              </a:rPr>
+              <a:t>•  </a:t>
+            </a:r>
+            <a:r>
+              <a:rPr sz="1200" b="0" i="0">
+                <a:solidFill>
+                  <a:srgbClr val="FFFFFF"/>
+                </a:solidFill>
+                <a:latin typeface="Alegreya Sans"/>
+              </a:rPr>
+              <a:t>Français — Langue maternelle</a:t>
+            </a:r>
+          </a:p>
+          <a:p>
+            <a:pPr algn="l">
+              <a:spcAft>
+                <a:spcPts val="100"/>
+              </a:spcAft>
+            </a:pPr>
+            <a:r>
+              <a:rPr sz="1200" b="1" i="0">
+                <a:solidFill>
+                  <a:srgbClr val="3AEDE5"/>
+                </a:solidFill>
+                <a:latin typeface="Alegreya Sans"/>
+              </a:rPr>
+              <a:t>•  </a:t>
+            </a:r>
+            <a:r>
+              <a:rPr sz="1200" b="0" i="0">
+                <a:solidFill>
+                  <a:srgbClr val="FFFFFF"/>
+                </a:solidFill>
+                <a:latin typeface="Alegreya Sans"/>
+              </a:rPr>
+              <a:t>Anglais — Courant</a:t>
+            </a:r>
+          </a:p>
+          <a:p>
+            <a:pPr algn="l">
+              <a:spcAft>
+                <a:spcPts val="100"/>
+              </a:spcAft>
+            </a:pPr>
+            <a:r>
+              <a:rPr sz="1200" b="1" i="0">
+                <a:solidFill>
+                  <a:srgbClr val="3AEDE5"/>
+                </a:solidFill>
+                <a:latin typeface="Alegreya Sans"/>
+              </a:rPr>
+              <a:t>•  </a:t>
+            </a:r>
+            <a:r>
+              <a:rPr sz="1200" b="0" i="0">
+                <a:solidFill>
+                  <a:srgbClr val="FFFFFF"/>
+                </a:solidFill>
+                <a:latin typeface="Alegreya Sans"/>
+              </a:rPr>
+              <a:t>Espagnol — Courant</a:t>
+            </a:r>
+          </a:p>
+        </p:txBody>
+      </p:sp>
+      <p:sp>
+        <p:nvSpPr>
+          <p:cNvPr id="8" name="TextBox 7"/>
+          <p:cNvSpPr txBox="1"/>
+          <p:nvPr/>
+        </p:nvSpPr>
+        <p:spPr>
+          <a:xfrm>
+            <a:off x="4528600" y="1180000"/>
+            <a:ext cx="7434800" cy="5318000"/>
+          </a:xfrm>
+          <a:prstGeom prst="rect">
+            <a:avLst/>
+          </a:prstGeom>
+          <a:noFill/>
+        </p:spPr>
+        <p:txBody>
+          <a:bodyPr wrap="square" lIns="0" rIns="0" tIns="0" bIns="0">
+            <a:spAutoFit/>
+          </a:bodyPr>
+          <a:lstStyle/>
+          <a:p>
+            <a:pPr algn="l">
+              <a:spcAft>
+                <a:spcPts val="300"/>
+              </a:spcAft>
+            </a:pPr>
+            <a:r>
+              <a:rPr sz="1300" b="1" i="0">
+                <a:solidFill>
+                  <a:srgbClr val="3AEDE5"/>
+                </a:solidFill>
+                <a:latin typeface="Alegreya Sans"/>
+              </a:rPr>
+              <a:t>PRINCIPALES EXPÉRIENCES PROFESSIONNELLES (suite)</a:t>
+            </a:r>
+          </a:p>
+          <a:p>
+            <a:pPr algn="l">
+              <a:spcAft>
+                <a:spcPts val="100"/>
+              </a:spcAft>
+            </a:pPr>
+            <a:r>
+              <a:rPr sz="1200" b="1" i="0">
+                <a:solidFill>
+                  <a:srgbClr val="3AEDE5"/>
+                </a:solidFill>
+                <a:latin typeface="Alegreya Sans"/>
+              </a:rPr>
+              <a:t>▸ </a:t>
+            </a:r>
+            <a:r>
+              <a:rPr sz="1200" b="1" i="0">
+                <a:solidFill>
+                  <a:srgbClr val="FFFFFF"/>
+                </a:solidFill>
+                <a:latin typeface="Alegreya Sans"/>
+              </a:rPr>
+              <a:t>Société Générale — Banque à Distance</a:t>
+            </a:r>
+            <a:r>
+              <a:rPr sz="1200" b="0" i="0">
+                <a:solidFill>
+                  <a:srgbClr val="FFFFFF"/>
+                </a:solidFill>
+                <a:latin typeface="Alegreya Sans"/>
+              </a:rPr>
+              <a:t> — Responsable produit Cash Management</a:t>
+            </a:r>
+            <a:r>
+              <a:rPr sz="1200" b="0" i="1">
+                <a:solidFill>
+                  <a:srgbClr val="3AEDE5"/>
+                </a:solidFill>
+                <a:latin typeface="Alegreya Sans"/>
+              </a:rPr>
+              <a:t>  (2002 — 2007)</a:t>
+            </a:r>
+          </a:p>
+          <a:p>
+            <a:pPr algn="l" lvl="1">
+              <a:spcAft>
+                <a:spcPts val="100"/>
+              </a:spcAft>
+            </a:pPr>
+            <a:r>
+              <a:rPr sz="1200" b="1" i="0">
+                <a:solidFill>
+                  <a:srgbClr val="3AEDE5"/>
+                </a:solidFill>
+                <a:latin typeface="Alegreya Sans"/>
+              </a:rPr>
+              <a:t>•  </a:t>
+            </a:r>
+            <a:r>
+              <a:rPr sz="1200" b="0" i="0">
+                <a:solidFill>
+                  <a:srgbClr val="FFFFFF"/>
+                </a:solidFill>
+                <a:latin typeface="Alegreya Sans"/>
+              </a:rPr>
+              <a:t>Pilotage des évolutions majeures de l'outil de banque à distance : virements complexes, suivi des lignes de crédit, mise en œuvre du virement SEPA.</a:t>
+            </a:r>
+          </a:p>
+          <a:p>
+            <a:pPr algn="l" lvl="1">
+              <a:spcAft>
+                <a:spcPts val="100"/>
+              </a:spcAft>
+            </a:pPr>
+            <a:r>
+              <a:rPr sz="1200" b="1" i="0">
+                <a:solidFill>
+                  <a:srgbClr val="3AEDE5"/>
+                </a:solidFill>
+                <a:latin typeface="Alegreya Sans"/>
+              </a:rPr>
+              <a:t>•  </a:t>
+            </a:r>
+            <a:r>
+              <a:rPr sz="1200" b="0" i="0">
+                <a:solidFill>
+                  <a:srgbClr val="FFFFFF"/>
+                </a:solidFill>
+                <a:latin typeface="Alegreya Sans"/>
+              </a:rPr>
+              <a:t>Lancement et gestion de SG Trust Services (certificats électroniques, authentification forte) ; outil élu « Meilleur outil de banque à distance » par Capital, Challenges et Les Échos.</a:t>
+            </a:r>
+          </a:p>
+          <a:p>
+            <a:pPr algn="l">
+              <a:spcAft>
+                <a:spcPts val="100"/>
+              </a:spcAft>
+            </a:pPr>
+            <a:r>
+              <a:rPr sz="1200" b="1" i="0">
+                <a:solidFill>
+                  <a:srgbClr val="3AEDE5"/>
+                </a:solidFill>
+                <a:latin typeface="Alegreya Sans"/>
+              </a:rPr>
+              <a:t>▸ </a:t>
+            </a:r>
+            <a:r>
+              <a:rPr sz="1200" b="1" i="0">
+                <a:solidFill>
+                  <a:srgbClr val="FFFFFF"/>
+                </a:solidFill>
+                <a:latin typeface="Alegreya Sans"/>
+              </a:rPr>
+              <a:t>Accenture</a:t>
+            </a:r>
+            <a:r>
+              <a:rPr sz="1200" b="0" i="0">
+                <a:solidFill>
+                  <a:srgbClr val="FFFFFF"/>
+                </a:solidFill>
+                <a:latin typeface="Alegreya Sans"/>
+              </a:rPr>
+              <a:t> — Consultant Senior en Conduite du Changement</a:t>
+            </a:r>
+            <a:r>
+              <a:rPr sz="1200" b="0" i="1">
+                <a:solidFill>
+                  <a:srgbClr val="3AEDE5"/>
+                </a:solidFill>
+                <a:latin typeface="Alegreya Sans"/>
+              </a:rPr>
+              <a:t>  (1999 — 2002)</a:t>
+            </a:r>
+          </a:p>
+          <a:p>
+            <a:pPr algn="l" lvl="1">
+              <a:spcAft>
+                <a:spcPts val="100"/>
+              </a:spcAft>
+            </a:pPr>
+            <a:r>
+              <a:rPr sz="1200" b="1" i="0">
+                <a:solidFill>
+                  <a:srgbClr val="3AEDE5"/>
+                </a:solidFill>
+                <a:latin typeface="Alegreya Sans"/>
+              </a:rPr>
+              <a:t>•  </a:t>
+            </a:r>
+            <a:r>
+              <a:rPr sz="1200" b="0" i="0">
+                <a:solidFill>
+                  <a:srgbClr val="FFFFFF"/>
+                </a:solidFill>
+                <a:latin typeface="Alegreya Sans"/>
+              </a:rPr>
+              <a:t>Projets SAP (FI/CO/MM) chez Air France, Alstom, Carrefour et Danone : coordination des équipes projet, ingénierie de formation et conduite du changement sur des déploiements ERP majeurs.</a:t>
+            </a:r>
+          </a:p>
+          <a:p>
+            <a:pPr algn="l">
+              <a:spcAft>
+                <a:spcPts val="100"/>
+              </a:spcAft>
+            </a:pPr>
+            <a:r>
+              <a:rPr sz="1200" b="1" i="0">
+                <a:solidFill>
+                  <a:srgbClr val="3AEDE5"/>
+                </a:solidFill>
+                <a:latin typeface="Alegreya Sans"/>
+              </a:rPr>
+              <a:t>▸ </a:t>
+            </a:r>
+            <a:r>
+              <a:rPr sz="1200" b="1" i="0">
+                <a:solidFill>
+                  <a:srgbClr val="FFFFFF"/>
+                </a:solidFill>
+                <a:latin typeface="Alegreya Sans"/>
+              </a:rPr>
+              <a:t>TCL Multimedia — Madrid</a:t>
+            </a:r>
+            <a:r>
+              <a:rPr sz="1200" b="0" i="0">
+                <a:solidFill>
+                  <a:srgbClr val="FFFFFF"/>
+                </a:solidFill>
+                <a:latin typeface="Alegreya Sans"/>
+              </a:rPr>
+              <a:t> — Responsable Business Développement</a:t>
+            </a:r>
+            <a:r>
+              <a:rPr sz="1200" b="0" i="1">
+                <a:solidFill>
+                  <a:srgbClr val="3AEDE5"/>
+                </a:solidFill>
+                <a:latin typeface="Alegreya Sans"/>
+              </a:rPr>
+              <a:t>  (1996 — 1998)</a:t>
+            </a:r>
+          </a:p>
+          <a:p>
+            <a:pPr algn="l" lvl="1">
+              <a:spcAft>
+                <a:spcPts val="100"/>
+              </a:spcAft>
+            </a:pPr>
+            <a:r>
+              <a:rPr sz="1200" b="1" i="0">
+                <a:solidFill>
+                  <a:srgbClr val="3AEDE5"/>
+                </a:solidFill>
+                <a:latin typeface="Alegreya Sans"/>
+              </a:rPr>
+              <a:t>•  </a:t>
+            </a:r>
+            <a:r>
+              <a:rPr sz="1200" b="0" i="0">
+                <a:solidFill>
+                  <a:srgbClr val="FFFFFF"/>
+                </a:solidFill>
+                <a:latin typeface="Alegreya Sans"/>
+              </a:rPr>
+              <a:t>Stratégie marketing et support commercial en environnement multiculturel ; refonte du suivi de la supply chain : −30 % de stocks et amélioration du fonds de roulement.</a:t>
+            </a:r>
+          </a:p>
+        </p:txBody>
+      </p:sp>
+      <p:sp>
+        <p:nvSpPr>
+          <p:cNvPr id="9" name="Rectangle 8"/>
+          <p:cNvSpPr/>
+          <p:nvPr/>
+        </p:nvSpPr>
+        <p:spPr>
+          <a:xfrm>
+            <a:off x="0" y="6578000"/>
+            <a:ext cx="12192000" cy="280000"/>
+          </a:xfrm>
+          <a:prstGeom prst="rect">
+            <a:avLst/>
+          </a:prstGeom>
+          <a:solidFill>
+            <a:srgbClr val="061A5E"/>
+          </a:solidFill>
+          <a:ln>
+            <a:noFill/>
+          </a:ln>
+          <a:effectLst/>
+        </p:spPr>
+        <p:style>
+          <a:lnRef idx="1">
+            <a:schemeClr val="accent1"/>
+          </a:lnRef>
+          <a:fillRef idx="3">
+            <a:schemeClr val="accent1"/>
+          </a:fillRef>
+          <a:effectRef idx="2">
+            <a:schemeClr val="accent1"/>
+          </a:effectRef>
+          <a:fontRef idx="minor">
+            <a:schemeClr val="lt1"/>
+          </a:fontRef>
+        </p:style>
+        <p:txBody>
+          <a:bodyPr rtlCol="0" anchor="ctr"/>
+          <a:lstStyle/>
+          <a:p>
+            <a:pPr algn="ctr"/>
+          </a:p>
+        </p:txBody>
+      </p:sp>
+      <p:sp>
+        <p:nvSpPr>
+          <p:cNvPr id="10" name="TextBox 9"/>
+          <p:cNvSpPr txBox="1"/>
+          <p:nvPr/>
+        </p:nvSpPr>
+        <p:spPr>
+          <a:xfrm>
+            <a:off x="228600" y="6578000"/>
+            <a:ext cx="11734800" cy="280000"/>
+          </a:xfrm>
+          <a:prstGeom prst="rect">
+            <a:avLst/>
+          </a:prstGeom>
+          <a:noFill/>
+        </p:spPr>
+        <p:txBody>
+          <a:bodyPr wrap="square" lIns="0" rIns="0" tIns="0" bIns="0">
+            <a:spAutoFit/>
+          </a:bodyPr>
+          <a:lstStyle/>
+          <a:p>
+            <a:pPr algn="ctr"/>
+            <a:r>
+              <a:rPr sz="1000" b="0" i="1">
+                <a:solidFill>
+                  <a:srgbClr val="CCD6E8"/>
+                </a:solidFill>
+                <a:latin typeface="Alegreya Sans"/>
+              </a:rPr>
+              <a:t>Les informations de ce document sont strictement confidentielles — Ce document ne peut être partagé qu'avec l'accord de son propriétaire</a:t>
             </a:r>
           </a:p>
         </p:txBody>

--- a/outputs/C.P._transition_management.pptx
+++ b/outputs/C.P._transition_management.pptx
@@ -3364,7 +3364,7 @@
                 </a:solidFill>
                 <a:latin typeface="Alegreya Sans"/>
               </a:rPr>
-              <a:t>Pilotage de programmes et de projets IT : cadrage, gouvernance, feuille de route, PMO</a:t>
+              <a:t>Pilotage de programmes &amp; projets IT (PMO)</a:t>
             </a:r>
           </a:p>
           <a:p>
@@ -3389,7 +3389,7 @@
                 </a:solidFill>
                 <a:latin typeface="Alegreya Sans"/>
               </a:rPr>
-              <a:t>Secteurs : banque, secteur public, mobilités urbaines</a:t>
+              <a:t>Banque, secteur public, mobilités urbaines</a:t>
             </a:r>
           </a:p>
           <a:p>
@@ -3414,7 +3414,7 @@
                 </a:solidFill>
                 <a:latin typeface="Alegreya Sans"/>
               </a:rPr>
-              <a:t>Systèmes et solutions : paiements, cash management, ERP, CRM, Business Intelligence, KYC</a:t>
+              <a:t>Paiements, cash management, ERP, CRM, BI</a:t>
             </a:r>
           </a:p>
           <a:p>
@@ -3464,7 +3464,7 @@
                 </a:solidFill>
                 <a:latin typeface="Alegreya Sans"/>
               </a:rPr>
-              <a:t>Gouvernance, Data &amp; Compliance : KYC, BCBS 239, FINREP, Big Data (Hadoop)</a:t>
+              <a:t>KYC, BCBS 239, FINREP, Big Data (Hadoop)</a:t>
             </a:r>
           </a:p>
           <a:p>
@@ -3489,7 +3489,7 @@
                 </a:solidFill>
                 <a:latin typeface="Alegreya Sans"/>
               </a:rPr>
-              <a:t>Management &amp; accompagnement : formation d'équipes, conduite du changement</a:t>
+              <a:t>Conduite du changement &amp; formation</a:t>
             </a:r>
           </a:p>
           <a:p>
@@ -3643,7 +3643,7 @@
                 </a:solidFill>
                 <a:latin typeface="Alegreya Sans"/>
               </a:rPr>
-              <a:t>Master en Management — cursus Grande École</a:t>
+              <a:t>Master en Management (Grande École)</a:t>
             </a:r>
           </a:p>
           <a:p>
@@ -3716,39 +3716,94 @@
                 </a:solidFill>
                 <a:latin typeface="Alegreya Sans"/>
               </a:rPr>
-              <a:t>PRINCE2 Practitioner · Microsoft PL-900</a:t>
-            </a:r>
-          </a:p>
-          <a:p>
-            <a:pPr algn="l">
-              <a:spcAft>
-                <a:spcPts val="100"/>
-              </a:spcAft>
-            </a:pPr>
-            <a:r>
-              <a:rPr sz="1200" b="1" i="0">
-                <a:solidFill>
-                  <a:srgbClr val="FFFFFF"/>
-                </a:solidFill>
-                <a:latin typeface="Alegreya Sans"/>
-              </a:rPr>
-              <a:t>Conformité</a:t>
-            </a:r>
-          </a:p>
-          <a:p>
-            <a:pPr algn="l">
+              <a:t>PRINCE2 · PL-900 · ACAMS · RGPD</a:t>
+            </a:r>
+          </a:p>
+          <a:p>
+            <a:pPr algn="l">
+              <a:spcBef>
+                <a:spcPts val="600"/>
+              </a:spcBef>
               <a:spcAft>
                 <a:spcPts val="300"/>
               </a:spcAft>
             </a:pPr>
             <a:r>
+              <a:rPr sz="1300" b="1" i="0">
+                <a:solidFill>
+                  <a:srgbClr val="3AEDE5"/>
+                </a:solidFill>
+                <a:latin typeface="Alegreya Sans"/>
+              </a:rPr>
+              <a:t>ENGAGEMENTS &amp; RÉALISATIONS</a:t>
+            </a:r>
+          </a:p>
+          <a:p>
+            <a:pPr algn="l">
+              <a:spcAft>
+                <a:spcPts val="200"/>
+              </a:spcAft>
+            </a:pPr>
+            <a:r>
+              <a:rPr sz="1200" b="1" i="0">
+                <a:solidFill>
+                  <a:srgbClr val="3AEDE5"/>
+                </a:solidFill>
+                <a:latin typeface="Alegreya Sans"/>
+              </a:rPr>
+              <a:t>• </a:t>
+            </a:r>
+            <a:r>
+              <a:rPr sz="1200" b="1" i="0">
+                <a:solidFill>
+                  <a:srgbClr val="FFFFFF"/>
+                </a:solidFill>
+                <a:latin typeface="Alegreya Sans"/>
+              </a:rPr>
+              <a:t>Cercles pros</a:t>
+            </a:r>
+            <a:r>
               <a:rPr sz="1200" b="0" i="1">
                 <a:solidFill>
                   <a:srgbClr val="CCD6E8"/>
                 </a:solidFill>
                 <a:latin typeface="Alegreya Sans"/>
               </a:rPr>
-              <a:t>KYC &amp; Due Diligence (ACAMS) · RGPD (CNIL et IAPP)</a:t>
+              <a:t> — UMBREX / VERITUX</a:t>
+            </a:r>
+          </a:p>
+          <a:p>
+            <a:pPr algn="l">
+              <a:spcAft>
+                <a:spcPts val="200"/>
+              </a:spcAft>
+            </a:pPr>
+            <a:r>
+              <a:rPr sz="1200" b="1" i="0">
+                <a:solidFill>
+                  <a:srgbClr val="3AEDE5"/>
+                </a:solidFill>
+                <a:latin typeface="Alegreya Sans"/>
+              </a:rPr>
+              <a:t>• </a:t>
+            </a:r>
+            <a:r>
+              <a:rPr sz="1200" b="1" i="0">
+                <a:solidFill>
+                  <a:srgbClr val="FFFFFF"/>
+                </a:solidFill>
+                <a:latin typeface="Alegreya Sans"/>
+              </a:rPr>
+              <a:t>Expert</a:t>
+            </a:r>
+            <a:r>
+              <a:rPr sz="1200" b="0" i="1">
+                <a:solidFill>
+                  <a:srgbClr val="CCD6E8"/>
+                </a:solidFill>
+                <a:latin typeface="Alegreya Sans"/>
+              </a:rPr>
+              <a:t> — AlphaSights, GuidePoint, BigBoss</a:t>
             </a:r>
           </a:p>
         </p:txBody>
@@ -3761,8 +3816,8 @@
         </p:nvSpPr>
         <p:spPr>
           <a:xfrm>
-            <a:off x="4528600" y="1180000"/>
-            <a:ext cx="7434800" cy="5318000"/>
+            <a:off x="4528600" y="1649900"/>
+            <a:ext cx="7434800" cy="4848100"/>
           </a:xfrm>
           <a:prstGeom prst="rect">
             <a:avLst/>
@@ -3890,7 +3945,7 @@
                 </a:solidFill>
                 <a:latin typeface="Alegreya Sans"/>
               </a:rPr>
-              <a:t>Mission de transition flash visant à stabiliser l'organisation et piloter la convergence post-fusion des middle-offices de la Banque Judiciaire et de la Banque des Entreprises.</a:t>
+              <a:t>Mission de transition flash : stabiliser l'organisation et piloter la convergence post-fusion des middle-offices de la Banque Judiciaire et de la Banque des Entreprises.</a:t>
             </a:r>
           </a:p>
           <a:p>
@@ -3915,7 +3970,7 @@
                 </a:solidFill>
                 <a:latin typeface="Alegreya Sans"/>
               </a:rPr>
-              <a:t>Relais managérial d'urgence : prise en main immédiate du périmètre pour pallier un vide managérial, stabilisation des équipes (risques de turnover et démobilisation) aux côtés de la nouvelle Directrice.</a:t>
+              <a:t>Relais managérial d'urgence : prise en main immédiate du périmètre pour pallier un vide managérial, stabilisation des équipes aux côtés de la nouvelle Directrice.</a:t>
             </a:r>
           </a:p>
           <a:p>
@@ -3940,7 +3995,7 @@
                 </a:solidFill>
                 <a:latin typeface="Alegreya Sans"/>
               </a:rPr>
-              <a:t>Sécurisation opérationnelle : audit et traitement des points de friction (inefficiences, doublons de processus, allongement des délais de traitement) afin de restaurer la qualité de service et maîtriser les risques réglementaires.</a:t>
+              <a:t>Sécurisation opérationnelle : audit et traitement des points de friction (inefficiences, doublons, délais) pour restaurer la qualité de service et maîtriser les risques réglementaires.</a:t>
             </a:r>
           </a:p>
           <a:p>
@@ -3965,32 +4020,7 @@
                 </a:solidFill>
                 <a:latin typeface="Alegreya Sans"/>
               </a:rPr>
-              <a:t>Déploiement de la cible : alignement et déploiement opérationnel des nouveaux processus unifiés conçus par la direction de la Transformation.</a:t>
-            </a:r>
-          </a:p>
-          <a:p>
-            <a:pPr algn="l" lvl="1">
-              <a:spcAft>
-                <a:spcPts val="100"/>
-              </a:spcAft>
-            </a:pPr>
-            <a:r>
-              <a:rPr sz="1200" b="1" i="0">
-                <a:solidFill>
-                  <a:srgbClr val="3AEDE5"/>
-                </a:solidFill>
-                <a:latin typeface="Alegreya Sans"/>
-              </a:rPr>
-              <a:t>•  </a:t>
-            </a:r>
-            <a:r>
-              <a:rPr sz="1200" b="0" i="0">
-                <a:solidFill>
-                  <a:srgbClr val="FFFFFF"/>
-                </a:solidFill>
-                <a:latin typeface="Alegreya Sans"/>
-              </a:rPr>
-              <a:t>Livrables clés : plan d'accompagnement et feuille de route à 1,5 mois, tableaux de bord de pilotage quotidien (KPI), rapports de continuité de mission.</a:t>
+              <a:t>Déploiement des processus unifiés cibles ; livrables : feuille de route à 1,5 mois, tableaux de bord quotidiens (KPI), rapports de continuité de mission.</a:t>
             </a:r>
           </a:p>
         </p:txBody>
@@ -4339,7 +4369,7 @@
                 </a:solidFill>
                 <a:latin typeface="Alegreya Sans"/>
               </a:rPr>
-              <a:t>CENTRES D'INTÉRÊT</a:t>
+              <a:t>DOMAINES D'EXPERTISE</a:t>
             </a:r>
           </a:p>
           <a:p>
@@ -4364,7 +4394,7 @@
                 </a:solidFill>
                 <a:latin typeface="Alegreya Sans"/>
               </a:rPr>
-              <a:t>Musique : guitare électrique, acoustique, chant</a:t>
+              <a:t>Pilotage de programmes &amp; projets IT (PMO)</a:t>
             </a:r>
           </a:p>
           <a:p>
@@ -4389,7 +4419,7 @@
                 </a:solidFill>
                 <a:latin typeface="Alegreya Sans"/>
               </a:rPr>
-              <a:t>Collectionneur de vinyles</a:t>
+              <a:t>Banque, secteur public, mobilités urbaines</a:t>
             </a:r>
           </a:p>
           <a:p>
@@ -4414,7 +4444,7 @@
                 </a:solidFill>
                 <a:latin typeface="Alegreya Sans"/>
               </a:rPr>
-              <a:t>Plongée sous-marine, fitness, ski</a:t>
+              <a:t>Paiements, cash management, ERP, CRM, BI</a:t>
             </a:r>
           </a:p>
           <a:p>
@@ -4439,7 +4469,7 @@
                 </a:solidFill>
                 <a:latin typeface="Alegreya Sans"/>
               </a:rPr>
-              <a:t>Photographie, montage vidéo</a:t>
+              <a:t>Schéma directeur IT &amp; cybersécurité</a:t>
             </a:r>
           </a:p>
           <a:p>
@@ -4464,7 +4494,32 @@
                 </a:solidFill>
                 <a:latin typeface="Alegreya Sans"/>
               </a:rPr>
-              <a:t>Théâtre amateur</a:t>
+              <a:t>KYC, BCBS 239, FINREP, Big Data (Hadoop)</a:t>
+            </a:r>
+          </a:p>
+          <a:p>
+            <a:pPr algn="l">
+              <a:spcAft>
+                <a:spcPts val="100"/>
+              </a:spcAft>
+            </a:pPr>
+            <a:r>
+              <a:rPr sz="1200" b="1" i="0">
+                <a:solidFill>
+                  <a:srgbClr val="3AEDE5"/>
+                </a:solidFill>
+                <a:latin typeface="Alegreya Sans"/>
+              </a:rPr>
+              <a:t>•  </a:t>
+            </a:r>
+            <a:r>
+              <a:rPr sz="1200" b="0" i="0">
+                <a:solidFill>
+                  <a:srgbClr val="FFFFFF"/>
+                </a:solidFill>
+                <a:latin typeface="Alegreya Sans"/>
+              </a:rPr>
+              <a:t>Conduite du changement &amp; formation</a:t>
             </a:r>
           </a:p>
           <a:p>
@@ -4483,6 +4538,233 @@
                 </a:solidFill>
                 <a:latin typeface="Alegreya Sans"/>
               </a:rPr>
+              <a:t>LANGUES</a:t>
+            </a:r>
+          </a:p>
+          <a:p>
+            <a:pPr algn="l">
+              <a:spcAft>
+                <a:spcPts val="100"/>
+              </a:spcAft>
+            </a:pPr>
+            <a:r>
+              <a:rPr sz="1200" b="1" i="0">
+                <a:solidFill>
+                  <a:srgbClr val="3AEDE5"/>
+                </a:solidFill>
+                <a:latin typeface="Alegreya Sans"/>
+              </a:rPr>
+              <a:t>•  </a:t>
+            </a:r>
+            <a:r>
+              <a:rPr sz="1200" b="0" i="0">
+                <a:solidFill>
+                  <a:srgbClr val="FFFFFF"/>
+                </a:solidFill>
+                <a:latin typeface="Alegreya Sans"/>
+              </a:rPr>
+              <a:t>Français — Langue maternelle</a:t>
+            </a:r>
+          </a:p>
+          <a:p>
+            <a:pPr algn="l">
+              <a:spcAft>
+                <a:spcPts val="100"/>
+              </a:spcAft>
+            </a:pPr>
+            <a:r>
+              <a:rPr sz="1200" b="1" i="0">
+                <a:solidFill>
+                  <a:srgbClr val="3AEDE5"/>
+                </a:solidFill>
+                <a:latin typeface="Alegreya Sans"/>
+              </a:rPr>
+              <a:t>•  </a:t>
+            </a:r>
+            <a:r>
+              <a:rPr sz="1200" b="0" i="0">
+                <a:solidFill>
+                  <a:srgbClr val="FFFFFF"/>
+                </a:solidFill>
+                <a:latin typeface="Alegreya Sans"/>
+              </a:rPr>
+              <a:t>Anglais — Courant</a:t>
+            </a:r>
+          </a:p>
+          <a:p>
+            <a:pPr algn="l">
+              <a:spcAft>
+                <a:spcPts val="100"/>
+              </a:spcAft>
+            </a:pPr>
+            <a:r>
+              <a:rPr sz="1200" b="1" i="0">
+                <a:solidFill>
+                  <a:srgbClr val="3AEDE5"/>
+                </a:solidFill>
+                <a:latin typeface="Alegreya Sans"/>
+              </a:rPr>
+              <a:t>•  </a:t>
+            </a:r>
+            <a:r>
+              <a:rPr sz="1200" b="0" i="0">
+                <a:solidFill>
+                  <a:srgbClr val="FFFFFF"/>
+                </a:solidFill>
+                <a:latin typeface="Alegreya Sans"/>
+              </a:rPr>
+              <a:t>Espagnol — Courant</a:t>
+            </a:r>
+          </a:p>
+          <a:p>
+            <a:pPr algn="l">
+              <a:spcBef>
+                <a:spcPts val="600"/>
+              </a:spcBef>
+              <a:spcAft>
+                <a:spcPts val="300"/>
+              </a:spcAft>
+            </a:pPr>
+            <a:r>
+              <a:rPr sz="1300" b="1" i="0">
+                <a:solidFill>
+                  <a:srgbClr val="3AEDE5"/>
+                </a:solidFill>
+                <a:latin typeface="Alegreya Sans"/>
+              </a:rPr>
+              <a:t>FORMATION &amp; CERTIFICATIONS</a:t>
+            </a:r>
+          </a:p>
+          <a:p>
+            <a:pPr algn="l">
+              <a:spcAft>
+                <a:spcPts val="100"/>
+              </a:spcAft>
+            </a:pPr>
+            <a:r>
+              <a:rPr sz="1200" b="1" i="0">
+                <a:solidFill>
+                  <a:srgbClr val="3AEDE5"/>
+                </a:solidFill>
+                <a:latin typeface="Alegreya Sans"/>
+              </a:rPr>
+              <a:t>1996  </a:t>
+            </a:r>
+            <a:r>
+              <a:rPr sz="1200" b="1" i="0">
+                <a:solidFill>
+                  <a:srgbClr val="FFFFFF"/>
+                </a:solidFill>
+                <a:latin typeface="Alegreya Sans"/>
+              </a:rPr>
+              <a:t>EDHEC</a:t>
+            </a:r>
+          </a:p>
+          <a:p>
+            <a:pPr algn="l">
+              <a:spcAft>
+                <a:spcPts val="300"/>
+              </a:spcAft>
+            </a:pPr>
+            <a:r>
+              <a:rPr sz="1200" b="0" i="1">
+                <a:solidFill>
+                  <a:srgbClr val="CCD6E8"/>
+                </a:solidFill>
+                <a:latin typeface="Alegreya Sans"/>
+              </a:rPr>
+              <a:t>Master en Management (Grande École)</a:t>
+            </a:r>
+          </a:p>
+          <a:p>
+            <a:pPr algn="l">
+              <a:spcAft>
+                <a:spcPts val="100"/>
+              </a:spcAft>
+            </a:pPr>
+            <a:r>
+              <a:rPr sz="1200" b="1" i="0">
+                <a:solidFill>
+                  <a:srgbClr val="3AEDE5"/>
+                </a:solidFill>
+                <a:latin typeface="Alegreya Sans"/>
+              </a:rPr>
+              <a:t>2024  </a:t>
+            </a:r>
+            <a:r>
+              <a:rPr sz="1200" b="1" i="0">
+                <a:solidFill>
+                  <a:srgbClr val="FFFFFF"/>
+                </a:solidFill>
+                <a:latin typeface="Alegreya Sans"/>
+              </a:rPr>
+              <a:t>Google</a:t>
+            </a:r>
+          </a:p>
+          <a:p>
+            <a:pPr algn="l">
+              <a:spcAft>
+                <a:spcPts val="300"/>
+              </a:spcAft>
+            </a:pPr>
+            <a:r>
+              <a:rPr sz="1200" b="0" i="1">
+                <a:solidFill>
+                  <a:srgbClr val="CCD6E8"/>
+                </a:solidFill>
+                <a:latin typeface="Alegreya Sans"/>
+              </a:rPr>
+              <a:t>AI Professional Certificate</a:t>
+            </a:r>
+          </a:p>
+          <a:p>
+            <a:pPr algn="l">
+              <a:spcAft>
+                <a:spcPts val="100"/>
+              </a:spcAft>
+            </a:pPr>
+            <a:r>
+              <a:rPr sz="1200" b="1" i="0">
+                <a:solidFill>
+                  <a:srgbClr val="FFFFFF"/>
+                </a:solidFill>
+                <a:latin typeface="Alegreya Sans"/>
+              </a:rPr>
+              <a:t>Certifications</a:t>
+            </a:r>
+          </a:p>
+          <a:p>
+            <a:pPr algn="l">
+              <a:spcAft>
+                <a:spcPts val="300"/>
+              </a:spcAft>
+            </a:pPr>
+            <a:r>
+              <a:rPr sz="1200" b="0" i="1">
+                <a:solidFill>
+                  <a:srgbClr val="CCD6E8"/>
+                </a:solidFill>
+                <a:latin typeface="Alegreya Sans"/>
+              </a:rPr>
+              <a:t>PRINCE2 · PL-900 · ACAMS · RGPD</a:t>
+            </a:r>
+          </a:p>
+          <a:p>
+            <a:pPr algn="l">
+              <a:spcBef>
+                <a:spcPts val="600"/>
+              </a:spcBef>
+              <a:spcAft>
+                <a:spcPts val="300"/>
+              </a:spcAft>
+            </a:pPr>
+            <a:r>
+              <a:rPr sz="1300" b="1" i="0">
+                <a:solidFill>
+                  <a:srgbClr val="3AEDE5"/>
+                </a:solidFill>
+                <a:latin typeface="Alegreya Sans"/>
+              </a:rPr>
               <a:t>ENGAGEMENTS &amp; RÉALISATIONS</a:t>
             </a:r>
           </a:p>
@@ -4508,7 +4790,7 @@
                 </a:solidFill>
                 <a:latin typeface="Alegreya Sans"/>
               </a:rPr>
-              <a:t>Cercles professionnels</a:t>
+              <a:t>Cercles pros</a:t>
             </a:r>
             <a:r>
               <a:rPr sz="1200" b="0" i="1">
@@ -4517,7 +4799,7 @@
                 </a:solidFill>
                 <a:latin typeface="Alegreya Sans"/>
               </a:rPr>
-              <a:t> — Membre UMBREX / VERITUX</a:t>
+              <a:t> — UMBREX / VERITUX</a:t>
             </a:r>
           </a:p>
           <a:p>
@@ -4542,7 +4824,7 @@
                 </a:solidFill>
                 <a:latin typeface="Alegreya Sans"/>
               </a:rPr>
-              <a:t>Intervenant / modérateur</a:t>
+              <a:t>Expert</a:t>
             </a:r>
             <a:r>
               <a:rPr sz="1200" b="0" i="1">
@@ -4551,7 +4833,7 @@
                 </a:solidFill>
                 <a:latin typeface="Alegreya Sans"/>
               </a:rPr>
-              <a:t> — AlphaSights, XpertsCouncil, Les BigBoss, GuidePoint</a:t>
+              <a:t> — AlphaSights, GuidePoint, BigBoss</a:t>
             </a:r>
           </a:p>
         </p:txBody>
@@ -4564,8 +4846,8 @@
         </p:nvSpPr>
         <p:spPr>
           <a:xfrm>
-            <a:off x="4528600" y="1180000"/>
-            <a:ext cx="7434800" cy="5318000"/>
+            <a:off x="4528600" y="1649900"/>
+            <a:ext cx="7434800" cy="4848100"/>
           </a:xfrm>
           <a:prstGeom prst="rect">
             <a:avLst/>
@@ -4658,7 +4940,7 @@
                 </a:solidFill>
                 <a:latin typeface="Alegreya Sans"/>
               </a:rPr>
-              <a:t>Contexte de reconstruction post-cyber et de refonte de la gouvernance IT : structuration et sécurisation de la trajectoire de transformation numérique à horizon 3 ans.</a:t>
+              <a:t>Reconstruction post-cyber et refonte de la gouvernance IT : structuration de la trajectoire de transformation numérique à horizon 3 ans.</a:t>
             </a:r>
           </a:p>
           <a:p>
@@ -4708,32 +4990,7 @@
                 </a:solidFill>
                 <a:latin typeface="Alegreya Sans"/>
               </a:rPr>
-              <a:t>Contribution à la conception de la vision cible du numérique et à la définition du futur rôle de la DSI Groupe.</a:t>
-            </a:r>
-          </a:p>
-          <a:p>
-            <a:pPr algn="l" lvl="1">
-              <a:spcAft>
-                <a:spcPts val="100"/>
-              </a:spcAft>
-            </a:pPr>
-            <a:r>
-              <a:rPr sz="1200" b="1" i="0">
-                <a:solidFill>
-                  <a:srgbClr val="3AEDE5"/>
-                </a:solidFill>
-                <a:latin typeface="Alegreya Sans"/>
-              </a:rPr>
-              <a:t>•  </a:t>
-            </a:r>
-            <a:r>
-              <a:rPr sz="1200" b="0" i="0">
-                <a:solidFill>
-                  <a:srgbClr val="FFFFFF"/>
-                </a:solidFill>
-                <a:latin typeface="Alegreya Sans"/>
-              </a:rPr>
-              <a:t>Élaboration du plan d'investissement IT pluriannuel et du cadre de gouvernance associé.</a:t>
+              <a:t>Conception de la vision cible du numérique, définition du futur rôle de la DSI Groupe et élaboration du plan d'investissement IT pluriannuel.</a:t>
             </a:r>
           </a:p>
           <a:p>
@@ -5275,7 +5532,7 @@
                 </a:solidFill>
                 <a:latin typeface="Alegreya Sans"/>
               </a:rPr>
-              <a:t>Pilotage de programmes et de projets IT : cadrage, gouvernance, feuille de route, PMO</a:t>
+              <a:t>Pilotage de programmes &amp; projets IT (PMO)</a:t>
             </a:r>
           </a:p>
           <a:p>
@@ -5300,7 +5557,7 @@
                 </a:solidFill>
                 <a:latin typeface="Alegreya Sans"/>
               </a:rPr>
-              <a:t>Secteurs : banque, secteur public, mobilités urbaines</a:t>
+              <a:t>Banque, secteur public, mobilités urbaines</a:t>
             </a:r>
           </a:p>
           <a:p>
@@ -5325,7 +5582,7 @@
                 </a:solidFill>
                 <a:latin typeface="Alegreya Sans"/>
               </a:rPr>
-              <a:t>Systèmes et solutions : paiements, cash management, ERP, CRM, Business Intelligence, KYC</a:t>
+              <a:t>Paiements, cash management, ERP, CRM, BI</a:t>
             </a:r>
           </a:p>
           <a:p>
@@ -5375,7 +5632,7 @@
                 </a:solidFill>
                 <a:latin typeface="Alegreya Sans"/>
               </a:rPr>
-              <a:t>Gouvernance, Data &amp; Compliance : KYC, BCBS 239, FINREP, Big Data (Hadoop)</a:t>
+              <a:t>KYC, BCBS 239, FINREP, Big Data (Hadoop)</a:t>
             </a:r>
           </a:p>
           <a:p>
@@ -5400,7 +5657,7 @@
                 </a:solidFill>
                 <a:latin typeface="Alegreya Sans"/>
               </a:rPr>
-              <a:t>Management &amp; accompagnement : formation d'équipes, conduite du changement</a:t>
+              <a:t>Conduite du changement &amp; formation</a:t>
             </a:r>
           </a:p>
           <a:p>
@@ -5497,6 +5754,226 @@
               <a:t>Espagnol — Courant</a:t>
             </a:r>
           </a:p>
+          <a:p>
+            <a:pPr algn="l">
+              <a:spcBef>
+                <a:spcPts val="600"/>
+              </a:spcBef>
+              <a:spcAft>
+                <a:spcPts val="300"/>
+              </a:spcAft>
+            </a:pPr>
+            <a:r>
+              <a:rPr sz="1300" b="1" i="0">
+                <a:solidFill>
+                  <a:srgbClr val="3AEDE5"/>
+                </a:solidFill>
+                <a:latin typeface="Alegreya Sans"/>
+              </a:rPr>
+              <a:t>FORMATION &amp; CERTIFICATIONS</a:t>
+            </a:r>
+          </a:p>
+          <a:p>
+            <a:pPr algn="l">
+              <a:spcAft>
+                <a:spcPts val="100"/>
+              </a:spcAft>
+            </a:pPr>
+            <a:r>
+              <a:rPr sz="1200" b="1" i="0">
+                <a:solidFill>
+                  <a:srgbClr val="3AEDE5"/>
+                </a:solidFill>
+                <a:latin typeface="Alegreya Sans"/>
+              </a:rPr>
+              <a:t>1996  </a:t>
+            </a:r>
+            <a:r>
+              <a:rPr sz="1200" b="1" i="0">
+                <a:solidFill>
+                  <a:srgbClr val="FFFFFF"/>
+                </a:solidFill>
+                <a:latin typeface="Alegreya Sans"/>
+              </a:rPr>
+              <a:t>EDHEC</a:t>
+            </a:r>
+          </a:p>
+          <a:p>
+            <a:pPr algn="l">
+              <a:spcAft>
+                <a:spcPts val="300"/>
+              </a:spcAft>
+            </a:pPr>
+            <a:r>
+              <a:rPr sz="1200" b="0" i="1">
+                <a:solidFill>
+                  <a:srgbClr val="CCD6E8"/>
+                </a:solidFill>
+                <a:latin typeface="Alegreya Sans"/>
+              </a:rPr>
+              <a:t>Master en Management (Grande École)</a:t>
+            </a:r>
+          </a:p>
+          <a:p>
+            <a:pPr algn="l">
+              <a:spcAft>
+                <a:spcPts val="100"/>
+              </a:spcAft>
+            </a:pPr>
+            <a:r>
+              <a:rPr sz="1200" b="1" i="0">
+                <a:solidFill>
+                  <a:srgbClr val="3AEDE5"/>
+                </a:solidFill>
+                <a:latin typeface="Alegreya Sans"/>
+              </a:rPr>
+              <a:t>2024  </a:t>
+            </a:r>
+            <a:r>
+              <a:rPr sz="1200" b="1" i="0">
+                <a:solidFill>
+                  <a:srgbClr val="FFFFFF"/>
+                </a:solidFill>
+                <a:latin typeface="Alegreya Sans"/>
+              </a:rPr>
+              <a:t>Google</a:t>
+            </a:r>
+          </a:p>
+          <a:p>
+            <a:pPr algn="l">
+              <a:spcAft>
+                <a:spcPts val="300"/>
+              </a:spcAft>
+            </a:pPr>
+            <a:r>
+              <a:rPr sz="1200" b="0" i="1">
+                <a:solidFill>
+                  <a:srgbClr val="CCD6E8"/>
+                </a:solidFill>
+                <a:latin typeface="Alegreya Sans"/>
+              </a:rPr>
+              <a:t>AI Professional Certificate</a:t>
+            </a:r>
+          </a:p>
+          <a:p>
+            <a:pPr algn="l">
+              <a:spcAft>
+                <a:spcPts val="100"/>
+              </a:spcAft>
+            </a:pPr>
+            <a:r>
+              <a:rPr sz="1200" b="1" i="0">
+                <a:solidFill>
+                  <a:srgbClr val="FFFFFF"/>
+                </a:solidFill>
+                <a:latin typeface="Alegreya Sans"/>
+              </a:rPr>
+              <a:t>Certifications</a:t>
+            </a:r>
+          </a:p>
+          <a:p>
+            <a:pPr algn="l">
+              <a:spcAft>
+                <a:spcPts val="300"/>
+              </a:spcAft>
+            </a:pPr>
+            <a:r>
+              <a:rPr sz="1200" b="0" i="1">
+                <a:solidFill>
+                  <a:srgbClr val="CCD6E8"/>
+                </a:solidFill>
+                <a:latin typeface="Alegreya Sans"/>
+              </a:rPr>
+              <a:t>PRINCE2 · PL-900 · ACAMS · RGPD</a:t>
+            </a:r>
+          </a:p>
+          <a:p>
+            <a:pPr algn="l">
+              <a:spcBef>
+                <a:spcPts val="600"/>
+              </a:spcBef>
+              <a:spcAft>
+                <a:spcPts val="300"/>
+              </a:spcAft>
+            </a:pPr>
+            <a:r>
+              <a:rPr sz="1300" b="1" i="0">
+                <a:solidFill>
+                  <a:srgbClr val="3AEDE5"/>
+                </a:solidFill>
+                <a:latin typeface="Alegreya Sans"/>
+              </a:rPr>
+              <a:t>ENGAGEMENTS &amp; RÉALISATIONS</a:t>
+            </a:r>
+          </a:p>
+          <a:p>
+            <a:pPr algn="l">
+              <a:spcAft>
+                <a:spcPts val="200"/>
+              </a:spcAft>
+            </a:pPr>
+            <a:r>
+              <a:rPr sz="1200" b="1" i="0">
+                <a:solidFill>
+                  <a:srgbClr val="3AEDE5"/>
+                </a:solidFill>
+                <a:latin typeface="Alegreya Sans"/>
+              </a:rPr>
+              <a:t>• </a:t>
+            </a:r>
+            <a:r>
+              <a:rPr sz="1200" b="1" i="0">
+                <a:solidFill>
+                  <a:srgbClr val="FFFFFF"/>
+                </a:solidFill>
+                <a:latin typeface="Alegreya Sans"/>
+              </a:rPr>
+              <a:t>Cercles pros</a:t>
+            </a:r>
+            <a:r>
+              <a:rPr sz="1200" b="0" i="1">
+                <a:solidFill>
+                  <a:srgbClr val="CCD6E8"/>
+                </a:solidFill>
+                <a:latin typeface="Alegreya Sans"/>
+              </a:rPr>
+              <a:t> — UMBREX / VERITUX</a:t>
+            </a:r>
+          </a:p>
+          <a:p>
+            <a:pPr algn="l">
+              <a:spcAft>
+                <a:spcPts val="200"/>
+              </a:spcAft>
+            </a:pPr>
+            <a:r>
+              <a:rPr sz="1200" b="1" i="0">
+                <a:solidFill>
+                  <a:srgbClr val="3AEDE5"/>
+                </a:solidFill>
+                <a:latin typeface="Alegreya Sans"/>
+              </a:rPr>
+              <a:t>• </a:t>
+            </a:r>
+            <a:r>
+              <a:rPr sz="1200" b="1" i="0">
+                <a:solidFill>
+                  <a:srgbClr val="FFFFFF"/>
+                </a:solidFill>
+                <a:latin typeface="Alegreya Sans"/>
+              </a:rPr>
+              <a:t>Expert</a:t>
+            </a:r>
+            <a:r>
+              <a:rPr sz="1200" b="0" i="1">
+                <a:solidFill>
+                  <a:srgbClr val="CCD6E8"/>
+                </a:solidFill>
+                <a:latin typeface="Alegreya Sans"/>
+              </a:rPr>
+              <a:t> — AlphaSights, GuidePoint, BigBoss</a:t>
+            </a:r>
+          </a:p>
         </p:txBody>
       </p:sp>
       <p:sp>
@@ -5507,8 +5984,8 @@
         </p:nvSpPr>
         <p:spPr>
           <a:xfrm>
-            <a:off x="4528600" y="1180000"/>
-            <a:ext cx="7434800" cy="5318000"/>
+            <a:off x="4528600" y="1649900"/>
+            <a:ext cx="7434800" cy="4848100"/>
           </a:xfrm>
           <a:prstGeom prst="rect">
             <a:avLst/>
@@ -6168,7 +6645,7 @@
                 </a:solidFill>
                 <a:latin typeface="Alegreya Sans"/>
               </a:rPr>
-              <a:t>Pilotage de programmes et de projets IT : cadrage, gouvernance, feuille de route, PMO</a:t>
+              <a:t>Pilotage de programmes &amp; projets IT (PMO)</a:t>
             </a:r>
           </a:p>
           <a:p>
@@ -6193,7 +6670,7 @@
                 </a:solidFill>
                 <a:latin typeface="Alegreya Sans"/>
               </a:rPr>
-              <a:t>Secteurs : banque, secteur public, mobilités urbaines</a:t>
+              <a:t>Banque, secteur public, mobilités urbaines</a:t>
             </a:r>
           </a:p>
           <a:p>
@@ -6218,7 +6695,7 @@
                 </a:solidFill>
                 <a:latin typeface="Alegreya Sans"/>
               </a:rPr>
-              <a:t>Systèmes et solutions : paiements, cash management, ERP, CRM, Business Intelligence, KYC</a:t>
+              <a:t>Paiements, cash management, ERP, CRM, BI</a:t>
             </a:r>
           </a:p>
           <a:p>
@@ -6268,7 +6745,7 @@
                 </a:solidFill>
                 <a:latin typeface="Alegreya Sans"/>
               </a:rPr>
-              <a:t>Gouvernance, Data &amp; Compliance : KYC, BCBS 239, FINREP, Big Data (Hadoop)</a:t>
+              <a:t>KYC, BCBS 239, FINREP, Big Data (Hadoop)</a:t>
             </a:r>
           </a:p>
           <a:p>
@@ -6293,7 +6770,7 @@
                 </a:solidFill>
                 <a:latin typeface="Alegreya Sans"/>
               </a:rPr>
-              <a:t>Management &amp; accompagnement : formation d'équipes, conduite du changement</a:t>
+              <a:t>Conduite du changement &amp; formation</a:t>
             </a:r>
           </a:p>
           <a:p>
@@ -6390,6 +6867,226 @@
               <a:t>Espagnol — Courant</a:t>
             </a:r>
           </a:p>
+          <a:p>
+            <a:pPr algn="l">
+              <a:spcBef>
+                <a:spcPts val="600"/>
+              </a:spcBef>
+              <a:spcAft>
+                <a:spcPts val="300"/>
+              </a:spcAft>
+            </a:pPr>
+            <a:r>
+              <a:rPr sz="1300" b="1" i="0">
+                <a:solidFill>
+                  <a:srgbClr val="3AEDE5"/>
+                </a:solidFill>
+                <a:latin typeface="Alegreya Sans"/>
+              </a:rPr>
+              <a:t>FORMATION &amp; CERTIFICATIONS</a:t>
+            </a:r>
+          </a:p>
+          <a:p>
+            <a:pPr algn="l">
+              <a:spcAft>
+                <a:spcPts val="100"/>
+              </a:spcAft>
+            </a:pPr>
+            <a:r>
+              <a:rPr sz="1200" b="1" i="0">
+                <a:solidFill>
+                  <a:srgbClr val="3AEDE5"/>
+                </a:solidFill>
+                <a:latin typeface="Alegreya Sans"/>
+              </a:rPr>
+              <a:t>1996  </a:t>
+            </a:r>
+            <a:r>
+              <a:rPr sz="1200" b="1" i="0">
+                <a:solidFill>
+                  <a:srgbClr val="FFFFFF"/>
+                </a:solidFill>
+                <a:latin typeface="Alegreya Sans"/>
+              </a:rPr>
+              <a:t>EDHEC</a:t>
+            </a:r>
+          </a:p>
+          <a:p>
+            <a:pPr algn="l">
+              <a:spcAft>
+                <a:spcPts val="300"/>
+              </a:spcAft>
+            </a:pPr>
+            <a:r>
+              <a:rPr sz="1200" b="0" i="1">
+                <a:solidFill>
+                  <a:srgbClr val="CCD6E8"/>
+                </a:solidFill>
+                <a:latin typeface="Alegreya Sans"/>
+              </a:rPr>
+              <a:t>Master en Management (Grande École)</a:t>
+            </a:r>
+          </a:p>
+          <a:p>
+            <a:pPr algn="l">
+              <a:spcAft>
+                <a:spcPts val="100"/>
+              </a:spcAft>
+            </a:pPr>
+            <a:r>
+              <a:rPr sz="1200" b="1" i="0">
+                <a:solidFill>
+                  <a:srgbClr val="3AEDE5"/>
+                </a:solidFill>
+                <a:latin typeface="Alegreya Sans"/>
+              </a:rPr>
+              <a:t>2024  </a:t>
+            </a:r>
+            <a:r>
+              <a:rPr sz="1200" b="1" i="0">
+                <a:solidFill>
+                  <a:srgbClr val="FFFFFF"/>
+                </a:solidFill>
+                <a:latin typeface="Alegreya Sans"/>
+              </a:rPr>
+              <a:t>Google</a:t>
+            </a:r>
+          </a:p>
+          <a:p>
+            <a:pPr algn="l">
+              <a:spcAft>
+                <a:spcPts val="300"/>
+              </a:spcAft>
+            </a:pPr>
+            <a:r>
+              <a:rPr sz="1200" b="0" i="1">
+                <a:solidFill>
+                  <a:srgbClr val="CCD6E8"/>
+                </a:solidFill>
+                <a:latin typeface="Alegreya Sans"/>
+              </a:rPr>
+              <a:t>AI Professional Certificate</a:t>
+            </a:r>
+          </a:p>
+          <a:p>
+            <a:pPr algn="l">
+              <a:spcAft>
+                <a:spcPts val="100"/>
+              </a:spcAft>
+            </a:pPr>
+            <a:r>
+              <a:rPr sz="1200" b="1" i="0">
+                <a:solidFill>
+                  <a:srgbClr val="FFFFFF"/>
+                </a:solidFill>
+                <a:latin typeface="Alegreya Sans"/>
+              </a:rPr>
+              <a:t>Certifications</a:t>
+            </a:r>
+          </a:p>
+          <a:p>
+            <a:pPr algn="l">
+              <a:spcAft>
+                <a:spcPts val="300"/>
+              </a:spcAft>
+            </a:pPr>
+            <a:r>
+              <a:rPr sz="1200" b="0" i="1">
+                <a:solidFill>
+                  <a:srgbClr val="CCD6E8"/>
+                </a:solidFill>
+                <a:latin typeface="Alegreya Sans"/>
+              </a:rPr>
+              <a:t>PRINCE2 · PL-900 · ACAMS · RGPD</a:t>
+            </a:r>
+          </a:p>
+          <a:p>
+            <a:pPr algn="l">
+              <a:spcBef>
+                <a:spcPts val="600"/>
+              </a:spcBef>
+              <a:spcAft>
+                <a:spcPts val="300"/>
+              </a:spcAft>
+            </a:pPr>
+            <a:r>
+              <a:rPr sz="1300" b="1" i="0">
+                <a:solidFill>
+                  <a:srgbClr val="3AEDE5"/>
+                </a:solidFill>
+                <a:latin typeface="Alegreya Sans"/>
+              </a:rPr>
+              <a:t>ENGAGEMENTS &amp; RÉALISATIONS</a:t>
+            </a:r>
+          </a:p>
+          <a:p>
+            <a:pPr algn="l">
+              <a:spcAft>
+                <a:spcPts val="200"/>
+              </a:spcAft>
+            </a:pPr>
+            <a:r>
+              <a:rPr sz="1200" b="1" i="0">
+                <a:solidFill>
+                  <a:srgbClr val="3AEDE5"/>
+                </a:solidFill>
+                <a:latin typeface="Alegreya Sans"/>
+              </a:rPr>
+              <a:t>• </a:t>
+            </a:r>
+            <a:r>
+              <a:rPr sz="1200" b="1" i="0">
+                <a:solidFill>
+                  <a:srgbClr val="FFFFFF"/>
+                </a:solidFill>
+                <a:latin typeface="Alegreya Sans"/>
+              </a:rPr>
+              <a:t>Cercles pros</a:t>
+            </a:r>
+            <a:r>
+              <a:rPr sz="1200" b="0" i="1">
+                <a:solidFill>
+                  <a:srgbClr val="CCD6E8"/>
+                </a:solidFill>
+                <a:latin typeface="Alegreya Sans"/>
+              </a:rPr>
+              <a:t> — UMBREX / VERITUX</a:t>
+            </a:r>
+          </a:p>
+          <a:p>
+            <a:pPr algn="l">
+              <a:spcAft>
+                <a:spcPts val="200"/>
+              </a:spcAft>
+            </a:pPr>
+            <a:r>
+              <a:rPr sz="1200" b="1" i="0">
+                <a:solidFill>
+                  <a:srgbClr val="3AEDE5"/>
+                </a:solidFill>
+                <a:latin typeface="Alegreya Sans"/>
+              </a:rPr>
+              <a:t>• </a:t>
+            </a:r>
+            <a:r>
+              <a:rPr sz="1200" b="1" i="0">
+                <a:solidFill>
+                  <a:srgbClr val="FFFFFF"/>
+                </a:solidFill>
+                <a:latin typeface="Alegreya Sans"/>
+              </a:rPr>
+              <a:t>Expert</a:t>
+            </a:r>
+            <a:r>
+              <a:rPr sz="1200" b="0" i="1">
+                <a:solidFill>
+                  <a:srgbClr val="CCD6E8"/>
+                </a:solidFill>
+                <a:latin typeface="Alegreya Sans"/>
+              </a:rPr>
+              <a:t> — AlphaSights, GuidePoint, BigBoss</a:t>
+            </a:r>
+          </a:p>
         </p:txBody>
       </p:sp>
       <p:sp>
@@ -6400,8 +7097,8 @@
         </p:nvSpPr>
         <p:spPr>
           <a:xfrm>
-            <a:off x="4528600" y="1180000"/>
-            <a:ext cx="7434800" cy="5318000"/>
+            <a:off x="4528600" y="1649900"/>
+            <a:ext cx="7434800" cy="4848100"/>
           </a:xfrm>
           <a:prstGeom prst="rect">
             <a:avLst/>
@@ -7011,7 +7708,7 @@
                 </a:solidFill>
                 <a:latin typeface="Alegreya Sans"/>
               </a:rPr>
-              <a:t>Pilotage de programmes et de projets IT : cadrage, gouvernance, feuille de route, PMO</a:t>
+              <a:t>Pilotage de programmes &amp; projets IT (PMO)</a:t>
             </a:r>
           </a:p>
           <a:p>
@@ -7036,7 +7733,7 @@
                 </a:solidFill>
                 <a:latin typeface="Alegreya Sans"/>
               </a:rPr>
-              <a:t>Secteurs : banque, secteur public, mobilités urbaines</a:t>
+              <a:t>Banque, secteur public, mobilités urbaines</a:t>
             </a:r>
           </a:p>
           <a:p>
@@ -7061,7 +7758,7 @@
                 </a:solidFill>
                 <a:latin typeface="Alegreya Sans"/>
               </a:rPr>
-              <a:t>Systèmes et solutions : paiements, cash management, ERP, CRM, Business Intelligence, KYC</a:t>
+              <a:t>Paiements, cash management, ERP, CRM, BI</a:t>
             </a:r>
           </a:p>
           <a:p>
@@ -7111,7 +7808,7 @@
                 </a:solidFill>
                 <a:latin typeface="Alegreya Sans"/>
               </a:rPr>
-              <a:t>Gouvernance, Data &amp; Compliance : KYC, BCBS 239, FINREP, Big Data (Hadoop)</a:t>
+              <a:t>KYC, BCBS 239, FINREP, Big Data (Hadoop)</a:t>
             </a:r>
           </a:p>
           <a:p>
@@ -7136,7 +7833,7 @@
                 </a:solidFill>
                 <a:latin typeface="Alegreya Sans"/>
               </a:rPr>
-              <a:t>Management &amp; accompagnement : formation d'équipes, conduite du changement</a:t>
+              <a:t>Conduite du changement &amp; formation</a:t>
             </a:r>
           </a:p>
           <a:p>
@@ -7233,6 +7930,226 @@
               <a:t>Espagnol — Courant</a:t>
             </a:r>
           </a:p>
+          <a:p>
+            <a:pPr algn="l">
+              <a:spcBef>
+                <a:spcPts val="600"/>
+              </a:spcBef>
+              <a:spcAft>
+                <a:spcPts val="300"/>
+              </a:spcAft>
+            </a:pPr>
+            <a:r>
+              <a:rPr sz="1300" b="1" i="0">
+                <a:solidFill>
+                  <a:srgbClr val="3AEDE5"/>
+                </a:solidFill>
+                <a:latin typeface="Alegreya Sans"/>
+              </a:rPr>
+              <a:t>FORMATION &amp; CERTIFICATIONS</a:t>
+            </a:r>
+          </a:p>
+          <a:p>
+            <a:pPr algn="l">
+              <a:spcAft>
+                <a:spcPts val="100"/>
+              </a:spcAft>
+            </a:pPr>
+            <a:r>
+              <a:rPr sz="1200" b="1" i="0">
+                <a:solidFill>
+                  <a:srgbClr val="3AEDE5"/>
+                </a:solidFill>
+                <a:latin typeface="Alegreya Sans"/>
+              </a:rPr>
+              <a:t>1996  </a:t>
+            </a:r>
+            <a:r>
+              <a:rPr sz="1200" b="1" i="0">
+                <a:solidFill>
+                  <a:srgbClr val="FFFFFF"/>
+                </a:solidFill>
+                <a:latin typeface="Alegreya Sans"/>
+              </a:rPr>
+              <a:t>EDHEC</a:t>
+            </a:r>
+          </a:p>
+          <a:p>
+            <a:pPr algn="l">
+              <a:spcAft>
+                <a:spcPts val="300"/>
+              </a:spcAft>
+            </a:pPr>
+            <a:r>
+              <a:rPr sz="1200" b="0" i="1">
+                <a:solidFill>
+                  <a:srgbClr val="CCD6E8"/>
+                </a:solidFill>
+                <a:latin typeface="Alegreya Sans"/>
+              </a:rPr>
+              <a:t>Master en Management (Grande École)</a:t>
+            </a:r>
+          </a:p>
+          <a:p>
+            <a:pPr algn="l">
+              <a:spcAft>
+                <a:spcPts val="100"/>
+              </a:spcAft>
+            </a:pPr>
+            <a:r>
+              <a:rPr sz="1200" b="1" i="0">
+                <a:solidFill>
+                  <a:srgbClr val="3AEDE5"/>
+                </a:solidFill>
+                <a:latin typeface="Alegreya Sans"/>
+              </a:rPr>
+              <a:t>2024  </a:t>
+            </a:r>
+            <a:r>
+              <a:rPr sz="1200" b="1" i="0">
+                <a:solidFill>
+                  <a:srgbClr val="FFFFFF"/>
+                </a:solidFill>
+                <a:latin typeface="Alegreya Sans"/>
+              </a:rPr>
+              <a:t>Google</a:t>
+            </a:r>
+          </a:p>
+          <a:p>
+            <a:pPr algn="l">
+              <a:spcAft>
+                <a:spcPts val="300"/>
+              </a:spcAft>
+            </a:pPr>
+            <a:r>
+              <a:rPr sz="1200" b="0" i="1">
+                <a:solidFill>
+                  <a:srgbClr val="CCD6E8"/>
+                </a:solidFill>
+                <a:latin typeface="Alegreya Sans"/>
+              </a:rPr>
+              <a:t>AI Professional Certificate</a:t>
+            </a:r>
+          </a:p>
+          <a:p>
+            <a:pPr algn="l">
+              <a:spcAft>
+                <a:spcPts val="100"/>
+              </a:spcAft>
+            </a:pPr>
+            <a:r>
+              <a:rPr sz="1200" b="1" i="0">
+                <a:solidFill>
+                  <a:srgbClr val="FFFFFF"/>
+                </a:solidFill>
+                <a:latin typeface="Alegreya Sans"/>
+              </a:rPr>
+              <a:t>Certifications</a:t>
+            </a:r>
+          </a:p>
+          <a:p>
+            <a:pPr algn="l">
+              <a:spcAft>
+                <a:spcPts val="300"/>
+              </a:spcAft>
+            </a:pPr>
+            <a:r>
+              <a:rPr sz="1200" b="0" i="1">
+                <a:solidFill>
+                  <a:srgbClr val="CCD6E8"/>
+                </a:solidFill>
+                <a:latin typeface="Alegreya Sans"/>
+              </a:rPr>
+              <a:t>PRINCE2 · PL-900 · ACAMS · RGPD</a:t>
+            </a:r>
+          </a:p>
+          <a:p>
+            <a:pPr algn="l">
+              <a:spcBef>
+                <a:spcPts val="600"/>
+              </a:spcBef>
+              <a:spcAft>
+                <a:spcPts val="300"/>
+              </a:spcAft>
+            </a:pPr>
+            <a:r>
+              <a:rPr sz="1300" b="1" i="0">
+                <a:solidFill>
+                  <a:srgbClr val="3AEDE5"/>
+                </a:solidFill>
+                <a:latin typeface="Alegreya Sans"/>
+              </a:rPr>
+              <a:t>ENGAGEMENTS &amp; RÉALISATIONS</a:t>
+            </a:r>
+          </a:p>
+          <a:p>
+            <a:pPr algn="l">
+              <a:spcAft>
+                <a:spcPts val="200"/>
+              </a:spcAft>
+            </a:pPr>
+            <a:r>
+              <a:rPr sz="1200" b="1" i="0">
+                <a:solidFill>
+                  <a:srgbClr val="3AEDE5"/>
+                </a:solidFill>
+                <a:latin typeface="Alegreya Sans"/>
+              </a:rPr>
+              <a:t>• </a:t>
+            </a:r>
+            <a:r>
+              <a:rPr sz="1200" b="1" i="0">
+                <a:solidFill>
+                  <a:srgbClr val="FFFFFF"/>
+                </a:solidFill>
+                <a:latin typeface="Alegreya Sans"/>
+              </a:rPr>
+              <a:t>Cercles pros</a:t>
+            </a:r>
+            <a:r>
+              <a:rPr sz="1200" b="0" i="1">
+                <a:solidFill>
+                  <a:srgbClr val="CCD6E8"/>
+                </a:solidFill>
+                <a:latin typeface="Alegreya Sans"/>
+              </a:rPr>
+              <a:t> — UMBREX / VERITUX</a:t>
+            </a:r>
+          </a:p>
+          <a:p>
+            <a:pPr algn="l">
+              <a:spcAft>
+                <a:spcPts val="200"/>
+              </a:spcAft>
+            </a:pPr>
+            <a:r>
+              <a:rPr sz="1200" b="1" i="0">
+                <a:solidFill>
+                  <a:srgbClr val="3AEDE5"/>
+                </a:solidFill>
+                <a:latin typeface="Alegreya Sans"/>
+              </a:rPr>
+              <a:t>• </a:t>
+            </a:r>
+            <a:r>
+              <a:rPr sz="1200" b="1" i="0">
+                <a:solidFill>
+                  <a:srgbClr val="FFFFFF"/>
+                </a:solidFill>
+                <a:latin typeface="Alegreya Sans"/>
+              </a:rPr>
+              <a:t>Expert</a:t>
+            </a:r>
+            <a:r>
+              <a:rPr sz="1200" b="0" i="1">
+                <a:solidFill>
+                  <a:srgbClr val="CCD6E8"/>
+                </a:solidFill>
+                <a:latin typeface="Alegreya Sans"/>
+              </a:rPr>
+              <a:t> — AlphaSights, GuidePoint, BigBoss</a:t>
+            </a:r>
+          </a:p>
         </p:txBody>
       </p:sp>
       <p:sp>
@@ -7243,8 +8160,8 @@
         </p:nvSpPr>
         <p:spPr>
           <a:xfrm>
-            <a:off x="4528600" y="1180000"/>
-            <a:ext cx="7434800" cy="5318000"/>
+            <a:off x="4528600" y="1649900"/>
+            <a:ext cx="7434800" cy="4848100"/>
           </a:xfrm>
           <a:prstGeom prst="rect">
             <a:avLst/>
